--- a/output/wordlabs-de-prefix-3day.pptx
+++ b/output/wordlabs-de-prefix-3day.pptx
@@ -4240,7 +4240,7 @@
                 <a:ea typeface="Calibri" pitchFamily="34" charset="-122"/>
                 <a:cs typeface="Calibri" pitchFamily="34" charset="-120"/>
               </a:rPr>
-              <a:t>"down, away, undo, remove"</a:t>
+              <a:t>"down, away, remove, reverse"</a:t>
             </a:r>
             <a:endParaRPr lang="en-US" sz="2200" dirty="0"/>
           </a:p>
@@ -5288,7 +5288,7 @@
                 <a:ea typeface="Calibri" pitchFamily="34" charset="-122"/>
                 <a:cs typeface="Calibri" pitchFamily="34" charset="-120"/>
               </a:rPr>
-              <a:t>Word Labs  •  wordlabs.app  •  Prefix: 'de-' = down, away, undo, remove</a:t>
+              <a:t>Word Labs  •  wordlabs.app  •  Prefix: 'de-' = down, away, remove, reverse</a:t>
             </a:r>
             <a:endParaRPr lang="en-US" sz="800" dirty="0"/>
           </a:p>
@@ -5928,7 +5928,7 @@
                 <a:ea typeface="Calibri" pitchFamily="34" charset="-122"/>
                 <a:cs typeface="Calibri" pitchFamily="34" charset="-120"/>
               </a:rPr>
-              <a:t>Word Labs  •  wordlabs.app  •  Prefix: 'de-' = down, away, undo, remove</a:t>
+              <a:t>Word Labs  •  wordlabs.app  •  Prefix: 'de-' = down, away, remove, reverse</a:t>
             </a:r>
             <a:endParaRPr lang="en-US" sz="800" dirty="0"/>
           </a:p>
@@ -6040,7 +6040,7 @@
                 <a:ea typeface="Calibri" pitchFamily="34" charset="-122"/>
                 <a:cs typeface="Calibri" pitchFamily="34" charset="-120"/>
               </a:rPr>
-              <a:t>Can you </a:t>
+              <a:t>The engineer had to </a:t>
             </a:r>
             <a:pPr algn="l" indent="0" marL="0">
               <a:buNone/>
@@ -6057,7 +6057,7 @@
                 <a:ea typeface="Calibri" pitchFamily="34" charset="-122"/>
                 <a:cs typeface="Calibri" pitchFamily="34" charset="-120"/>
               </a:rPr>
-              <a:t>decode</a:t>
+              <a:t>deactivate</a:t>
             </a:r>
             <a:pPr algn="l" indent="0" marL="0">
               <a:buNone/>
@@ -6071,7 +6071,7 @@
                 <a:ea typeface="Calibri" pitchFamily="34" charset="-122"/>
                 <a:cs typeface="Calibri" pitchFamily="34" charset="-120"/>
               </a:rPr>
-              <a:t> the message before the train </a:t>
+              <a:t> the alarm before she could begin </a:t>
             </a:r>
             <a:pPr algn="l" indent="0" marL="0">
               <a:buNone/>
@@ -6088,7 +6088,7 @@
                 <a:ea typeface="Calibri" pitchFamily="34" charset="-122"/>
                 <a:cs typeface="Calibri" pitchFamily="34" charset="-120"/>
               </a:rPr>
-              <a:t>departs</a:t>
+              <a:t>decoding</a:t>
             </a:r>
             <a:pPr algn="l" indent="0" marL="0">
               <a:buNone/>
@@ -6102,7 +6102,7 @@
                 <a:ea typeface="Calibri" pitchFamily="34" charset="-122"/>
                 <a:cs typeface="Calibri" pitchFamily="34" charset="-120"/>
               </a:rPr>
-              <a:t>?</a:t>
+              <a:t> the signal.</a:t>
             </a:r>
             <a:endParaRPr lang="en-US" sz="1800" dirty="0"/>
           </a:p>
@@ -6257,7 +6257,7 @@
                 <a:ea typeface="Trebuchet MS" pitchFamily="34" charset="-122"/>
                 <a:cs typeface="Trebuchet MS" pitchFamily="34" charset="-120"/>
               </a:rPr>
-              <a:t>decode</a:t>
+              <a:t>deactivate</a:t>
             </a:r>
             <a:endParaRPr lang="en-US" sz="1400" dirty="0"/>
           </a:p>
@@ -6385,7 +6385,7 @@
                 <a:ea typeface="Trebuchet MS" pitchFamily="34" charset="-122"/>
                 <a:cs typeface="Trebuchet MS" pitchFamily="34" charset="-120"/>
               </a:rPr>
-              <a:t>departs</a:t>
+              <a:t>decoding</a:t>
             </a:r>
             <a:endParaRPr lang="en-US" sz="1400" dirty="0"/>
           </a:p>
@@ -6716,7 +6716,7 @@
                 <a:ea typeface="Calibri" pitchFamily="34" charset="-122"/>
                 <a:cs typeface="Calibri" pitchFamily="34" charset="-120"/>
               </a:rPr>
-              <a:t>Word Labs  •  wordlabs.app  •  Prefix: 'de-' = down, away, undo, remove</a:t>
+              <a:t>Word Labs  •  wordlabs.app  •  Prefix: 'de-' = down, away, remove, reverse</a:t>
             </a:r>
             <a:endParaRPr lang="en-US" sz="800" dirty="0"/>
           </a:p>
@@ -6855,7 +6855,7 @@
                 <a:ea typeface="Trebuchet MS" pitchFamily="34" charset="-122"/>
                 <a:cs typeface="Trebuchet MS" pitchFamily="34" charset="-120"/>
               </a:rPr>
-              <a:t>decode</a:t>
+              <a:t>deactivate</a:t>
             </a:r>
             <a:endParaRPr lang="en-US" sz="2800" dirty="0"/>
           </a:p>
@@ -7543,7 +7543,7 @@
                 <a:ea typeface="Calibri" pitchFamily="34" charset="-122"/>
                 <a:cs typeface="Calibri" pitchFamily="34" charset="-120"/>
               </a:rPr>
-              <a:t>Word Labs  •  wordlabs.app  •  Prefix: 'de-' = down, away, undo, remove</a:t>
+              <a:t>Word Labs  •  wordlabs.app  •  Prefix: 'de-' = down, away, remove, reverse</a:t>
             </a:r>
             <a:endParaRPr lang="en-US" sz="800" dirty="0"/>
           </a:p>
@@ -7682,7 +7682,7 @@
                 <a:ea typeface="Trebuchet MS" pitchFamily="34" charset="-122"/>
                 <a:cs typeface="Trebuchet MS" pitchFamily="34" charset="-120"/>
               </a:rPr>
-              <a:t>decode</a:t>
+              <a:t>deactivate</a:t>
             </a:r>
             <a:endParaRPr lang="en-US" sz="2800" dirty="0"/>
           </a:p>
@@ -7762,7 +7762,7 @@
         </p:nvSpPr>
         <p:spPr>
           <a:xfrm>
-            <a:off x="2938272" y="2258568"/>
+            <a:off x="2221992" y="2258568"/>
             <a:ext cx="1828800" cy="292608"/>
           </a:xfrm>
           <a:prstGeom prst="rect">
@@ -7796,7 +7796,7 @@
         </p:nvSpPr>
         <p:spPr>
           <a:xfrm>
-            <a:off x="2938272" y="2258568"/>
+            <a:off x="2221992" y="2258568"/>
             <a:ext cx="1828800" cy="292608"/>
           </a:xfrm>
           <a:prstGeom prst="rect">
@@ -7835,7 +7835,7 @@
         </p:nvSpPr>
         <p:spPr>
           <a:xfrm>
-            <a:off x="2938272" y="2569464"/>
+            <a:off x="2221992" y="2569464"/>
             <a:ext cx="1828800" cy="201168"/>
           </a:xfrm>
           <a:prstGeom prst="rect">
@@ -7860,7 +7860,7 @@
                 <a:ea typeface="Calibri" pitchFamily="34" charset="-122"/>
                 <a:cs typeface="Calibri" pitchFamily="34" charset="-120"/>
               </a:rPr>
-              <a:t>undo, reverse</a:t>
+              <a:t>remove, reverse</a:t>
             </a:r>
             <a:endParaRPr lang="en-US" sz="850" dirty="0"/>
           </a:p>
@@ -7874,7 +7874,7 @@
         </p:nvSpPr>
         <p:spPr>
           <a:xfrm>
-            <a:off x="5803392" y="2258568"/>
+            <a:off x="4370832" y="2258568"/>
             <a:ext cx="1828800" cy="292608"/>
           </a:xfrm>
           <a:prstGeom prst="rect">
@@ -7908,7 +7908,7 @@
         </p:nvSpPr>
         <p:spPr>
           <a:xfrm>
-            <a:off x="5803392" y="2258568"/>
+            <a:off x="4370832" y="2258568"/>
             <a:ext cx="1828800" cy="292608"/>
           </a:xfrm>
           <a:prstGeom prst="rect">
@@ -7933,7 +7933,7 @@
                 <a:ea typeface="Trebuchet MS" pitchFamily="34" charset="-122"/>
                 <a:cs typeface="Trebuchet MS" pitchFamily="34" charset="-120"/>
               </a:rPr>
-              <a:t>code</a:t>
+              <a:t>activ</a:t>
             </a:r>
             <a:endParaRPr lang="en-US" sz="1300" dirty="0"/>
           </a:p>
@@ -7947,7 +7947,7 @@
         </p:nvSpPr>
         <p:spPr>
           <a:xfrm>
-            <a:off x="5803392" y="2569464"/>
+            <a:off x="4370832" y="2569464"/>
             <a:ext cx="1828800" cy="201168"/>
           </a:xfrm>
           <a:prstGeom prst="rect">
@@ -7972,7 +7972,7 @@
                 <a:ea typeface="Calibri" pitchFamily="34" charset="-122"/>
                 <a:cs typeface="Calibri" pitchFamily="34" charset="-120"/>
               </a:rPr>
-              <a:t>a system of hidden symbols or words</a:t>
+              <a:t>active, doing</a:t>
             </a:r>
             <a:endParaRPr lang="en-US" sz="850" dirty="0"/>
           </a:p>
@@ -7981,6 +7981,118 @@
       <p:sp>
         <p:nvSpPr>
           <p:cNvPr id="22" name="Shape 20"/>
+          <p:cNvSpPr/>
+          <p:nvPr/>
+        </p:nvSpPr>
+        <p:spPr>
+          <a:xfrm>
+            <a:off x="6519672" y="2258568"/>
+            <a:ext cx="1828800" cy="292608"/>
+          </a:xfrm>
+          <a:prstGeom prst="rect">
+            <a:avLst>
+              <a:gd name="adj" fmla="val 25000"/>
+            </a:avLst>
+          </a:prstGeom>
+          <a:solidFill>
+            <a:srgbClr val="FCE7F3"/>
+          </a:solidFill>
+          <a:ln w="19050">
+            <a:solidFill>
+              <a:srgbClr val="DB2777"/>
+            </a:solidFill>
+            <a:prstDash val="solid"/>
+          </a:ln>
+          <a:effectLst>
+            <a:outerShdw sx="100000" sy="100000" kx="0" ky="0" algn="bl" rotWithShape="0" blurRad="101600" dist="38100" dir="8100000">
+              <a:srgbClr val="000000">
+                <a:alpha val="12000"/>
+              </a:srgbClr>
+            </a:outerShdw>
+          </a:effectLst>
+        </p:spPr>
+      </p:sp>
+      <p:sp>
+        <p:nvSpPr>
+          <p:cNvPr id="23" name="Text 21"/>
+          <p:cNvSpPr/>
+          <p:nvPr/>
+        </p:nvSpPr>
+        <p:spPr>
+          <a:xfrm>
+            <a:off x="6519672" y="2258568"/>
+            <a:ext cx="1828800" cy="292608"/>
+          </a:xfrm>
+          <a:prstGeom prst="rect">
+            <a:avLst/>
+          </a:prstGeom>
+          <a:noFill/>
+          <a:ln/>
+        </p:spPr>
+        <p:txBody>
+          <a:bodyPr wrap="square" lIns="0" tIns="0" rIns="0" bIns="0" rtlCol="0" anchor="ctr"/>
+          <a:lstStyle/>
+          <a:p>
+            <a:pPr algn="ctr" indent="0" marL="0">
+              <a:buNone/>
+            </a:pPr>
+            <a:r>
+              <a:rPr lang="en-US" sz="1300" b="1" dirty="0">
+                <a:solidFill>
+                  <a:srgbClr val="9D174D"/>
+                </a:solidFill>
+                <a:latin typeface="Trebuchet MS" pitchFamily="34" charset="0"/>
+                <a:ea typeface="Trebuchet MS" pitchFamily="34" charset="-122"/>
+                <a:cs typeface="Trebuchet MS" pitchFamily="34" charset="-120"/>
+              </a:rPr>
+              <a:t>ate</a:t>
+            </a:r>
+            <a:endParaRPr lang="en-US" sz="1300" dirty="0"/>
+          </a:p>
+        </p:txBody>
+      </p:sp>
+      <p:sp>
+        <p:nvSpPr>
+          <p:cNvPr id="24" name="Text 22"/>
+          <p:cNvSpPr/>
+          <p:nvPr/>
+        </p:nvSpPr>
+        <p:spPr>
+          <a:xfrm>
+            <a:off x="6519672" y="2569464"/>
+            <a:ext cx="1828800" cy="201168"/>
+          </a:xfrm>
+          <a:prstGeom prst="rect">
+            <a:avLst/>
+          </a:prstGeom>
+          <a:noFill/>
+          <a:ln/>
+        </p:spPr>
+        <p:txBody>
+          <a:bodyPr wrap="square" lIns="0" tIns="0" rIns="0" bIns="0" rtlCol="0" anchor="t"/>
+          <a:lstStyle/>
+          <a:p>
+            <a:pPr algn="ctr" indent="0" marL="0">
+              <a:buNone/>
+            </a:pPr>
+            <a:r>
+              <a:rPr lang="en-US" sz="850" dirty="0">
+                <a:solidFill>
+                  <a:srgbClr val="475569"/>
+                </a:solidFill>
+                <a:latin typeface="Calibri" pitchFamily="34" charset="0"/>
+                <a:ea typeface="Calibri" pitchFamily="34" charset="-122"/>
+                <a:cs typeface="Calibri" pitchFamily="34" charset="-120"/>
+              </a:rPr>
+              <a:t>makes a verb</a:t>
+            </a:r>
+            <a:endParaRPr lang="en-US" sz="850" dirty="0"/>
+          </a:p>
+        </p:txBody>
+      </p:sp>
+      <p:sp>
+        <p:nvSpPr>
+          <p:cNvPr id="25" name="Shape 23"/>
           <p:cNvSpPr/>
           <p:nvPr/>
         </p:nvSpPr>
@@ -8007,7 +8119,7 @@
       </p:sp>
       <p:sp>
         <p:nvSpPr>
-          <p:cNvPr id="23" name="Text 21"/>
+          <p:cNvPr id="26" name="Text 24"/>
           <p:cNvSpPr/>
           <p:nvPr/>
         </p:nvSpPr>
@@ -8046,7 +8158,7 @@
       </p:sp>
       <p:sp>
         <p:nvSpPr>
-          <p:cNvPr id="24" name="Shape 22"/>
+          <p:cNvPr id="27" name="Shape 25"/>
           <p:cNvSpPr/>
           <p:nvPr/>
         </p:nvSpPr>
@@ -8073,7 +8185,7 @@
       </p:sp>
       <p:sp>
         <p:nvSpPr>
-          <p:cNvPr id="25" name="Text 23"/>
+          <p:cNvPr id="28" name="Text 26"/>
           <p:cNvSpPr/>
           <p:nvPr/>
         </p:nvSpPr>
@@ -8112,7 +8224,7 @@
       </p:sp>
       <p:sp>
         <p:nvSpPr>
-          <p:cNvPr id="26" name="Shape 24"/>
+          <p:cNvPr id="29" name="Shape 27"/>
           <p:cNvSpPr/>
           <p:nvPr/>
         </p:nvSpPr>
@@ -8139,7 +8251,7 @@
       </p:sp>
       <p:sp>
         <p:nvSpPr>
-          <p:cNvPr id="27" name="Text 25"/>
+          <p:cNvPr id="30" name="Text 28"/>
           <p:cNvSpPr/>
           <p:nvPr/>
         </p:nvSpPr>
@@ -8178,7 +8290,7 @@
       </p:sp>
       <p:sp>
         <p:nvSpPr>
-          <p:cNvPr id="28" name="Shape 26"/>
+          <p:cNvPr id="31" name="Shape 29"/>
           <p:cNvSpPr/>
           <p:nvPr/>
         </p:nvSpPr>
@@ -8205,7 +8317,7 @@
       </p:sp>
       <p:sp>
         <p:nvSpPr>
-          <p:cNvPr id="29" name="Text 27"/>
+          <p:cNvPr id="32" name="Text 30"/>
           <p:cNvSpPr/>
           <p:nvPr/>
         </p:nvSpPr>
@@ -8528,7 +8640,7 @@
                 <a:ea typeface="Calibri" pitchFamily="34" charset="-122"/>
                 <a:cs typeface="Calibri" pitchFamily="34" charset="-120"/>
               </a:rPr>
-              <a:t>Word Labs  •  wordlabs.app  •  Prefix: 'de-' = down, away, undo, remove</a:t>
+              <a:t>Word Labs  •  wordlabs.app  •  Prefix: 'de-' = down, away, remove, reverse</a:t>
             </a:r>
             <a:endParaRPr lang="en-US" sz="800" dirty="0"/>
           </a:p>
@@ -8667,7 +8779,7 @@
                 <a:ea typeface="Trebuchet MS" pitchFamily="34" charset="-122"/>
                 <a:cs typeface="Trebuchet MS" pitchFamily="34" charset="-120"/>
               </a:rPr>
-              <a:t>decode</a:t>
+              <a:t>deactivate</a:t>
             </a:r>
             <a:endParaRPr lang="en-US" sz="2800" dirty="0"/>
           </a:p>
@@ -8747,7 +8859,7 @@
         </p:nvSpPr>
         <p:spPr>
           <a:xfrm>
-            <a:off x="2938272" y="2258568"/>
+            <a:off x="2221992" y="2258568"/>
             <a:ext cx="1828800" cy="292608"/>
           </a:xfrm>
           <a:prstGeom prst="rect">
@@ -8781,7 +8893,7 @@
         </p:nvSpPr>
         <p:spPr>
           <a:xfrm>
-            <a:off x="2938272" y="2258568"/>
+            <a:off x="2221992" y="2258568"/>
             <a:ext cx="1828800" cy="292608"/>
           </a:xfrm>
           <a:prstGeom prst="rect">
@@ -8820,7 +8932,7 @@
         </p:nvSpPr>
         <p:spPr>
           <a:xfrm>
-            <a:off x="2938272" y="2569464"/>
+            <a:off x="2221992" y="2569464"/>
             <a:ext cx="1828800" cy="201168"/>
           </a:xfrm>
           <a:prstGeom prst="rect">
@@ -8845,7 +8957,7 @@
                 <a:ea typeface="Calibri" pitchFamily="34" charset="-122"/>
                 <a:cs typeface="Calibri" pitchFamily="34" charset="-120"/>
               </a:rPr>
-              <a:t>undo, reverse</a:t>
+              <a:t>remove, reverse</a:t>
             </a:r>
             <a:endParaRPr lang="en-US" sz="850" dirty="0"/>
           </a:p>
@@ -8859,7 +8971,7 @@
         </p:nvSpPr>
         <p:spPr>
           <a:xfrm>
-            <a:off x="5803392" y="2258568"/>
+            <a:off x="4370832" y="2258568"/>
             <a:ext cx="1828800" cy="292608"/>
           </a:xfrm>
           <a:prstGeom prst="rect">
@@ -8893,7 +9005,7 @@
         </p:nvSpPr>
         <p:spPr>
           <a:xfrm>
-            <a:off x="5803392" y="2258568"/>
+            <a:off x="4370832" y="2258568"/>
             <a:ext cx="1828800" cy="292608"/>
           </a:xfrm>
           <a:prstGeom prst="rect">
@@ -8918,7 +9030,7 @@
                 <a:ea typeface="Trebuchet MS" pitchFamily="34" charset="-122"/>
                 <a:cs typeface="Trebuchet MS" pitchFamily="34" charset="-120"/>
               </a:rPr>
-              <a:t>code</a:t>
+              <a:t>activ</a:t>
             </a:r>
             <a:endParaRPr lang="en-US" sz="1300" dirty="0"/>
           </a:p>
@@ -8932,7 +9044,7 @@
         </p:nvSpPr>
         <p:spPr>
           <a:xfrm>
-            <a:off x="5803392" y="2569464"/>
+            <a:off x="4370832" y="2569464"/>
             <a:ext cx="1828800" cy="201168"/>
           </a:xfrm>
           <a:prstGeom prst="rect">
@@ -8957,7 +9069,7 @@
                 <a:ea typeface="Calibri" pitchFamily="34" charset="-122"/>
                 <a:cs typeface="Calibri" pitchFamily="34" charset="-120"/>
               </a:rPr>
-              <a:t>a system of hidden symbols or words</a:t>
+              <a:t>active, doing</a:t>
             </a:r>
             <a:endParaRPr lang="en-US" sz="850" dirty="0"/>
           </a:p>
@@ -8966,6 +9078,118 @@
       <p:sp>
         <p:nvSpPr>
           <p:cNvPr id="22" name="Shape 20"/>
+          <p:cNvSpPr/>
+          <p:nvPr/>
+        </p:nvSpPr>
+        <p:spPr>
+          <a:xfrm>
+            <a:off x="6519672" y="2258568"/>
+            <a:ext cx="1828800" cy="292608"/>
+          </a:xfrm>
+          <a:prstGeom prst="rect">
+            <a:avLst>
+              <a:gd name="adj" fmla="val 25000"/>
+            </a:avLst>
+          </a:prstGeom>
+          <a:solidFill>
+            <a:srgbClr val="FCE7F3"/>
+          </a:solidFill>
+          <a:ln w="19050">
+            <a:solidFill>
+              <a:srgbClr val="DB2777"/>
+            </a:solidFill>
+            <a:prstDash val="solid"/>
+          </a:ln>
+          <a:effectLst>
+            <a:outerShdw sx="100000" sy="100000" kx="0" ky="0" algn="bl" rotWithShape="0" blurRad="101600" dist="38100" dir="8100000">
+              <a:srgbClr val="000000">
+                <a:alpha val="12000"/>
+              </a:srgbClr>
+            </a:outerShdw>
+          </a:effectLst>
+        </p:spPr>
+      </p:sp>
+      <p:sp>
+        <p:nvSpPr>
+          <p:cNvPr id="23" name="Text 21"/>
+          <p:cNvSpPr/>
+          <p:nvPr/>
+        </p:nvSpPr>
+        <p:spPr>
+          <a:xfrm>
+            <a:off x="6519672" y="2258568"/>
+            <a:ext cx="1828800" cy="292608"/>
+          </a:xfrm>
+          <a:prstGeom prst="rect">
+            <a:avLst/>
+          </a:prstGeom>
+          <a:noFill/>
+          <a:ln/>
+        </p:spPr>
+        <p:txBody>
+          <a:bodyPr wrap="square" lIns="0" tIns="0" rIns="0" bIns="0" rtlCol="0" anchor="ctr"/>
+          <a:lstStyle/>
+          <a:p>
+            <a:pPr algn="ctr" indent="0" marL="0">
+              <a:buNone/>
+            </a:pPr>
+            <a:r>
+              <a:rPr lang="en-US" sz="1300" b="1" dirty="0">
+                <a:solidFill>
+                  <a:srgbClr val="9D174D"/>
+                </a:solidFill>
+                <a:latin typeface="Trebuchet MS" pitchFamily="34" charset="0"/>
+                <a:ea typeface="Trebuchet MS" pitchFamily="34" charset="-122"/>
+                <a:cs typeface="Trebuchet MS" pitchFamily="34" charset="-120"/>
+              </a:rPr>
+              <a:t>ate</a:t>
+            </a:r>
+            <a:endParaRPr lang="en-US" sz="1300" dirty="0"/>
+          </a:p>
+        </p:txBody>
+      </p:sp>
+      <p:sp>
+        <p:nvSpPr>
+          <p:cNvPr id="24" name="Text 22"/>
+          <p:cNvSpPr/>
+          <p:nvPr/>
+        </p:nvSpPr>
+        <p:spPr>
+          <a:xfrm>
+            <a:off x="6519672" y="2569464"/>
+            <a:ext cx="1828800" cy="201168"/>
+          </a:xfrm>
+          <a:prstGeom prst="rect">
+            <a:avLst/>
+          </a:prstGeom>
+          <a:noFill/>
+          <a:ln/>
+        </p:spPr>
+        <p:txBody>
+          <a:bodyPr wrap="square" lIns="0" tIns="0" rIns="0" bIns="0" rtlCol="0" anchor="t"/>
+          <a:lstStyle/>
+          <a:p>
+            <a:pPr algn="ctr" indent="0" marL="0">
+              <a:buNone/>
+            </a:pPr>
+            <a:r>
+              <a:rPr lang="en-US" sz="850" dirty="0">
+                <a:solidFill>
+                  <a:srgbClr val="475569"/>
+                </a:solidFill>
+                <a:latin typeface="Calibri" pitchFamily="34" charset="0"/>
+                <a:ea typeface="Calibri" pitchFamily="34" charset="-122"/>
+                <a:cs typeface="Calibri" pitchFamily="34" charset="-120"/>
+              </a:rPr>
+              <a:t>makes a verb</a:t>
+            </a:r>
+            <a:endParaRPr lang="en-US" sz="850" dirty="0"/>
+          </a:p>
+        </p:txBody>
+      </p:sp>
+      <p:sp>
+        <p:nvSpPr>
+          <p:cNvPr id="25" name="Shape 23"/>
           <p:cNvSpPr/>
           <p:nvPr/>
         </p:nvSpPr>
@@ -8992,7 +9216,7 @@
       </p:sp>
       <p:sp>
         <p:nvSpPr>
-          <p:cNvPr id="23" name="Text 21"/>
+          <p:cNvPr id="26" name="Text 24"/>
           <p:cNvSpPr/>
           <p:nvPr/>
         </p:nvSpPr>
@@ -9031,7 +9255,7 @@
       </p:sp>
       <p:sp>
         <p:nvSpPr>
-          <p:cNvPr id="24" name="Shape 22"/>
+          <p:cNvPr id="27" name="Shape 25"/>
           <p:cNvSpPr/>
           <p:nvPr/>
         </p:nvSpPr>
@@ -9058,14 +9282,14 @@
       </p:sp>
       <p:sp>
         <p:nvSpPr>
-          <p:cNvPr id="25" name="Shape 23"/>
-          <p:cNvSpPr/>
-          <p:nvPr/>
-        </p:nvSpPr>
-        <p:spPr>
-          <a:xfrm>
-            <a:off x="2999232" y="3364992"/>
-            <a:ext cx="1645920" cy="475488"/>
+          <p:cNvPr id="28" name="Shape 26"/>
+          <p:cNvSpPr/>
+          <p:nvPr/>
+        </p:nvSpPr>
+        <p:spPr>
+          <a:xfrm>
+            <a:off x="1975104" y="3364992"/>
+            <a:ext cx="1554480" cy="475488"/>
           </a:xfrm>
           <a:prstGeom prst="rect">
             <a:avLst>
@@ -9085,14 +9309,14 @@
       </p:sp>
       <p:sp>
         <p:nvSpPr>
-          <p:cNvPr id="26" name="Text 24"/>
-          <p:cNvSpPr/>
-          <p:nvPr/>
-        </p:nvSpPr>
-        <p:spPr>
-          <a:xfrm>
-            <a:off x="2999232" y="3364992"/>
-            <a:ext cx="1645920" cy="475488"/>
+          <p:cNvPr id="29" name="Text 27"/>
+          <p:cNvSpPr/>
+          <p:nvPr/>
+        </p:nvSpPr>
+        <p:spPr>
+          <a:xfrm>
+            <a:off x="1975104" y="3364992"/>
+            <a:ext cx="1554480" cy="475488"/>
           </a:xfrm>
           <a:prstGeom prst="rect">
             <a:avLst/>
@@ -9124,14 +9348,14 @@
       </p:sp>
       <p:sp>
         <p:nvSpPr>
-          <p:cNvPr id="27" name="Text 25"/>
-          <p:cNvSpPr/>
-          <p:nvPr/>
-        </p:nvSpPr>
-        <p:spPr>
-          <a:xfrm>
-            <a:off x="4645152" y="3364992"/>
-            <a:ext cx="1097280" cy="475488"/>
+          <p:cNvPr id="30" name="Text 28"/>
+          <p:cNvSpPr/>
+          <p:nvPr/>
+        </p:nvSpPr>
+        <p:spPr>
+          <a:xfrm>
+            <a:off x="3529584" y="3364992"/>
+            <a:ext cx="73152" cy="475488"/>
           </a:xfrm>
           <a:prstGeom prst="rect">
             <a:avLst/>
@@ -9163,14 +9387,14 @@
       </p:sp>
       <p:sp>
         <p:nvSpPr>
-          <p:cNvPr id="28" name="Shape 26"/>
-          <p:cNvSpPr/>
-          <p:nvPr/>
-        </p:nvSpPr>
-        <p:spPr>
-          <a:xfrm>
-            <a:off x="5742432" y="3364992"/>
-            <a:ext cx="1645920" cy="475488"/>
+          <p:cNvPr id="31" name="Shape 29"/>
+          <p:cNvSpPr/>
+          <p:nvPr/>
+        </p:nvSpPr>
+        <p:spPr>
+          <a:xfrm>
+            <a:off x="3602736" y="3364992"/>
+            <a:ext cx="1554480" cy="475488"/>
           </a:xfrm>
           <a:prstGeom prst="rect">
             <a:avLst>
@@ -9190,14 +9414,14 @@
       </p:sp>
       <p:sp>
         <p:nvSpPr>
-          <p:cNvPr id="29" name="Text 27"/>
-          <p:cNvSpPr/>
-          <p:nvPr/>
-        </p:nvSpPr>
-        <p:spPr>
-          <a:xfrm>
-            <a:off x="5742432" y="3364992"/>
-            <a:ext cx="1645920" cy="475488"/>
+          <p:cNvPr id="32" name="Text 30"/>
+          <p:cNvSpPr/>
+          <p:nvPr/>
+        </p:nvSpPr>
+        <p:spPr>
+          <a:xfrm>
+            <a:off x="3602736" y="3364992"/>
+            <a:ext cx="1554480" cy="475488"/>
           </a:xfrm>
           <a:prstGeom prst="rect">
             <a:avLst/>
@@ -9221,7 +9445,7 @@
                 <a:ea typeface="Trebuchet MS" pitchFamily="34" charset="-122"/>
                 <a:cs typeface="Trebuchet MS" pitchFamily="34" charset="-120"/>
               </a:rPr>
-              <a:t>code</a:t>
+              <a:t>ac</a:t>
             </a:r>
             <a:endParaRPr lang="en-US" sz="1400" dirty="0"/>
           </a:p>
@@ -9229,7 +9453,217 @@
       </p:sp>
       <p:sp>
         <p:nvSpPr>
-          <p:cNvPr id="30" name="Shape 28"/>
+          <p:cNvPr id="33" name="Text 31"/>
+          <p:cNvSpPr/>
+          <p:nvPr/>
+        </p:nvSpPr>
+        <p:spPr>
+          <a:xfrm>
+            <a:off x="5157216" y="3364992"/>
+            <a:ext cx="73152" cy="475488"/>
+          </a:xfrm>
+          <a:prstGeom prst="rect">
+            <a:avLst/>
+          </a:prstGeom>
+          <a:noFill/>
+          <a:ln/>
+        </p:spPr>
+        <p:txBody>
+          <a:bodyPr wrap="square" lIns="0" tIns="0" rIns="0" bIns="0" rtlCol="0" anchor="ctr"/>
+          <a:lstStyle/>
+          <a:p>
+            <a:pPr algn="ctr" indent="0" marL="0">
+              <a:buNone/>
+            </a:pPr>
+            <a:r>
+              <a:rPr lang="en-US" sz="1600" b="1" dirty="0">
+                <a:solidFill>
+                  <a:srgbClr val="0D9488"/>
+                </a:solidFill>
+                <a:latin typeface="Trebuchet MS" pitchFamily="34" charset="0"/>
+                <a:ea typeface="Trebuchet MS" pitchFamily="34" charset="-122"/>
+                <a:cs typeface="Trebuchet MS" pitchFamily="34" charset="-120"/>
+              </a:rPr>
+              <a:t>·</a:t>
+            </a:r>
+            <a:endParaRPr lang="en-US" sz="1600" dirty="0"/>
+          </a:p>
+        </p:txBody>
+      </p:sp>
+      <p:sp>
+        <p:nvSpPr>
+          <p:cNvPr id="34" name="Shape 32"/>
+          <p:cNvSpPr/>
+          <p:nvPr/>
+        </p:nvSpPr>
+        <p:spPr>
+          <a:xfrm>
+            <a:off x="5230368" y="3364992"/>
+            <a:ext cx="1554480" cy="475488"/>
+          </a:xfrm>
+          <a:prstGeom prst="rect">
+            <a:avLst>
+              <a:gd name="adj" fmla="val 9615"/>
+            </a:avLst>
+          </a:prstGeom>
+          <a:solidFill>
+            <a:srgbClr val="FFFFFF"/>
+          </a:solidFill>
+          <a:ln w="12700">
+            <a:solidFill>
+              <a:srgbClr val="0D9488"/>
+            </a:solidFill>
+            <a:prstDash val="solid"/>
+          </a:ln>
+        </p:spPr>
+      </p:sp>
+      <p:sp>
+        <p:nvSpPr>
+          <p:cNvPr id="35" name="Text 33"/>
+          <p:cNvSpPr/>
+          <p:nvPr/>
+        </p:nvSpPr>
+        <p:spPr>
+          <a:xfrm>
+            <a:off x="5230368" y="3364992"/>
+            <a:ext cx="1554480" cy="475488"/>
+          </a:xfrm>
+          <a:prstGeom prst="rect">
+            <a:avLst/>
+          </a:prstGeom>
+          <a:noFill/>
+          <a:ln/>
+        </p:spPr>
+        <p:txBody>
+          <a:bodyPr wrap="square" lIns="0" tIns="0" rIns="0" bIns="0" rtlCol="0" anchor="ctr"/>
+          <a:lstStyle/>
+          <a:p>
+            <a:pPr algn="ctr" indent="0" marL="0">
+              <a:buNone/>
+            </a:pPr>
+            <a:r>
+              <a:rPr lang="en-US" sz="1400" b="1" dirty="0">
+                <a:solidFill>
+                  <a:srgbClr val="0D9488"/>
+                </a:solidFill>
+                <a:latin typeface="Trebuchet MS" pitchFamily="34" charset="0"/>
+                <a:ea typeface="Trebuchet MS" pitchFamily="34" charset="-122"/>
+                <a:cs typeface="Trebuchet MS" pitchFamily="34" charset="-120"/>
+              </a:rPr>
+              <a:t>ti</a:t>
+            </a:r>
+            <a:endParaRPr lang="en-US" sz="1400" dirty="0"/>
+          </a:p>
+        </p:txBody>
+      </p:sp>
+      <p:sp>
+        <p:nvSpPr>
+          <p:cNvPr id="36" name="Text 34"/>
+          <p:cNvSpPr/>
+          <p:nvPr/>
+        </p:nvSpPr>
+        <p:spPr>
+          <a:xfrm>
+            <a:off x="6784848" y="3364992"/>
+            <a:ext cx="73152" cy="475488"/>
+          </a:xfrm>
+          <a:prstGeom prst="rect">
+            <a:avLst/>
+          </a:prstGeom>
+          <a:noFill/>
+          <a:ln/>
+        </p:spPr>
+        <p:txBody>
+          <a:bodyPr wrap="square" lIns="0" tIns="0" rIns="0" bIns="0" rtlCol="0" anchor="ctr"/>
+          <a:lstStyle/>
+          <a:p>
+            <a:pPr algn="ctr" indent="0" marL="0">
+              <a:buNone/>
+            </a:pPr>
+            <a:r>
+              <a:rPr lang="en-US" sz="1600" b="1" dirty="0">
+                <a:solidFill>
+                  <a:srgbClr val="0D9488"/>
+                </a:solidFill>
+                <a:latin typeface="Trebuchet MS" pitchFamily="34" charset="0"/>
+                <a:ea typeface="Trebuchet MS" pitchFamily="34" charset="-122"/>
+                <a:cs typeface="Trebuchet MS" pitchFamily="34" charset="-120"/>
+              </a:rPr>
+              <a:t>·</a:t>
+            </a:r>
+            <a:endParaRPr lang="en-US" sz="1600" dirty="0"/>
+          </a:p>
+        </p:txBody>
+      </p:sp>
+      <p:sp>
+        <p:nvSpPr>
+          <p:cNvPr id="37" name="Shape 35"/>
+          <p:cNvSpPr/>
+          <p:nvPr/>
+        </p:nvSpPr>
+        <p:spPr>
+          <a:xfrm>
+            <a:off x="6858000" y="3364992"/>
+            <a:ext cx="1554480" cy="475488"/>
+          </a:xfrm>
+          <a:prstGeom prst="rect">
+            <a:avLst>
+              <a:gd name="adj" fmla="val 9615"/>
+            </a:avLst>
+          </a:prstGeom>
+          <a:solidFill>
+            <a:srgbClr val="FFFFFF"/>
+          </a:solidFill>
+          <a:ln w="12700">
+            <a:solidFill>
+              <a:srgbClr val="0D9488"/>
+            </a:solidFill>
+            <a:prstDash val="solid"/>
+          </a:ln>
+        </p:spPr>
+      </p:sp>
+      <p:sp>
+        <p:nvSpPr>
+          <p:cNvPr id="38" name="Text 36"/>
+          <p:cNvSpPr/>
+          <p:nvPr/>
+        </p:nvSpPr>
+        <p:spPr>
+          <a:xfrm>
+            <a:off x="6858000" y="3364992"/>
+            <a:ext cx="1554480" cy="475488"/>
+          </a:xfrm>
+          <a:prstGeom prst="rect">
+            <a:avLst/>
+          </a:prstGeom>
+          <a:noFill/>
+          <a:ln/>
+        </p:spPr>
+        <p:txBody>
+          <a:bodyPr wrap="square" lIns="0" tIns="0" rIns="0" bIns="0" rtlCol="0" anchor="ctr"/>
+          <a:lstStyle/>
+          <a:p>
+            <a:pPr algn="ctr" indent="0" marL="0">
+              <a:buNone/>
+            </a:pPr>
+            <a:r>
+              <a:rPr lang="en-US" sz="1400" b="1" dirty="0">
+                <a:solidFill>
+                  <a:srgbClr val="0D9488"/>
+                </a:solidFill>
+                <a:latin typeface="Trebuchet MS" pitchFamily="34" charset="0"/>
+                <a:ea typeface="Trebuchet MS" pitchFamily="34" charset="-122"/>
+                <a:cs typeface="Trebuchet MS" pitchFamily="34" charset="-120"/>
+              </a:rPr>
+              <a:t>vate</a:t>
+            </a:r>
+            <a:endParaRPr lang="en-US" sz="1400" dirty="0"/>
+          </a:p>
+        </p:txBody>
+      </p:sp>
+      <p:sp>
+        <p:nvSpPr>
+          <p:cNvPr id="39" name="Shape 37"/>
           <p:cNvSpPr/>
           <p:nvPr/>
         </p:nvSpPr>
@@ -9256,7 +9690,7 @@
       </p:sp>
       <p:sp>
         <p:nvSpPr>
-          <p:cNvPr id="31" name="Text 29"/>
+          <p:cNvPr id="40" name="Text 38"/>
           <p:cNvSpPr/>
           <p:nvPr/>
         </p:nvSpPr>
@@ -9295,7 +9729,7 @@
       </p:sp>
       <p:sp>
         <p:nvSpPr>
-          <p:cNvPr id="32" name="Shape 30"/>
+          <p:cNvPr id="41" name="Shape 39"/>
           <p:cNvSpPr/>
           <p:nvPr/>
         </p:nvSpPr>
@@ -9322,7 +9756,7 @@
       </p:sp>
       <p:sp>
         <p:nvSpPr>
-          <p:cNvPr id="33" name="Text 31"/>
+          <p:cNvPr id="42" name="Text 40"/>
           <p:cNvSpPr/>
           <p:nvPr/>
         </p:nvSpPr>
@@ -9645,7 +10079,7 @@
                 <a:ea typeface="Calibri" pitchFamily="34" charset="-122"/>
                 <a:cs typeface="Calibri" pitchFamily="34" charset="-120"/>
               </a:rPr>
-              <a:t>Word Labs  •  wordlabs.app  •  Prefix: 'de-' = down, away, undo, remove</a:t>
+              <a:t>Word Labs  •  wordlabs.app  •  Prefix: 'de-' = down, away, remove, reverse</a:t>
             </a:r>
             <a:endParaRPr lang="en-US" sz="800" dirty="0"/>
           </a:p>
@@ -9784,7 +10218,7 @@
                 <a:ea typeface="Trebuchet MS" pitchFamily="34" charset="-122"/>
                 <a:cs typeface="Trebuchet MS" pitchFamily="34" charset="-120"/>
               </a:rPr>
-              <a:t>decode</a:t>
+              <a:t>deactivate</a:t>
             </a:r>
             <a:endParaRPr lang="en-US" sz="2800" dirty="0"/>
           </a:p>
@@ -9864,7 +10298,7 @@
         </p:nvSpPr>
         <p:spPr>
           <a:xfrm>
-            <a:off x="2938272" y="2258568"/>
+            <a:off x="2221992" y="2258568"/>
             <a:ext cx="1828800" cy="292608"/>
           </a:xfrm>
           <a:prstGeom prst="rect">
@@ -9898,7 +10332,7 @@
         </p:nvSpPr>
         <p:spPr>
           <a:xfrm>
-            <a:off x="2938272" y="2258568"/>
+            <a:off x="2221992" y="2258568"/>
             <a:ext cx="1828800" cy="292608"/>
           </a:xfrm>
           <a:prstGeom prst="rect">
@@ -9937,7 +10371,7 @@
         </p:nvSpPr>
         <p:spPr>
           <a:xfrm>
-            <a:off x="2938272" y="2569464"/>
+            <a:off x="2221992" y="2569464"/>
             <a:ext cx="1828800" cy="201168"/>
           </a:xfrm>
           <a:prstGeom prst="rect">
@@ -9962,7 +10396,7 @@
                 <a:ea typeface="Calibri" pitchFamily="34" charset="-122"/>
                 <a:cs typeface="Calibri" pitchFamily="34" charset="-120"/>
               </a:rPr>
-              <a:t>undo, reverse</a:t>
+              <a:t>remove, reverse</a:t>
             </a:r>
             <a:endParaRPr lang="en-US" sz="850" dirty="0"/>
           </a:p>
@@ -9976,7 +10410,7 @@
         </p:nvSpPr>
         <p:spPr>
           <a:xfrm>
-            <a:off x="5803392" y="2258568"/>
+            <a:off x="4370832" y="2258568"/>
             <a:ext cx="1828800" cy="292608"/>
           </a:xfrm>
           <a:prstGeom prst="rect">
@@ -10010,7 +10444,7 @@
         </p:nvSpPr>
         <p:spPr>
           <a:xfrm>
-            <a:off x="5803392" y="2258568"/>
+            <a:off x="4370832" y="2258568"/>
             <a:ext cx="1828800" cy="292608"/>
           </a:xfrm>
           <a:prstGeom prst="rect">
@@ -10035,7 +10469,7 @@
                 <a:ea typeface="Trebuchet MS" pitchFamily="34" charset="-122"/>
                 <a:cs typeface="Trebuchet MS" pitchFamily="34" charset="-120"/>
               </a:rPr>
-              <a:t>code</a:t>
+              <a:t>activ</a:t>
             </a:r>
             <a:endParaRPr lang="en-US" sz="1300" dirty="0"/>
           </a:p>
@@ -10049,7 +10483,7 @@
         </p:nvSpPr>
         <p:spPr>
           <a:xfrm>
-            <a:off x="5803392" y="2569464"/>
+            <a:off x="4370832" y="2569464"/>
             <a:ext cx="1828800" cy="201168"/>
           </a:xfrm>
           <a:prstGeom prst="rect">
@@ -10074,7 +10508,7 @@
                 <a:ea typeface="Calibri" pitchFamily="34" charset="-122"/>
                 <a:cs typeface="Calibri" pitchFamily="34" charset="-120"/>
               </a:rPr>
-              <a:t>a system of hidden symbols or words</a:t>
+              <a:t>active, doing</a:t>
             </a:r>
             <a:endParaRPr lang="en-US" sz="850" dirty="0"/>
           </a:p>
@@ -10083,6 +10517,118 @@
       <p:sp>
         <p:nvSpPr>
           <p:cNvPr id="22" name="Shape 20"/>
+          <p:cNvSpPr/>
+          <p:nvPr/>
+        </p:nvSpPr>
+        <p:spPr>
+          <a:xfrm>
+            <a:off x="6519672" y="2258568"/>
+            <a:ext cx="1828800" cy="292608"/>
+          </a:xfrm>
+          <a:prstGeom prst="rect">
+            <a:avLst>
+              <a:gd name="adj" fmla="val 25000"/>
+            </a:avLst>
+          </a:prstGeom>
+          <a:solidFill>
+            <a:srgbClr val="FCE7F3"/>
+          </a:solidFill>
+          <a:ln w="19050">
+            <a:solidFill>
+              <a:srgbClr val="DB2777"/>
+            </a:solidFill>
+            <a:prstDash val="solid"/>
+          </a:ln>
+          <a:effectLst>
+            <a:outerShdw sx="100000" sy="100000" kx="0" ky="0" algn="bl" rotWithShape="0" blurRad="101600" dist="38100" dir="8100000">
+              <a:srgbClr val="000000">
+                <a:alpha val="12000"/>
+              </a:srgbClr>
+            </a:outerShdw>
+          </a:effectLst>
+        </p:spPr>
+      </p:sp>
+      <p:sp>
+        <p:nvSpPr>
+          <p:cNvPr id="23" name="Text 21"/>
+          <p:cNvSpPr/>
+          <p:nvPr/>
+        </p:nvSpPr>
+        <p:spPr>
+          <a:xfrm>
+            <a:off x="6519672" y="2258568"/>
+            <a:ext cx="1828800" cy="292608"/>
+          </a:xfrm>
+          <a:prstGeom prst="rect">
+            <a:avLst/>
+          </a:prstGeom>
+          <a:noFill/>
+          <a:ln/>
+        </p:spPr>
+        <p:txBody>
+          <a:bodyPr wrap="square" lIns="0" tIns="0" rIns="0" bIns="0" rtlCol="0" anchor="ctr"/>
+          <a:lstStyle/>
+          <a:p>
+            <a:pPr algn="ctr" indent="0" marL="0">
+              <a:buNone/>
+            </a:pPr>
+            <a:r>
+              <a:rPr lang="en-US" sz="1300" b="1" dirty="0">
+                <a:solidFill>
+                  <a:srgbClr val="9D174D"/>
+                </a:solidFill>
+                <a:latin typeface="Trebuchet MS" pitchFamily="34" charset="0"/>
+                <a:ea typeface="Trebuchet MS" pitchFamily="34" charset="-122"/>
+                <a:cs typeface="Trebuchet MS" pitchFamily="34" charset="-120"/>
+              </a:rPr>
+              <a:t>ate</a:t>
+            </a:r>
+            <a:endParaRPr lang="en-US" sz="1300" dirty="0"/>
+          </a:p>
+        </p:txBody>
+      </p:sp>
+      <p:sp>
+        <p:nvSpPr>
+          <p:cNvPr id="24" name="Text 22"/>
+          <p:cNvSpPr/>
+          <p:nvPr/>
+        </p:nvSpPr>
+        <p:spPr>
+          <a:xfrm>
+            <a:off x="6519672" y="2569464"/>
+            <a:ext cx="1828800" cy="201168"/>
+          </a:xfrm>
+          <a:prstGeom prst="rect">
+            <a:avLst/>
+          </a:prstGeom>
+          <a:noFill/>
+          <a:ln/>
+        </p:spPr>
+        <p:txBody>
+          <a:bodyPr wrap="square" lIns="0" tIns="0" rIns="0" bIns="0" rtlCol="0" anchor="t"/>
+          <a:lstStyle/>
+          <a:p>
+            <a:pPr algn="ctr" indent="0" marL="0">
+              <a:buNone/>
+            </a:pPr>
+            <a:r>
+              <a:rPr lang="en-US" sz="850" dirty="0">
+                <a:solidFill>
+                  <a:srgbClr val="475569"/>
+                </a:solidFill>
+                <a:latin typeface="Calibri" pitchFamily="34" charset="0"/>
+                <a:ea typeface="Calibri" pitchFamily="34" charset="-122"/>
+                <a:cs typeface="Calibri" pitchFamily="34" charset="-120"/>
+              </a:rPr>
+              <a:t>makes a verb</a:t>
+            </a:r>
+            <a:endParaRPr lang="en-US" sz="850" dirty="0"/>
+          </a:p>
+        </p:txBody>
+      </p:sp>
+      <p:sp>
+        <p:nvSpPr>
+          <p:cNvPr id="25" name="Shape 23"/>
           <p:cNvSpPr/>
           <p:nvPr/>
         </p:nvSpPr>
@@ -10109,7 +10655,7 @@
       </p:sp>
       <p:sp>
         <p:nvSpPr>
-          <p:cNvPr id="23" name="Text 21"/>
+          <p:cNvPr id="26" name="Text 24"/>
           <p:cNvSpPr/>
           <p:nvPr/>
         </p:nvSpPr>
@@ -10148,7 +10694,7 @@
       </p:sp>
       <p:sp>
         <p:nvSpPr>
-          <p:cNvPr id="24" name="Shape 22"/>
+          <p:cNvPr id="27" name="Shape 25"/>
           <p:cNvSpPr/>
           <p:nvPr/>
         </p:nvSpPr>
@@ -10175,14 +10721,14 @@
       </p:sp>
       <p:sp>
         <p:nvSpPr>
-          <p:cNvPr id="25" name="Shape 23"/>
-          <p:cNvSpPr/>
-          <p:nvPr/>
-        </p:nvSpPr>
-        <p:spPr>
-          <a:xfrm>
-            <a:off x="2999232" y="3364992"/>
-            <a:ext cx="1645920" cy="475488"/>
+          <p:cNvPr id="28" name="Shape 26"/>
+          <p:cNvSpPr/>
+          <p:nvPr/>
+        </p:nvSpPr>
+        <p:spPr>
+          <a:xfrm>
+            <a:off x="1975104" y="3364992"/>
+            <a:ext cx="1554480" cy="475488"/>
           </a:xfrm>
           <a:prstGeom prst="rect">
             <a:avLst>
@@ -10202,14 +10748,14 @@
       </p:sp>
       <p:sp>
         <p:nvSpPr>
-          <p:cNvPr id="26" name="Text 24"/>
-          <p:cNvSpPr/>
-          <p:nvPr/>
-        </p:nvSpPr>
-        <p:spPr>
-          <a:xfrm>
-            <a:off x="2999232" y="3364992"/>
-            <a:ext cx="1645920" cy="475488"/>
+          <p:cNvPr id="29" name="Text 27"/>
+          <p:cNvSpPr/>
+          <p:nvPr/>
+        </p:nvSpPr>
+        <p:spPr>
+          <a:xfrm>
+            <a:off x="1975104" y="3364992"/>
+            <a:ext cx="1554480" cy="475488"/>
           </a:xfrm>
           <a:prstGeom prst="rect">
             <a:avLst/>
@@ -10241,14 +10787,14 @@
       </p:sp>
       <p:sp>
         <p:nvSpPr>
-          <p:cNvPr id="27" name="Text 25"/>
-          <p:cNvSpPr/>
-          <p:nvPr/>
-        </p:nvSpPr>
-        <p:spPr>
-          <a:xfrm>
-            <a:off x="4645152" y="3364992"/>
-            <a:ext cx="1097280" cy="475488"/>
+          <p:cNvPr id="30" name="Text 28"/>
+          <p:cNvSpPr/>
+          <p:nvPr/>
+        </p:nvSpPr>
+        <p:spPr>
+          <a:xfrm>
+            <a:off x="3529584" y="3364992"/>
+            <a:ext cx="73152" cy="475488"/>
           </a:xfrm>
           <a:prstGeom prst="rect">
             <a:avLst/>
@@ -10280,14 +10826,14 @@
       </p:sp>
       <p:sp>
         <p:nvSpPr>
-          <p:cNvPr id="28" name="Shape 26"/>
-          <p:cNvSpPr/>
-          <p:nvPr/>
-        </p:nvSpPr>
-        <p:spPr>
-          <a:xfrm>
-            <a:off x="5742432" y="3364992"/>
-            <a:ext cx="1645920" cy="475488"/>
+          <p:cNvPr id="31" name="Shape 29"/>
+          <p:cNvSpPr/>
+          <p:nvPr/>
+        </p:nvSpPr>
+        <p:spPr>
+          <a:xfrm>
+            <a:off x="3602736" y="3364992"/>
+            <a:ext cx="1554480" cy="475488"/>
           </a:xfrm>
           <a:prstGeom prst="rect">
             <a:avLst>
@@ -10307,14 +10853,14 @@
       </p:sp>
       <p:sp>
         <p:nvSpPr>
-          <p:cNvPr id="29" name="Text 27"/>
-          <p:cNvSpPr/>
-          <p:nvPr/>
-        </p:nvSpPr>
-        <p:spPr>
-          <a:xfrm>
-            <a:off x="5742432" y="3364992"/>
-            <a:ext cx="1645920" cy="475488"/>
+          <p:cNvPr id="32" name="Text 30"/>
+          <p:cNvSpPr/>
+          <p:nvPr/>
+        </p:nvSpPr>
+        <p:spPr>
+          <a:xfrm>
+            <a:off x="3602736" y="3364992"/>
+            <a:ext cx="1554480" cy="475488"/>
           </a:xfrm>
           <a:prstGeom prst="rect">
             <a:avLst/>
@@ -10338,7 +10884,7 @@
                 <a:ea typeface="Trebuchet MS" pitchFamily="34" charset="-122"/>
                 <a:cs typeface="Trebuchet MS" pitchFamily="34" charset="-120"/>
               </a:rPr>
-              <a:t>code</a:t>
+              <a:t>ac</a:t>
             </a:r>
             <a:endParaRPr lang="en-US" sz="1400" dirty="0"/>
           </a:p>
@@ -10346,7 +10892,217 @@
       </p:sp>
       <p:sp>
         <p:nvSpPr>
-          <p:cNvPr id="30" name="Shape 28"/>
+          <p:cNvPr id="33" name="Text 31"/>
+          <p:cNvSpPr/>
+          <p:nvPr/>
+        </p:nvSpPr>
+        <p:spPr>
+          <a:xfrm>
+            <a:off x="5157216" y="3364992"/>
+            <a:ext cx="73152" cy="475488"/>
+          </a:xfrm>
+          <a:prstGeom prst="rect">
+            <a:avLst/>
+          </a:prstGeom>
+          <a:noFill/>
+          <a:ln/>
+        </p:spPr>
+        <p:txBody>
+          <a:bodyPr wrap="square" lIns="0" tIns="0" rIns="0" bIns="0" rtlCol="0" anchor="ctr"/>
+          <a:lstStyle/>
+          <a:p>
+            <a:pPr algn="ctr" indent="0" marL="0">
+              <a:buNone/>
+            </a:pPr>
+            <a:r>
+              <a:rPr lang="en-US" sz="1600" b="1" dirty="0">
+                <a:solidFill>
+                  <a:srgbClr val="0D9488"/>
+                </a:solidFill>
+                <a:latin typeface="Trebuchet MS" pitchFamily="34" charset="0"/>
+                <a:ea typeface="Trebuchet MS" pitchFamily="34" charset="-122"/>
+                <a:cs typeface="Trebuchet MS" pitchFamily="34" charset="-120"/>
+              </a:rPr>
+              <a:t>·</a:t>
+            </a:r>
+            <a:endParaRPr lang="en-US" sz="1600" dirty="0"/>
+          </a:p>
+        </p:txBody>
+      </p:sp>
+      <p:sp>
+        <p:nvSpPr>
+          <p:cNvPr id="34" name="Shape 32"/>
+          <p:cNvSpPr/>
+          <p:nvPr/>
+        </p:nvSpPr>
+        <p:spPr>
+          <a:xfrm>
+            <a:off x="5230368" y="3364992"/>
+            <a:ext cx="1554480" cy="475488"/>
+          </a:xfrm>
+          <a:prstGeom prst="rect">
+            <a:avLst>
+              <a:gd name="adj" fmla="val 9615"/>
+            </a:avLst>
+          </a:prstGeom>
+          <a:solidFill>
+            <a:srgbClr val="FFFFFF"/>
+          </a:solidFill>
+          <a:ln w="12700">
+            <a:solidFill>
+              <a:srgbClr val="0D9488"/>
+            </a:solidFill>
+            <a:prstDash val="solid"/>
+          </a:ln>
+        </p:spPr>
+      </p:sp>
+      <p:sp>
+        <p:nvSpPr>
+          <p:cNvPr id="35" name="Text 33"/>
+          <p:cNvSpPr/>
+          <p:nvPr/>
+        </p:nvSpPr>
+        <p:spPr>
+          <a:xfrm>
+            <a:off x="5230368" y="3364992"/>
+            <a:ext cx="1554480" cy="475488"/>
+          </a:xfrm>
+          <a:prstGeom prst="rect">
+            <a:avLst/>
+          </a:prstGeom>
+          <a:noFill/>
+          <a:ln/>
+        </p:spPr>
+        <p:txBody>
+          <a:bodyPr wrap="square" lIns="0" tIns="0" rIns="0" bIns="0" rtlCol="0" anchor="ctr"/>
+          <a:lstStyle/>
+          <a:p>
+            <a:pPr algn="ctr" indent="0" marL="0">
+              <a:buNone/>
+            </a:pPr>
+            <a:r>
+              <a:rPr lang="en-US" sz="1400" b="1" dirty="0">
+                <a:solidFill>
+                  <a:srgbClr val="0D9488"/>
+                </a:solidFill>
+                <a:latin typeface="Trebuchet MS" pitchFamily="34" charset="0"/>
+                <a:ea typeface="Trebuchet MS" pitchFamily="34" charset="-122"/>
+                <a:cs typeface="Trebuchet MS" pitchFamily="34" charset="-120"/>
+              </a:rPr>
+              <a:t>ti</a:t>
+            </a:r>
+            <a:endParaRPr lang="en-US" sz="1400" dirty="0"/>
+          </a:p>
+        </p:txBody>
+      </p:sp>
+      <p:sp>
+        <p:nvSpPr>
+          <p:cNvPr id="36" name="Text 34"/>
+          <p:cNvSpPr/>
+          <p:nvPr/>
+        </p:nvSpPr>
+        <p:spPr>
+          <a:xfrm>
+            <a:off x="6784848" y="3364992"/>
+            <a:ext cx="73152" cy="475488"/>
+          </a:xfrm>
+          <a:prstGeom prst="rect">
+            <a:avLst/>
+          </a:prstGeom>
+          <a:noFill/>
+          <a:ln/>
+        </p:spPr>
+        <p:txBody>
+          <a:bodyPr wrap="square" lIns="0" tIns="0" rIns="0" bIns="0" rtlCol="0" anchor="ctr"/>
+          <a:lstStyle/>
+          <a:p>
+            <a:pPr algn="ctr" indent="0" marL="0">
+              <a:buNone/>
+            </a:pPr>
+            <a:r>
+              <a:rPr lang="en-US" sz="1600" b="1" dirty="0">
+                <a:solidFill>
+                  <a:srgbClr val="0D9488"/>
+                </a:solidFill>
+                <a:latin typeface="Trebuchet MS" pitchFamily="34" charset="0"/>
+                <a:ea typeface="Trebuchet MS" pitchFamily="34" charset="-122"/>
+                <a:cs typeface="Trebuchet MS" pitchFamily="34" charset="-120"/>
+              </a:rPr>
+              <a:t>·</a:t>
+            </a:r>
+            <a:endParaRPr lang="en-US" sz="1600" dirty="0"/>
+          </a:p>
+        </p:txBody>
+      </p:sp>
+      <p:sp>
+        <p:nvSpPr>
+          <p:cNvPr id="37" name="Shape 35"/>
+          <p:cNvSpPr/>
+          <p:nvPr/>
+        </p:nvSpPr>
+        <p:spPr>
+          <a:xfrm>
+            <a:off x="6858000" y="3364992"/>
+            <a:ext cx="1554480" cy="475488"/>
+          </a:xfrm>
+          <a:prstGeom prst="rect">
+            <a:avLst>
+              <a:gd name="adj" fmla="val 9615"/>
+            </a:avLst>
+          </a:prstGeom>
+          <a:solidFill>
+            <a:srgbClr val="FFFFFF"/>
+          </a:solidFill>
+          <a:ln w="12700">
+            <a:solidFill>
+              <a:srgbClr val="0D9488"/>
+            </a:solidFill>
+            <a:prstDash val="solid"/>
+          </a:ln>
+        </p:spPr>
+      </p:sp>
+      <p:sp>
+        <p:nvSpPr>
+          <p:cNvPr id="38" name="Text 36"/>
+          <p:cNvSpPr/>
+          <p:nvPr/>
+        </p:nvSpPr>
+        <p:spPr>
+          <a:xfrm>
+            <a:off x="6858000" y="3364992"/>
+            <a:ext cx="1554480" cy="475488"/>
+          </a:xfrm>
+          <a:prstGeom prst="rect">
+            <a:avLst/>
+          </a:prstGeom>
+          <a:noFill/>
+          <a:ln/>
+        </p:spPr>
+        <p:txBody>
+          <a:bodyPr wrap="square" lIns="0" tIns="0" rIns="0" bIns="0" rtlCol="0" anchor="ctr"/>
+          <a:lstStyle/>
+          <a:p>
+            <a:pPr algn="ctr" indent="0" marL="0">
+              <a:buNone/>
+            </a:pPr>
+            <a:r>
+              <a:rPr lang="en-US" sz="1400" b="1" dirty="0">
+                <a:solidFill>
+                  <a:srgbClr val="0D9488"/>
+                </a:solidFill>
+                <a:latin typeface="Trebuchet MS" pitchFamily="34" charset="0"/>
+                <a:ea typeface="Trebuchet MS" pitchFamily="34" charset="-122"/>
+                <a:cs typeface="Trebuchet MS" pitchFamily="34" charset="-120"/>
+              </a:rPr>
+              <a:t>vate</a:t>
+            </a:r>
+            <a:endParaRPr lang="en-US" sz="1400" dirty="0"/>
+          </a:p>
+        </p:txBody>
+      </p:sp>
+      <p:sp>
+        <p:nvSpPr>
+          <p:cNvPr id="39" name="Shape 37"/>
           <p:cNvSpPr/>
           <p:nvPr/>
         </p:nvSpPr>
@@ -10373,7 +11129,7 @@
       </p:sp>
       <p:sp>
         <p:nvSpPr>
-          <p:cNvPr id="31" name="Text 29"/>
+          <p:cNvPr id="40" name="Text 38"/>
           <p:cNvSpPr/>
           <p:nvPr/>
         </p:nvSpPr>
@@ -10412,18 +11168,18 @@
       </p:sp>
       <p:sp>
         <p:nvSpPr>
-          <p:cNvPr id="32" name="Shape 30"/>
+          <p:cNvPr id="41" name="Shape 39"/>
           <p:cNvSpPr/>
           <p:nvPr/>
         </p:nvSpPr>
         <p:spPr>
           <a:xfrm>
             <a:off x="1874520" y="4096512"/>
-            <a:ext cx="6903720" cy="804672"/>
+            <a:ext cx="6903720" cy="658368"/>
           </a:xfrm>
           <a:prstGeom prst="rect">
             <a:avLst>
-              <a:gd name="adj" fmla="val 6818"/>
+              <a:gd name="adj" fmla="val 8333"/>
             </a:avLst>
           </a:prstGeom>
           <a:solidFill>
@@ -10439,18 +11195,18 @@
       </p:sp>
       <p:sp>
         <p:nvSpPr>
-          <p:cNvPr id="33" name="Shape 31"/>
-          <p:cNvSpPr/>
-          <p:nvPr/>
-        </p:nvSpPr>
-        <p:spPr>
-          <a:xfrm>
-            <a:off x="2427732" y="4169664"/>
-            <a:ext cx="685800" cy="384048"/>
+          <p:cNvPr id="42" name="Shape 40"/>
+          <p:cNvSpPr/>
+          <p:nvPr/>
+        </p:nvSpPr>
+        <p:spPr>
+          <a:xfrm>
+            <a:off x="2023872" y="4169664"/>
+            <a:ext cx="685800" cy="475488"/>
           </a:xfrm>
           <a:prstGeom prst="rect">
             <a:avLst>
-              <a:gd name="adj" fmla="val 9524"/>
+              <a:gd name="adj" fmla="val 7692"/>
             </a:avLst>
           </a:prstGeom>
           <a:solidFill>
@@ -10466,14 +11222,14 @@
       </p:sp>
       <p:sp>
         <p:nvSpPr>
-          <p:cNvPr id="34" name="Text 32"/>
-          <p:cNvSpPr/>
-          <p:nvPr/>
-        </p:nvSpPr>
-        <p:spPr>
-          <a:xfrm>
-            <a:off x="2427732" y="4169664"/>
-            <a:ext cx="685800" cy="384048"/>
+          <p:cNvPr id="43" name="Text 41"/>
+          <p:cNvSpPr/>
+          <p:nvPr/>
+        </p:nvSpPr>
+        <p:spPr>
+          <a:xfrm>
+            <a:off x="2023872" y="4169664"/>
+            <a:ext cx="685800" cy="475488"/>
           </a:xfrm>
           <a:prstGeom prst="rect">
             <a:avLst/>
@@ -10505,18 +11261,18 @@
       </p:sp>
       <p:sp>
         <p:nvSpPr>
-          <p:cNvPr id="35" name="Shape 33"/>
-          <p:cNvSpPr/>
-          <p:nvPr/>
-        </p:nvSpPr>
-        <p:spPr>
-          <a:xfrm>
-            <a:off x="3639312" y="4169664"/>
-            <a:ext cx="685800" cy="384048"/>
+          <p:cNvPr id="44" name="Shape 42"/>
+          <p:cNvSpPr/>
+          <p:nvPr/>
+        </p:nvSpPr>
+        <p:spPr>
+          <a:xfrm>
+            <a:off x="2831592" y="4169664"/>
+            <a:ext cx="685800" cy="475488"/>
           </a:xfrm>
           <a:prstGeom prst="rect">
             <a:avLst>
-              <a:gd name="adj" fmla="val 9524"/>
+              <a:gd name="adj" fmla="val 7692"/>
             </a:avLst>
           </a:prstGeom>
           <a:solidFill>
@@ -10532,14 +11288,14 @@
       </p:sp>
       <p:sp>
         <p:nvSpPr>
-          <p:cNvPr id="36" name="Text 34"/>
-          <p:cNvSpPr/>
-          <p:nvPr/>
-        </p:nvSpPr>
-        <p:spPr>
-          <a:xfrm>
-            <a:off x="3639312" y="4169664"/>
-            <a:ext cx="685800" cy="384048"/>
+          <p:cNvPr id="45" name="Text 43"/>
+          <p:cNvSpPr/>
+          <p:nvPr/>
+        </p:nvSpPr>
+        <p:spPr>
+          <a:xfrm>
+            <a:off x="2831592" y="4169664"/>
+            <a:ext cx="685800" cy="475488"/>
           </a:xfrm>
           <a:prstGeom prst="rect">
             <a:avLst/>
@@ -10571,18 +11327,18 @@
       </p:sp>
       <p:sp>
         <p:nvSpPr>
-          <p:cNvPr id="37" name="Shape 35"/>
-          <p:cNvSpPr/>
-          <p:nvPr/>
-        </p:nvSpPr>
-        <p:spPr>
-          <a:xfrm>
-            <a:off x="4850892" y="4169664"/>
-            <a:ext cx="685800" cy="384048"/>
+          <p:cNvPr id="46" name="Shape 44"/>
+          <p:cNvSpPr/>
+          <p:nvPr/>
+        </p:nvSpPr>
+        <p:spPr>
+          <a:xfrm>
+            <a:off x="3639312" y="4169664"/>
+            <a:ext cx="685800" cy="475488"/>
           </a:xfrm>
           <a:prstGeom prst="rect">
             <a:avLst>
-              <a:gd name="adj" fmla="val 9524"/>
+              <a:gd name="adj" fmla="val 7692"/>
             </a:avLst>
           </a:prstGeom>
           <a:solidFill>
@@ -10598,14 +11354,14 @@
       </p:sp>
       <p:sp>
         <p:nvSpPr>
-          <p:cNvPr id="38" name="Text 36"/>
-          <p:cNvSpPr/>
-          <p:nvPr/>
-        </p:nvSpPr>
-        <p:spPr>
-          <a:xfrm>
-            <a:off x="4850892" y="4169664"/>
-            <a:ext cx="685800" cy="384048"/>
+          <p:cNvPr id="47" name="Text 45"/>
+          <p:cNvSpPr/>
+          <p:nvPr/>
+        </p:nvSpPr>
+        <p:spPr>
+          <a:xfrm>
+            <a:off x="3639312" y="4169664"/>
+            <a:ext cx="685800" cy="475488"/>
           </a:xfrm>
           <a:prstGeom prst="rect">
             <a:avLst/>
@@ -10629,7 +11385,7 @@
                 <a:ea typeface="Trebuchet MS" pitchFamily="34" charset="-122"/>
                 <a:cs typeface="Trebuchet MS" pitchFamily="34" charset="-120"/>
               </a:rPr>
-              <a:t>c</a:t>
+              <a:t>a</a:t>
             </a:r>
             <a:endParaRPr lang="en-US" sz="900" dirty="0"/>
           </a:p>
@@ -10637,57 +11393,18 @@
       </p:sp>
       <p:sp>
         <p:nvSpPr>
-          <p:cNvPr id="39" name="Text 37"/>
-          <p:cNvSpPr/>
-          <p:nvPr/>
-        </p:nvSpPr>
-        <p:spPr>
-          <a:xfrm>
-            <a:off x="4850892" y="4572000"/>
-            <a:ext cx="685800" cy="219456"/>
-          </a:xfrm>
-          <a:prstGeom prst="rect">
-            <a:avLst/>
-          </a:prstGeom>
-          <a:noFill/>
-          <a:ln/>
-        </p:spPr>
-        <p:txBody>
-          <a:bodyPr wrap="square" lIns="0" tIns="0" rIns="0" bIns="0" rtlCol="0" anchor="t"/>
-          <a:lstStyle/>
-          <a:p>
-            <a:pPr algn="ctr" indent="0" marL="0">
-              <a:buNone/>
-            </a:pPr>
-            <a:r>
-              <a:rPr lang="en-US" sz="750" i="1" dirty="0">
-                <a:solidFill>
-                  <a:srgbClr val="94A3B8"/>
-                </a:solidFill>
-                <a:latin typeface="Calibri" pitchFamily="34" charset="0"/>
-                <a:ea typeface="Calibri" pitchFamily="34" charset="-122"/>
-                <a:cs typeface="Calibri" pitchFamily="34" charset="-120"/>
-              </a:rPr>
-              <a:t>/k/</a:t>
-            </a:r>
-            <a:endParaRPr lang="en-US" sz="750" dirty="0"/>
-          </a:p>
-        </p:txBody>
-      </p:sp>
-      <p:sp>
-        <p:nvSpPr>
-          <p:cNvPr id="40" name="Shape 38"/>
-          <p:cNvSpPr/>
-          <p:nvPr/>
-        </p:nvSpPr>
-        <p:spPr>
-          <a:xfrm>
-            <a:off x="6062472" y="4169664"/>
-            <a:ext cx="685800" cy="384048"/>
+          <p:cNvPr id="48" name="Shape 46"/>
+          <p:cNvSpPr/>
+          <p:nvPr/>
+        </p:nvSpPr>
+        <p:spPr>
+          <a:xfrm>
+            <a:off x="4447032" y="4169664"/>
+            <a:ext cx="685800" cy="475488"/>
           </a:xfrm>
           <a:prstGeom prst="rect">
             <a:avLst>
-              <a:gd name="adj" fmla="val 9524"/>
+              <a:gd name="adj" fmla="val 7692"/>
             </a:avLst>
           </a:prstGeom>
           <a:solidFill>
@@ -10703,14 +11420,14 @@
       </p:sp>
       <p:sp>
         <p:nvSpPr>
-          <p:cNvPr id="41" name="Text 39"/>
-          <p:cNvSpPr/>
-          <p:nvPr/>
-        </p:nvSpPr>
-        <p:spPr>
-          <a:xfrm>
-            <a:off x="6062472" y="4169664"/>
-            <a:ext cx="685800" cy="384048"/>
+          <p:cNvPr id="49" name="Text 47"/>
+          <p:cNvSpPr/>
+          <p:nvPr/>
+        </p:nvSpPr>
+        <p:spPr>
+          <a:xfrm>
+            <a:off x="4447032" y="4169664"/>
+            <a:ext cx="685800" cy="475488"/>
           </a:xfrm>
           <a:prstGeom prst="rect">
             <a:avLst/>
@@ -10734,7 +11451,7 @@
                 <a:ea typeface="Trebuchet MS" pitchFamily="34" charset="-122"/>
                 <a:cs typeface="Trebuchet MS" pitchFamily="34" charset="-120"/>
               </a:rPr>
-              <a:t>o</a:t>
+              <a:t>c</a:t>
             </a:r>
             <a:endParaRPr lang="en-US" sz="900" dirty="0"/>
           </a:p>
@@ -10742,18 +11459,18 @@
       </p:sp>
       <p:sp>
         <p:nvSpPr>
-          <p:cNvPr id="42" name="Shape 40"/>
-          <p:cNvSpPr/>
-          <p:nvPr/>
-        </p:nvSpPr>
-        <p:spPr>
-          <a:xfrm>
-            <a:off x="7274052" y="4169664"/>
-            <a:ext cx="685800" cy="384048"/>
+          <p:cNvPr id="50" name="Shape 48"/>
+          <p:cNvSpPr/>
+          <p:nvPr/>
+        </p:nvSpPr>
+        <p:spPr>
+          <a:xfrm>
+            <a:off x="5254752" y="4169664"/>
+            <a:ext cx="685800" cy="475488"/>
           </a:xfrm>
           <a:prstGeom prst="rect">
             <a:avLst>
-              <a:gd name="adj" fmla="val 9524"/>
+              <a:gd name="adj" fmla="val 7692"/>
             </a:avLst>
           </a:prstGeom>
           <a:solidFill>
@@ -10769,14 +11486,14 @@
       </p:sp>
       <p:sp>
         <p:nvSpPr>
-          <p:cNvPr id="43" name="Text 41"/>
-          <p:cNvSpPr/>
-          <p:nvPr/>
-        </p:nvSpPr>
-        <p:spPr>
-          <a:xfrm>
-            <a:off x="7274052" y="4169664"/>
-            <a:ext cx="685800" cy="384048"/>
+          <p:cNvPr id="51" name="Text 49"/>
+          <p:cNvSpPr/>
+          <p:nvPr/>
+        </p:nvSpPr>
+        <p:spPr>
+          <a:xfrm>
+            <a:off x="5254752" y="4169664"/>
+            <a:ext cx="685800" cy="475488"/>
           </a:xfrm>
           <a:prstGeom prst="rect">
             <a:avLst/>
@@ -10800,7 +11517,7 @@
                 <a:ea typeface="Trebuchet MS" pitchFamily="34" charset="-122"/>
                 <a:cs typeface="Trebuchet MS" pitchFamily="34" charset="-120"/>
               </a:rPr>
-              <a:t>de</a:t>
+              <a:t>t</a:t>
             </a:r>
             <a:endParaRPr lang="en-US" sz="900" dirty="0"/>
           </a:p>
@@ -10808,40 +11525,199 @@
       </p:sp>
       <p:sp>
         <p:nvSpPr>
-          <p:cNvPr id="44" name="Text 42"/>
-          <p:cNvSpPr/>
-          <p:nvPr/>
-        </p:nvSpPr>
-        <p:spPr>
-          <a:xfrm>
-            <a:off x="7274052" y="4572000"/>
-            <a:ext cx="685800" cy="219456"/>
-          </a:xfrm>
-          <a:prstGeom prst="rect">
-            <a:avLst/>
-          </a:prstGeom>
-          <a:noFill/>
-          <a:ln/>
-        </p:spPr>
-        <p:txBody>
-          <a:bodyPr wrap="square" lIns="0" tIns="0" rIns="0" bIns="0" rtlCol="0" anchor="t"/>
-          <a:lstStyle/>
-          <a:p>
-            <a:pPr algn="ctr" indent="0" marL="0">
-              <a:buNone/>
-            </a:pPr>
-            <a:r>
-              <a:rPr lang="en-US" sz="750" i="1" dirty="0">
-                <a:solidFill>
-                  <a:srgbClr val="94A3B8"/>
-                </a:solidFill>
-                <a:latin typeface="Calibri" pitchFamily="34" charset="0"/>
-                <a:ea typeface="Calibri" pitchFamily="34" charset="-122"/>
-                <a:cs typeface="Calibri" pitchFamily="34" charset="-120"/>
-              </a:rPr>
-              <a:t>/d/</a:t>
-            </a:r>
-            <a:endParaRPr lang="en-US" sz="750" dirty="0"/>
+          <p:cNvPr id="52" name="Shape 50"/>
+          <p:cNvSpPr/>
+          <p:nvPr/>
+        </p:nvSpPr>
+        <p:spPr>
+          <a:xfrm>
+            <a:off x="6062472" y="4169664"/>
+            <a:ext cx="685800" cy="475488"/>
+          </a:xfrm>
+          <a:prstGeom prst="rect">
+            <a:avLst>
+              <a:gd name="adj" fmla="val 7692"/>
+            </a:avLst>
+          </a:prstGeom>
+          <a:solidFill>
+            <a:srgbClr val="FFFFFF"/>
+          </a:solidFill>
+          <a:ln w="12700">
+            <a:solidFill>
+              <a:srgbClr val="DB2777"/>
+            </a:solidFill>
+            <a:prstDash val="solid"/>
+          </a:ln>
+        </p:spPr>
+      </p:sp>
+      <p:sp>
+        <p:nvSpPr>
+          <p:cNvPr id="53" name="Text 51"/>
+          <p:cNvSpPr/>
+          <p:nvPr/>
+        </p:nvSpPr>
+        <p:spPr>
+          <a:xfrm>
+            <a:off x="6062472" y="4169664"/>
+            <a:ext cx="685800" cy="475488"/>
+          </a:xfrm>
+          <a:prstGeom prst="rect">
+            <a:avLst/>
+          </a:prstGeom>
+          <a:noFill/>
+          <a:ln/>
+        </p:spPr>
+        <p:txBody>
+          <a:bodyPr wrap="square" lIns="0" tIns="0" rIns="0" bIns="0" rtlCol="0" anchor="ctr"/>
+          <a:lstStyle/>
+          <a:p>
+            <a:pPr algn="ctr" indent="0" marL="0">
+              <a:buNone/>
+            </a:pPr>
+            <a:r>
+              <a:rPr lang="en-US" sz="900" b="1" dirty="0">
+                <a:solidFill>
+                  <a:srgbClr val="9D174D"/>
+                </a:solidFill>
+                <a:latin typeface="Trebuchet MS" pitchFamily="34" charset="0"/>
+                <a:ea typeface="Trebuchet MS" pitchFamily="34" charset="-122"/>
+                <a:cs typeface="Trebuchet MS" pitchFamily="34" charset="-120"/>
+              </a:rPr>
+              <a:t>i</a:t>
+            </a:r>
+            <a:endParaRPr lang="en-US" sz="900" dirty="0"/>
+          </a:p>
+        </p:txBody>
+      </p:sp>
+      <p:sp>
+        <p:nvSpPr>
+          <p:cNvPr id="54" name="Shape 52"/>
+          <p:cNvSpPr/>
+          <p:nvPr/>
+        </p:nvSpPr>
+        <p:spPr>
+          <a:xfrm>
+            <a:off x="6870192" y="4169664"/>
+            <a:ext cx="685800" cy="475488"/>
+          </a:xfrm>
+          <a:prstGeom prst="rect">
+            <a:avLst>
+              <a:gd name="adj" fmla="val 7692"/>
+            </a:avLst>
+          </a:prstGeom>
+          <a:solidFill>
+            <a:srgbClr val="FFFFFF"/>
+          </a:solidFill>
+          <a:ln w="12700">
+            <a:solidFill>
+              <a:srgbClr val="DB2777"/>
+            </a:solidFill>
+            <a:prstDash val="solid"/>
+          </a:ln>
+        </p:spPr>
+      </p:sp>
+      <p:sp>
+        <p:nvSpPr>
+          <p:cNvPr id="55" name="Text 53"/>
+          <p:cNvSpPr/>
+          <p:nvPr/>
+        </p:nvSpPr>
+        <p:spPr>
+          <a:xfrm>
+            <a:off x="6870192" y="4169664"/>
+            <a:ext cx="685800" cy="475488"/>
+          </a:xfrm>
+          <a:prstGeom prst="rect">
+            <a:avLst/>
+          </a:prstGeom>
+          <a:noFill/>
+          <a:ln/>
+        </p:spPr>
+        <p:txBody>
+          <a:bodyPr wrap="square" lIns="0" tIns="0" rIns="0" bIns="0" rtlCol="0" anchor="ctr"/>
+          <a:lstStyle/>
+          <a:p>
+            <a:pPr algn="ctr" indent="0" marL="0">
+              <a:buNone/>
+            </a:pPr>
+            <a:r>
+              <a:rPr lang="en-US" sz="900" b="1" dirty="0">
+                <a:solidFill>
+                  <a:srgbClr val="9D174D"/>
+                </a:solidFill>
+                <a:latin typeface="Trebuchet MS" pitchFamily="34" charset="0"/>
+                <a:ea typeface="Trebuchet MS" pitchFamily="34" charset="-122"/>
+                <a:cs typeface="Trebuchet MS" pitchFamily="34" charset="-120"/>
+              </a:rPr>
+              <a:t>v</a:t>
+            </a:r>
+            <a:endParaRPr lang="en-US" sz="900" dirty="0"/>
+          </a:p>
+        </p:txBody>
+      </p:sp>
+      <p:sp>
+        <p:nvSpPr>
+          <p:cNvPr id="56" name="Shape 54"/>
+          <p:cNvSpPr/>
+          <p:nvPr/>
+        </p:nvSpPr>
+        <p:spPr>
+          <a:xfrm>
+            <a:off x="7677912" y="4169664"/>
+            <a:ext cx="685800" cy="475488"/>
+          </a:xfrm>
+          <a:prstGeom prst="rect">
+            <a:avLst>
+              <a:gd name="adj" fmla="val 7692"/>
+            </a:avLst>
+          </a:prstGeom>
+          <a:solidFill>
+            <a:srgbClr val="FFFFFF"/>
+          </a:solidFill>
+          <a:ln w="12700">
+            <a:solidFill>
+              <a:srgbClr val="DB2777"/>
+            </a:solidFill>
+            <a:prstDash val="solid"/>
+          </a:ln>
+        </p:spPr>
+      </p:sp>
+      <p:sp>
+        <p:nvSpPr>
+          <p:cNvPr id="57" name="Text 55"/>
+          <p:cNvSpPr/>
+          <p:nvPr/>
+        </p:nvSpPr>
+        <p:spPr>
+          <a:xfrm>
+            <a:off x="7677912" y="4169664"/>
+            <a:ext cx="685800" cy="475488"/>
+          </a:xfrm>
+          <a:prstGeom prst="rect">
+            <a:avLst/>
+          </a:prstGeom>
+          <a:noFill/>
+          <a:ln/>
+        </p:spPr>
+        <p:txBody>
+          <a:bodyPr wrap="square" lIns="0" tIns="0" rIns="0" bIns="0" rtlCol="0" anchor="ctr"/>
+          <a:lstStyle/>
+          <a:p>
+            <a:pPr algn="ctr" indent="0" marL="0">
+              <a:buNone/>
+            </a:pPr>
+            <a:r>
+              <a:rPr lang="en-US" sz="900" b="1" dirty="0">
+                <a:solidFill>
+                  <a:srgbClr val="9D174D"/>
+                </a:solidFill>
+                <a:latin typeface="Trebuchet MS" pitchFamily="34" charset="0"/>
+                <a:ea typeface="Trebuchet MS" pitchFamily="34" charset="-122"/>
+                <a:cs typeface="Trebuchet MS" pitchFamily="34" charset="-120"/>
+              </a:rPr>
+              <a:t>ate</a:t>
+            </a:r>
+            <a:endParaRPr lang="en-US" sz="900" dirty="0"/>
           </a:p>
         </p:txBody>
       </p:sp>
@@ -11131,7 +12007,7 @@
                 <a:ea typeface="Calibri" pitchFamily="34" charset="-122"/>
                 <a:cs typeface="Calibri" pitchFamily="34" charset="-120"/>
               </a:rPr>
-              <a:t>Word Labs  •  wordlabs.app  •  Prefix: 'de-' = down, away, undo, remove</a:t>
+              <a:t>Word Labs  •  wordlabs.app  •  Prefix: 'de-' = down, away, remove, reverse</a:t>
             </a:r>
             <a:endParaRPr lang="en-US" sz="800" dirty="0"/>
           </a:p>
@@ -11270,7 +12146,7 @@
                 <a:ea typeface="Trebuchet MS" pitchFamily="34" charset="-122"/>
                 <a:cs typeface="Trebuchet MS" pitchFamily="34" charset="-120"/>
               </a:rPr>
-              <a:t>departs</a:t>
+              <a:t>decoding</a:t>
             </a:r>
             <a:endParaRPr lang="en-US" sz="2800" dirty="0"/>
           </a:p>
@@ -11958,7 +12834,7 @@
                 <a:ea typeface="Calibri" pitchFamily="34" charset="-122"/>
                 <a:cs typeface="Calibri" pitchFamily="34" charset="-120"/>
               </a:rPr>
-              <a:t>Word Labs  •  wordlabs.app  •  Prefix: 'de-' = down, away, undo, remove</a:t>
+              <a:t>Word Labs  •  wordlabs.app  •  Prefix: 'de-' = down, away, remove, reverse</a:t>
             </a:r>
             <a:endParaRPr lang="en-US" sz="800" dirty="0"/>
           </a:p>
@@ -12097,7 +12973,7 @@
                 <a:ea typeface="Trebuchet MS" pitchFamily="34" charset="-122"/>
                 <a:cs typeface="Trebuchet MS" pitchFamily="34" charset="-120"/>
               </a:rPr>
-              <a:t>departs</a:t>
+              <a:t>decoding</a:t>
             </a:r>
             <a:endParaRPr lang="en-US" sz="2800" dirty="0"/>
           </a:p>
@@ -12275,7 +13151,7 @@
                 <a:ea typeface="Calibri" pitchFamily="34" charset="-122"/>
                 <a:cs typeface="Calibri" pitchFamily="34" charset="-120"/>
               </a:rPr>
-              <a:t>away</a:t>
+              <a:t>remove, reverse</a:t>
             </a:r>
             <a:endParaRPr lang="en-US" sz="850" dirty="0"/>
           </a:p>
@@ -12348,7 +13224,7 @@
                 <a:ea typeface="Trebuchet MS" pitchFamily="34" charset="-122"/>
                 <a:cs typeface="Trebuchet MS" pitchFamily="34" charset="-120"/>
               </a:rPr>
-              <a:t>part</a:t>
+              <a:t>cod</a:t>
             </a:r>
             <a:endParaRPr lang="en-US" sz="1300" dirty="0"/>
           </a:p>
@@ -12387,7 +13263,7 @@
                 <a:ea typeface="Calibri" pitchFamily="34" charset="-122"/>
                 <a:cs typeface="Calibri" pitchFamily="34" charset="-120"/>
               </a:rPr>
-              <a:t>to go away, leave</a:t>
+              <a:t>code, system of signs</a:t>
             </a:r>
             <a:endParaRPr lang="en-US" sz="850" dirty="0"/>
           </a:p>
@@ -12395,7 +13271,46 @@
       </p:sp>
       <p:sp>
         <p:nvSpPr>
-          <p:cNvPr id="22" name="Shape 20"/>
+          <p:cNvPr id="22" name="Text 20"/>
+          <p:cNvSpPr/>
+          <p:nvPr/>
+        </p:nvSpPr>
+        <p:spPr>
+          <a:xfrm>
+            <a:off x="4370832" y="2752344"/>
+            <a:ext cx="1828800" cy="182880"/>
+          </a:xfrm>
+          <a:prstGeom prst="rect">
+            <a:avLst/>
+          </a:prstGeom>
+          <a:noFill/>
+          <a:ln/>
+        </p:spPr>
+        <p:txBody>
+          <a:bodyPr wrap="square" lIns="0" tIns="0" rIns="0" bIns="0" rtlCol="0" anchor="t"/>
+          <a:lstStyle/>
+          <a:p>
+            <a:pPr algn="ctr" indent="0" marL="0">
+              <a:buNone/>
+            </a:pPr>
+            <a:r>
+              <a:rPr lang="en-US" sz="700" i="1" dirty="0">
+                <a:solidFill>
+                  <a:srgbClr val="94A3B8"/>
+                </a:solidFill>
+                <a:latin typeface="Calibri" pitchFamily="34" charset="0"/>
+                <a:ea typeface="Calibri" pitchFamily="34" charset="-122"/>
+                <a:cs typeface="Calibri" pitchFamily="34" charset="-120"/>
+              </a:rPr>
+              <a:t>'e' dropped before vowel suffix</a:t>
+            </a:r>
+            <a:endParaRPr lang="en-US" sz="700" dirty="0"/>
+          </a:p>
+        </p:txBody>
+      </p:sp>
+      <p:sp>
+        <p:nvSpPr>
+          <p:cNvPr id="23" name="Shape 21"/>
           <p:cNvSpPr/>
           <p:nvPr/>
         </p:nvSpPr>
@@ -12429,7 +13344,7 @@
       </p:sp>
       <p:sp>
         <p:nvSpPr>
-          <p:cNvPr id="23" name="Text 21"/>
+          <p:cNvPr id="24" name="Text 22"/>
           <p:cNvSpPr/>
           <p:nvPr/>
         </p:nvSpPr>
@@ -12460,7 +13375,7 @@
                 <a:ea typeface="Trebuchet MS" pitchFamily="34" charset="-122"/>
                 <a:cs typeface="Trebuchet MS" pitchFamily="34" charset="-120"/>
               </a:rPr>
-              <a:t>s</a:t>
+              <a:t>ing</a:t>
             </a:r>
             <a:endParaRPr lang="en-US" sz="1300" dirty="0"/>
           </a:p>
@@ -12468,7 +13383,7 @@
       </p:sp>
       <p:sp>
         <p:nvSpPr>
-          <p:cNvPr id="24" name="Text 22"/>
+          <p:cNvPr id="25" name="Text 23"/>
           <p:cNvSpPr/>
           <p:nvPr/>
         </p:nvSpPr>
@@ -12499,7 +13414,7 @@
                 <a:ea typeface="Calibri" pitchFamily="34" charset="-122"/>
                 <a:cs typeface="Calibri" pitchFamily="34" charset="-120"/>
               </a:rPr>
-              <a:t>third person singular</a:t>
+              <a:t>ongoing action</a:t>
             </a:r>
             <a:endParaRPr lang="en-US" sz="850" dirty="0"/>
           </a:p>
@@ -12507,7 +13422,7 @@
       </p:sp>
       <p:sp>
         <p:nvSpPr>
-          <p:cNvPr id="25" name="Shape 23"/>
+          <p:cNvPr id="26" name="Shape 24"/>
           <p:cNvSpPr/>
           <p:nvPr/>
         </p:nvSpPr>
@@ -12534,7 +13449,7 @@
       </p:sp>
       <p:sp>
         <p:nvSpPr>
-          <p:cNvPr id="26" name="Text 24"/>
+          <p:cNvPr id="27" name="Text 25"/>
           <p:cNvSpPr/>
           <p:nvPr/>
         </p:nvSpPr>
@@ -12573,7 +13488,7 @@
       </p:sp>
       <p:sp>
         <p:nvSpPr>
-          <p:cNvPr id="27" name="Shape 25"/>
+          <p:cNvPr id="28" name="Shape 26"/>
           <p:cNvSpPr/>
           <p:nvPr/>
         </p:nvSpPr>
@@ -12600,7 +13515,7 @@
       </p:sp>
       <p:sp>
         <p:nvSpPr>
-          <p:cNvPr id="28" name="Text 26"/>
+          <p:cNvPr id="29" name="Text 27"/>
           <p:cNvSpPr/>
           <p:nvPr/>
         </p:nvSpPr>
@@ -12639,7 +13554,7 @@
       </p:sp>
       <p:sp>
         <p:nvSpPr>
-          <p:cNvPr id="29" name="Shape 27"/>
+          <p:cNvPr id="30" name="Shape 28"/>
           <p:cNvSpPr/>
           <p:nvPr/>
         </p:nvSpPr>
@@ -12666,7 +13581,7 @@
       </p:sp>
       <p:sp>
         <p:nvSpPr>
-          <p:cNvPr id="30" name="Text 28"/>
+          <p:cNvPr id="31" name="Text 29"/>
           <p:cNvSpPr/>
           <p:nvPr/>
         </p:nvSpPr>
@@ -12705,7 +13620,7 @@
       </p:sp>
       <p:sp>
         <p:nvSpPr>
-          <p:cNvPr id="31" name="Shape 29"/>
+          <p:cNvPr id="32" name="Shape 30"/>
           <p:cNvSpPr/>
           <p:nvPr/>
         </p:nvSpPr>
@@ -12732,7 +13647,7 @@
       </p:sp>
       <p:sp>
         <p:nvSpPr>
-          <p:cNvPr id="32" name="Text 30"/>
+          <p:cNvPr id="33" name="Text 31"/>
           <p:cNvSpPr/>
           <p:nvPr/>
         </p:nvSpPr>
@@ -13055,7 +13970,7 @@
                 <a:ea typeface="Calibri" pitchFamily="34" charset="-122"/>
                 <a:cs typeface="Calibri" pitchFamily="34" charset="-120"/>
               </a:rPr>
-              <a:t>Word Labs  •  wordlabs.app  •  Prefix: 'de-' = down, away, undo, remove</a:t>
+              <a:t>Word Labs  •  wordlabs.app  •  Prefix: 'de-' = down, away, remove, reverse</a:t>
             </a:r>
             <a:endParaRPr lang="en-US" sz="800" dirty="0"/>
           </a:p>
@@ -13194,7 +14109,7 @@
                 <a:ea typeface="Trebuchet MS" pitchFamily="34" charset="-122"/>
                 <a:cs typeface="Trebuchet MS" pitchFamily="34" charset="-120"/>
               </a:rPr>
-              <a:t>departs</a:t>
+              <a:t>decoding</a:t>
             </a:r>
             <a:endParaRPr lang="en-US" sz="2800" dirty="0"/>
           </a:p>
@@ -13372,7 +14287,7 @@
                 <a:ea typeface="Calibri" pitchFamily="34" charset="-122"/>
                 <a:cs typeface="Calibri" pitchFamily="34" charset="-120"/>
               </a:rPr>
-              <a:t>away</a:t>
+              <a:t>remove, reverse</a:t>
             </a:r>
             <a:endParaRPr lang="en-US" sz="850" dirty="0"/>
           </a:p>
@@ -13445,7 +14360,7 @@
                 <a:ea typeface="Trebuchet MS" pitchFamily="34" charset="-122"/>
                 <a:cs typeface="Trebuchet MS" pitchFamily="34" charset="-120"/>
               </a:rPr>
-              <a:t>part</a:t>
+              <a:t>cod</a:t>
             </a:r>
             <a:endParaRPr lang="en-US" sz="1300" dirty="0"/>
           </a:p>
@@ -13484,7 +14399,7 @@
                 <a:ea typeface="Calibri" pitchFamily="34" charset="-122"/>
                 <a:cs typeface="Calibri" pitchFamily="34" charset="-120"/>
               </a:rPr>
-              <a:t>to go away, leave</a:t>
+              <a:t>code, system of signs</a:t>
             </a:r>
             <a:endParaRPr lang="en-US" sz="850" dirty="0"/>
           </a:p>
@@ -13492,7 +14407,46 @@
       </p:sp>
       <p:sp>
         <p:nvSpPr>
-          <p:cNvPr id="22" name="Shape 20"/>
+          <p:cNvPr id="22" name="Text 20"/>
+          <p:cNvSpPr/>
+          <p:nvPr/>
+        </p:nvSpPr>
+        <p:spPr>
+          <a:xfrm>
+            <a:off x="4370832" y="2752344"/>
+            <a:ext cx="1828800" cy="182880"/>
+          </a:xfrm>
+          <a:prstGeom prst="rect">
+            <a:avLst/>
+          </a:prstGeom>
+          <a:noFill/>
+          <a:ln/>
+        </p:spPr>
+        <p:txBody>
+          <a:bodyPr wrap="square" lIns="0" tIns="0" rIns="0" bIns="0" rtlCol="0" anchor="t"/>
+          <a:lstStyle/>
+          <a:p>
+            <a:pPr algn="ctr" indent="0" marL="0">
+              <a:buNone/>
+            </a:pPr>
+            <a:r>
+              <a:rPr lang="en-US" sz="700" i="1" dirty="0">
+                <a:solidFill>
+                  <a:srgbClr val="94A3B8"/>
+                </a:solidFill>
+                <a:latin typeface="Calibri" pitchFamily="34" charset="0"/>
+                <a:ea typeface="Calibri" pitchFamily="34" charset="-122"/>
+                <a:cs typeface="Calibri" pitchFamily="34" charset="-120"/>
+              </a:rPr>
+              <a:t>'e' dropped before vowel suffix</a:t>
+            </a:r>
+            <a:endParaRPr lang="en-US" sz="700" dirty="0"/>
+          </a:p>
+        </p:txBody>
+      </p:sp>
+      <p:sp>
+        <p:nvSpPr>
+          <p:cNvPr id="23" name="Shape 21"/>
           <p:cNvSpPr/>
           <p:nvPr/>
         </p:nvSpPr>
@@ -13526,7 +14480,7 @@
       </p:sp>
       <p:sp>
         <p:nvSpPr>
-          <p:cNvPr id="23" name="Text 21"/>
+          <p:cNvPr id="24" name="Text 22"/>
           <p:cNvSpPr/>
           <p:nvPr/>
         </p:nvSpPr>
@@ -13557,7 +14511,7 @@
                 <a:ea typeface="Trebuchet MS" pitchFamily="34" charset="-122"/>
                 <a:cs typeface="Trebuchet MS" pitchFamily="34" charset="-120"/>
               </a:rPr>
-              <a:t>s</a:t>
+              <a:t>ing</a:t>
             </a:r>
             <a:endParaRPr lang="en-US" sz="1300" dirty="0"/>
           </a:p>
@@ -13565,7 +14519,7 @@
       </p:sp>
       <p:sp>
         <p:nvSpPr>
-          <p:cNvPr id="24" name="Text 22"/>
+          <p:cNvPr id="25" name="Text 23"/>
           <p:cNvSpPr/>
           <p:nvPr/>
         </p:nvSpPr>
@@ -13596,7 +14550,7 @@
                 <a:ea typeface="Calibri" pitchFamily="34" charset="-122"/>
                 <a:cs typeface="Calibri" pitchFamily="34" charset="-120"/>
               </a:rPr>
-              <a:t>third person singular</a:t>
+              <a:t>ongoing action</a:t>
             </a:r>
             <a:endParaRPr lang="en-US" sz="850" dirty="0"/>
           </a:p>
@@ -13604,7 +14558,7 @@
       </p:sp>
       <p:sp>
         <p:nvSpPr>
-          <p:cNvPr id="25" name="Shape 23"/>
+          <p:cNvPr id="26" name="Shape 24"/>
           <p:cNvSpPr/>
           <p:nvPr/>
         </p:nvSpPr>
@@ -13631,7 +14585,7 @@
       </p:sp>
       <p:sp>
         <p:nvSpPr>
-          <p:cNvPr id="26" name="Text 24"/>
+          <p:cNvPr id="27" name="Text 25"/>
           <p:cNvSpPr/>
           <p:nvPr/>
         </p:nvSpPr>
@@ -13670,7 +14624,7 @@
       </p:sp>
       <p:sp>
         <p:nvSpPr>
-          <p:cNvPr id="27" name="Shape 25"/>
+          <p:cNvPr id="28" name="Shape 26"/>
           <p:cNvSpPr/>
           <p:nvPr/>
         </p:nvSpPr>
@@ -13697,13 +14651,13 @@
       </p:sp>
       <p:sp>
         <p:nvSpPr>
-          <p:cNvPr id="28" name="Shape 26"/>
-          <p:cNvSpPr/>
-          <p:nvPr/>
-        </p:nvSpPr>
-        <p:spPr>
-          <a:xfrm>
-            <a:off x="2999232" y="3364992"/>
+          <p:cNvPr id="29" name="Shape 27"/>
+          <p:cNvSpPr/>
+          <p:nvPr/>
+        </p:nvSpPr>
+        <p:spPr>
+          <a:xfrm>
+            <a:off x="2313432" y="3364992"/>
             <a:ext cx="1645920" cy="475488"/>
           </a:xfrm>
           <a:prstGeom prst="rect">
@@ -13724,13 +14678,13 @@
       </p:sp>
       <p:sp>
         <p:nvSpPr>
-          <p:cNvPr id="29" name="Text 27"/>
-          <p:cNvSpPr/>
-          <p:nvPr/>
-        </p:nvSpPr>
-        <p:spPr>
-          <a:xfrm>
-            <a:off x="2999232" y="3364992"/>
+          <p:cNvPr id="30" name="Text 28"/>
+          <p:cNvSpPr/>
+          <p:nvPr/>
+        </p:nvSpPr>
+        <p:spPr>
+          <a:xfrm>
+            <a:off x="2313432" y="3364992"/>
             <a:ext cx="1645920" cy="475488"/>
           </a:xfrm>
           <a:prstGeom prst="rect">
@@ -13763,14 +14717,14 @@
       </p:sp>
       <p:sp>
         <p:nvSpPr>
-          <p:cNvPr id="30" name="Text 28"/>
-          <p:cNvSpPr/>
-          <p:nvPr/>
-        </p:nvSpPr>
-        <p:spPr>
-          <a:xfrm>
-            <a:off x="4645152" y="3364992"/>
-            <a:ext cx="1097280" cy="475488"/>
+          <p:cNvPr id="31" name="Text 29"/>
+          <p:cNvSpPr/>
+          <p:nvPr/>
+        </p:nvSpPr>
+        <p:spPr>
+          <a:xfrm>
+            <a:off x="3959352" y="3364992"/>
+            <a:ext cx="411480" cy="475488"/>
           </a:xfrm>
           <a:prstGeom prst="rect">
             <a:avLst/>
@@ -13802,13 +14756,13 @@
       </p:sp>
       <p:sp>
         <p:nvSpPr>
-          <p:cNvPr id="31" name="Shape 29"/>
-          <p:cNvSpPr/>
-          <p:nvPr/>
-        </p:nvSpPr>
-        <p:spPr>
-          <a:xfrm>
-            <a:off x="5742432" y="3364992"/>
+          <p:cNvPr id="32" name="Shape 30"/>
+          <p:cNvSpPr/>
+          <p:nvPr/>
+        </p:nvSpPr>
+        <p:spPr>
+          <a:xfrm>
+            <a:off x="4370832" y="3364992"/>
             <a:ext cx="1645920" cy="475488"/>
           </a:xfrm>
           <a:prstGeom prst="rect">
@@ -13829,13 +14783,13 @@
       </p:sp>
       <p:sp>
         <p:nvSpPr>
-          <p:cNvPr id="32" name="Text 30"/>
-          <p:cNvSpPr/>
-          <p:nvPr/>
-        </p:nvSpPr>
-        <p:spPr>
-          <a:xfrm>
-            <a:off x="5742432" y="3364992"/>
+          <p:cNvPr id="33" name="Text 31"/>
+          <p:cNvSpPr/>
+          <p:nvPr/>
+        </p:nvSpPr>
+        <p:spPr>
+          <a:xfrm>
+            <a:off x="4370832" y="3364992"/>
             <a:ext cx="1645920" cy="475488"/>
           </a:xfrm>
           <a:prstGeom prst="rect">
@@ -13860,7 +14814,7 @@
                 <a:ea typeface="Trebuchet MS" pitchFamily="34" charset="-122"/>
                 <a:cs typeface="Trebuchet MS" pitchFamily="34" charset="-120"/>
               </a:rPr>
-              <a:t>parts</a:t>
+              <a:t>cod</a:t>
             </a:r>
             <a:endParaRPr lang="en-US" sz="1400" dirty="0"/>
           </a:p>
@@ -13868,7 +14822,112 @@
       </p:sp>
       <p:sp>
         <p:nvSpPr>
-          <p:cNvPr id="33" name="Shape 31"/>
+          <p:cNvPr id="34" name="Text 32"/>
+          <p:cNvSpPr/>
+          <p:nvPr/>
+        </p:nvSpPr>
+        <p:spPr>
+          <a:xfrm>
+            <a:off x="6016752" y="3364992"/>
+            <a:ext cx="411480" cy="475488"/>
+          </a:xfrm>
+          <a:prstGeom prst="rect">
+            <a:avLst/>
+          </a:prstGeom>
+          <a:noFill/>
+          <a:ln/>
+        </p:spPr>
+        <p:txBody>
+          <a:bodyPr wrap="square" lIns="0" tIns="0" rIns="0" bIns="0" rtlCol="0" anchor="ctr"/>
+          <a:lstStyle/>
+          <a:p>
+            <a:pPr algn="ctr" indent="0" marL="0">
+              <a:buNone/>
+            </a:pPr>
+            <a:r>
+              <a:rPr lang="en-US" sz="1600" b="1" dirty="0">
+                <a:solidFill>
+                  <a:srgbClr val="0D9488"/>
+                </a:solidFill>
+                <a:latin typeface="Trebuchet MS" pitchFamily="34" charset="0"/>
+                <a:ea typeface="Trebuchet MS" pitchFamily="34" charset="-122"/>
+                <a:cs typeface="Trebuchet MS" pitchFamily="34" charset="-120"/>
+              </a:rPr>
+              <a:t>·</a:t>
+            </a:r>
+            <a:endParaRPr lang="en-US" sz="1600" dirty="0"/>
+          </a:p>
+        </p:txBody>
+      </p:sp>
+      <p:sp>
+        <p:nvSpPr>
+          <p:cNvPr id="35" name="Shape 33"/>
+          <p:cNvSpPr/>
+          <p:nvPr/>
+        </p:nvSpPr>
+        <p:spPr>
+          <a:xfrm>
+            <a:off x="6428232" y="3364992"/>
+            <a:ext cx="1645920" cy="475488"/>
+          </a:xfrm>
+          <a:prstGeom prst="rect">
+            <a:avLst>
+              <a:gd name="adj" fmla="val 9615"/>
+            </a:avLst>
+          </a:prstGeom>
+          <a:solidFill>
+            <a:srgbClr val="FFFFFF"/>
+          </a:solidFill>
+          <a:ln w="12700">
+            <a:solidFill>
+              <a:srgbClr val="0D9488"/>
+            </a:solidFill>
+            <a:prstDash val="solid"/>
+          </a:ln>
+        </p:spPr>
+      </p:sp>
+      <p:sp>
+        <p:nvSpPr>
+          <p:cNvPr id="36" name="Text 34"/>
+          <p:cNvSpPr/>
+          <p:nvPr/>
+        </p:nvSpPr>
+        <p:spPr>
+          <a:xfrm>
+            <a:off x="6428232" y="3364992"/>
+            <a:ext cx="1645920" cy="475488"/>
+          </a:xfrm>
+          <a:prstGeom prst="rect">
+            <a:avLst/>
+          </a:prstGeom>
+          <a:noFill/>
+          <a:ln/>
+        </p:spPr>
+        <p:txBody>
+          <a:bodyPr wrap="square" lIns="0" tIns="0" rIns="0" bIns="0" rtlCol="0" anchor="ctr"/>
+          <a:lstStyle/>
+          <a:p>
+            <a:pPr algn="ctr" indent="0" marL="0">
+              <a:buNone/>
+            </a:pPr>
+            <a:r>
+              <a:rPr lang="en-US" sz="1400" b="1" dirty="0">
+                <a:solidFill>
+                  <a:srgbClr val="0D9488"/>
+                </a:solidFill>
+                <a:latin typeface="Trebuchet MS" pitchFamily="34" charset="0"/>
+                <a:ea typeface="Trebuchet MS" pitchFamily="34" charset="-122"/>
+                <a:cs typeface="Trebuchet MS" pitchFamily="34" charset="-120"/>
+              </a:rPr>
+              <a:t>ing</a:t>
+            </a:r>
+            <a:endParaRPr lang="en-US" sz="1400" dirty="0"/>
+          </a:p>
+        </p:txBody>
+      </p:sp>
+      <p:sp>
+        <p:nvSpPr>
+          <p:cNvPr id="37" name="Shape 35"/>
           <p:cNvSpPr/>
           <p:nvPr/>
         </p:nvSpPr>
@@ -13895,7 +14954,7 @@
       </p:sp>
       <p:sp>
         <p:nvSpPr>
-          <p:cNvPr id="34" name="Text 32"/>
+          <p:cNvPr id="38" name="Text 36"/>
           <p:cNvSpPr/>
           <p:nvPr/>
         </p:nvSpPr>
@@ -13934,7 +14993,7 @@
       </p:sp>
       <p:sp>
         <p:nvSpPr>
-          <p:cNvPr id="35" name="Shape 33"/>
+          <p:cNvPr id="39" name="Shape 37"/>
           <p:cNvSpPr/>
           <p:nvPr/>
         </p:nvSpPr>
@@ -13961,7 +15020,7 @@
       </p:sp>
       <p:sp>
         <p:nvSpPr>
-          <p:cNvPr id="36" name="Text 34"/>
+          <p:cNvPr id="40" name="Text 38"/>
           <p:cNvSpPr/>
           <p:nvPr/>
         </p:nvSpPr>
@@ -14193,7 +15252,7 @@
                 <a:ea typeface="Calibri" pitchFamily="34" charset="-122"/>
                 <a:cs typeface="Calibri" pitchFamily="34" charset="-120"/>
               </a:rPr>
-              <a:t>Prefix 'de-' — down, away, undo, remove</a:t>
+              <a:t>Prefix 'de-' — down, away, remove, reverse</a:t>
             </a:r>
             <a:endParaRPr lang="en-US" sz="1600" dirty="0"/>
           </a:p>
@@ -14549,7 +15608,7 @@
                 <a:ea typeface="Calibri" pitchFamily="34" charset="-122"/>
                 <a:cs typeface="Calibri" pitchFamily="34" charset="-120"/>
               </a:rPr>
-              <a:t>Word Labs  •  wordlabs.app  •  Prefix: 'de-' = down, away, undo, remove</a:t>
+              <a:t>Word Labs  •  wordlabs.app  •  Prefix: 'de-' = down, away, remove, reverse</a:t>
             </a:r>
             <a:endParaRPr lang="en-US" sz="800" dirty="0"/>
           </a:p>
@@ -14688,7 +15747,7 @@
                 <a:ea typeface="Trebuchet MS" pitchFamily="34" charset="-122"/>
                 <a:cs typeface="Trebuchet MS" pitchFamily="34" charset="-120"/>
               </a:rPr>
-              <a:t>departs</a:t>
+              <a:t>decoding</a:t>
             </a:r>
             <a:endParaRPr lang="en-US" sz="2800" dirty="0"/>
           </a:p>
@@ -14866,7 +15925,7 @@
                 <a:ea typeface="Calibri" pitchFamily="34" charset="-122"/>
                 <a:cs typeface="Calibri" pitchFamily="34" charset="-120"/>
               </a:rPr>
-              <a:t>away</a:t>
+              <a:t>remove, reverse</a:t>
             </a:r>
             <a:endParaRPr lang="en-US" sz="850" dirty="0"/>
           </a:p>
@@ -14939,7 +15998,7 @@
                 <a:ea typeface="Trebuchet MS" pitchFamily="34" charset="-122"/>
                 <a:cs typeface="Trebuchet MS" pitchFamily="34" charset="-120"/>
               </a:rPr>
-              <a:t>part</a:t>
+              <a:t>cod</a:t>
             </a:r>
             <a:endParaRPr lang="en-US" sz="1300" dirty="0"/>
           </a:p>
@@ -14978,7 +16037,7 @@
                 <a:ea typeface="Calibri" pitchFamily="34" charset="-122"/>
                 <a:cs typeface="Calibri" pitchFamily="34" charset="-120"/>
               </a:rPr>
-              <a:t>to go away, leave</a:t>
+              <a:t>code, system of signs</a:t>
             </a:r>
             <a:endParaRPr lang="en-US" sz="850" dirty="0"/>
           </a:p>
@@ -14986,7 +16045,46 @@
       </p:sp>
       <p:sp>
         <p:nvSpPr>
-          <p:cNvPr id="22" name="Shape 20"/>
+          <p:cNvPr id="22" name="Text 20"/>
+          <p:cNvSpPr/>
+          <p:nvPr/>
+        </p:nvSpPr>
+        <p:spPr>
+          <a:xfrm>
+            <a:off x="4370832" y="2752344"/>
+            <a:ext cx="1828800" cy="182880"/>
+          </a:xfrm>
+          <a:prstGeom prst="rect">
+            <a:avLst/>
+          </a:prstGeom>
+          <a:noFill/>
+          <a:ln/>
+        </p:spPr>
+        <p:txBody>
+          <a:bodyPr wrap="square" lIns="0" tIns="0" rIns="0" bIns="0" rtlCol="0" anchor="t"/>
+          <a:lstStyle/>
+          <a:p>
+            <a:pPr algn="ctr" indent="0" marL="0">
+              <a:buNone/>
+            </a:pPr>
+            <a:r>
+              <a:rPr lang="en-US" sz="700" i="1" dirty="0">
+                <a:solidFill>
+                  <a:srgbClr val="94A3B8"/>
+                </a:solidFill>
+                <a:latin typeface="Calibri" pitchFamily="34" charset="0"/>
+                <a:ea typeface="Calibri" pitchFamily="34" charset="-122"/>
+                <a:cs typeface="Calibri" pitchFamily="34" charset="-120"/>
+              </a:rPr>
+              <a:t>'e' dropped before vowel suffix</a:t>
+            </a:r>
+            <a:endParaRPr lang="en-US" sz="700" dirty="0"/>
+          </a:p>
+        </p:txBody>
+      </p:sp>
+      <p:sp>
+        <p:nvSpPr>
+          <p:cNvPr id="23" name="Shape 21"/>
           <p:cNvSpPr/>
           <p:nvPr/>
         </p:nvSpPr>
@@ -15020,7 +16118,7 @@
       </p:sp>
       <p:sp>
         <p:nvSpPr>
-          <p:cNvPr id="23" name="Text 21"/>
+          <p:cNvPr id="24" name="Text 22"/>
           <p:cNvSpPr/>
           <p:nvPr/>
         </p:nvSpPr>
@@ -15051,7 +16149,7 @@
                 <a:ea typeface="Trebuchet MS" pitchFamily="34" charset="-122"/>
                 <a:cs typeface="Trebuchet MS" pitchFamily="34" charset="-120"/>
               </a:rPr>
-              <a:t>s</a:t>
+              <a:t>ing</a:t>
             </a:r>
             <a:endParaRPr lang="en-US" sz="1300" dirty="0"/>
           </a:p>
@@ -15059,7 +16157,7 @@
       </p:sp>
       <p:sp>
         <p:nvSpPr>
-          <p:cNvPr id="24" name="Text 22"/>
+          <p:cNvPr id="25" name="Text 23"/>
           <p:cNvSpPr/>
           <p:nvPr/>
         </p:nvSpPr>
@@ -15090,7 +16188,7 @@
                 <a:ea typeface="Calibri" pitchFamily="34" charset="-122"/>
                 <a:cs typeface="Calibri" pitchFamily="34" charset="-120"/>
               </a:rPr>
-              <a:t>third person singular</a:t>
+              <a:t>ongoing action</a:t>
             </a:r>
             <a:endParaRPr lang="en-US" sz="850" dirty="0"/>
           </a:p>
@@ -15098,7 +16196,7 @@
       </p:sp>
       <p:sp>
         <p:nvSpPr>
-          <p:cNvPr id="25" name="Shape 23"/>
+          <p:cNvPr id="26" name="Shape 24"/>
           <p:cNvSpPr/>
           <p:nvPr/>
         </p:nvSpPr>
@@ -15125,7 +16223,7 @@
       </p:sp>
       <p:sp>
         <p:nvSpPr>
-          <p:cNvPr id="26" name="Text 24"/>
+          <p:cNvPr id="27" name="Text 25"/>
           <p:cNvSpPr/>
           <p:nvPr/>
         </p:nvSpPr>
@@ -15164,7 +16262,7 @@
       </p:sp>
       <p:sp>
         <p:nvSpPr>
-          <p:cNvPr id="27" name="Shape 25"/>
+          <p:cNvPr id="28" name="Shape 26"/>
           <p:cNvSpPr/>
           <p:nvPr/>
         </p:nvSpPr>
@@ -15191,13 +16289,13 @@
       </p:sp>
       <p:sp>
         <p:nvSpPr>
-          <p:cNvPr id="28" name="Shape 26"/>
-          <p:cNvSpPr/>
-          <p:nvPr/>
-        </p:nvSpPr>
-        <p:spPr>
-          <a:xfrm>
-            <a:off x="2999232" y="3364992"/>
+          <p:cNvPr id="29" name="Shape 27"/>
+          <p:cNvSpPr/>
+          <p:nvPr/>
+        </p:nvSpPr>
+        <p:spPr>
+          <a:xfrm>
+            <a:off x="2313432" y="3364992"/>
             <a:ext cx="1645920" cy="475488"/>
           </a:xfrm>
           <a:prstGeom prst="rect">
@@ -15218,13 +16316,13 @@
       </p:sp>
       <p:sp>
         <p:nvSpPr>
-          <p:cNvPr id="29" name="Text 27"/>
-          <p:cNvSpPr/>
-          <p:nvPr/>
-        </p:nvSpPr>
-        <p:spPr>
-          <a:xfrm>
-            <a:off x="2999232" y="3364992"/>
+          <p:cNvPr id="30" name="Text 28"/>
+          <p:cNvSpPr/>
+          <p:nvPr/>
+        </p:nvSpPr>
+        <p:spPr>
+          <a:xfrm>
+            <a:off x="2313432" y="3364992"/>
             <a:ext cx="1645920" cy="475488"/>
           </a:xfrm>
           <a:prstGeom prst="rect">
@@ -15257,14 +16355,14 @@
       </p:sp>
       <p:sp>
         <p:nvSpPr>
-          <p:cNvPr id="30" name="Text 28"/>
-          <p:cNvSpPr/>
-          <p:nvPr/>
-        </p:nvSpPr>
-        <p:spPr>
-          <a:xfrm>
-            <a:off x="4645152" y="3364992"/>
-            <a:ext cx="1097280" cy="475488"/>
+          <p:cNvPr id="31" name="Text 29"/>
+          <p:cNvSpPr/>
+          <p:nvPr/>
+        </p:nvSpPr>
+        <p:spPr>
+          <a:xfrm>
+            <a:off x="3959352" y="3364992"/>
+            <a:ext cx="411480" cy="475488"/>
           </a:xfrm>
           <a:prstGeom prst="rect">
             <a:avLst/>
@@ -15296,13 +16394,13 @@
       </p:sp>
       <p:sp>
         <p:nvSpPr>
-          <p:cNvPr id="31" name="Shape 29"/>
-          <p:cNvSpPr/>
-          <p:nvPr/>
-        </p:nvSpPr>
-        <p:spPr>
-          <a:xfrm>
-            <a:off x="5742432" y="3364992"/>
+          <p:cNvPr id="32" name="Shape 30"/>
+          <p:cNvSpPr/>
+          <p:nvPr/>
+        </p:nvSpPr>
+        <p:spPr>
+          <a:xfrm>
+            <a:off x="4370832" y="3364992"/>
             <a:ext cx="1645920" cy="475488"/>
           </a:xfrm>
           <a:prstGeom prst="rect">
@@ -15323,13 +16421,13 @@
       </p:sp>
       <p:sp>
         <p:nvSpPr>
-          <p:cNvPr id="32" name="Text 30"/>
-          <p:cNvSpPr/>
-          <p:nvPr/>
-        </p:nvSpPr>
-        <p:spPr>
-          <a:xfrm>
-            <a:off x="5742432" y="3364992"/>
+          <p:cNvPr id="33" name="Text 31"/>
+          <p:cNvSpPr/>
+          <p:nvPr/>
+        </p:nvSpPr>
+        <p:spPr>
+          <a:xfrm>
+            <a:off x="4370832" y="3364992"/>
             <a:ext cx="1645920" cy="475488"/>
           </a:xfrm>
           <a:prstGeom prst="rect">
@@ -15354,7 +16452,7 @@
                 <a:ea typeface="Trebuchet MS" pitchFamily="34" charset="-122"/>
                 <a:cs typeface="Trebuchet MS" pitchFamily="34" charset="-120"/>
               </a:rPr>
-              <a:t>parts</a:t>
+              <a:t>cod</a:t>
             </a:r>
             <a:endParaRPr lang="en-US" sz="1400" dirty="0"/>
           </a:p>
@@ -15362,7 +16460,112 @@
       </p:sp>
       <p:sp>
         <p:nvSpPr>
-          <p:cNvPr id="33" name="Shape 31"/>
+          <p:cNvPr id="34" name="Text 32"/>
+          <p:cNvSpPr/>
+          <p:nvPr/>
+        </p:nvSpPr>
+        <p:spPr>
+          <a:xfrm>
+            <a:off x="6016752" y="3364992"/>
+            <a:ext cx="411480" cy="475488"/>
+          </a:xfrm>
+          <a:prstGeom prst="rect">
+            <a:avLst/>
+          </a:prstGeom>
+          <a:noFill/>
+          <a:ln/>
+        </p:spPr>
+        <p:txBody>
+          <a:bodyPr wrap="square" lIns="0" tIns="0" rIns="0" bIns="0" rtlCol="0" anchor="ctr"/>
+          <a:lstStyle/>
+          <a:p>
+            <a:pPr algn="ctr" indent="0" marL="0">
+              <a:buNone/>
+            </a:pPr>
+            <a:r>
+              <a:rPr lang="en-US" sz="1600" b="1" dirty="0">
+                <a:solidFill>
+                  <a:srgbClr val="0D9488"/>
+                </a:solidFill>
+                <a:latin typeface="Trebuchet MS" pitchFamily="34" charset="0"/>
+                <a:ea typeface="Trebuchet MS" pitchFamily="34" charset="-122"/>
+                <a:cs typeface="Trebuchet MS" pitchFamily="34" charset="-120"/>
+              </a:rPr>
+              <a:t>·</a:t>
+            </a:r>
+            <a:endParaRPr lang="en-US" sz="1600" dirty="0"/>
+          </a:p>
+        </p:txBody>
+      </p:sp>
+      <p:sp>
+        <p:nvSpPr>
+          <p:cNvPr id="35" name="Shape 33"/>
+          <p:cNvSpPr/>
+          <p:nvPr/>
+        </p:nvSpPr>
+        <p:spPr>
+          <a:xfrm>
+            <a:off x="6428232" y="3364992"/>
+            <a:ext cx="1645920" cy="475488"/>
+          </a:xfrm>
+          <a:prstGeom prst="rect">
+            <a:avLst>
+              <a:gd name="adj" fmla="val 9615"/>
+            </a:avLst>
+          </a:prstGeom>
+          <a:solidFill>
+            <a:srgbClr val="FFFFFF"/>
+          </a:solidFill>
+          <a:ln w="12700">
+            <a:solidFill>
+              <a:srgbClr val="0D9488"/>
+            </a:solidFill>
+            <a:prstDash val="solid"/>
+          </a:ln>
+        </p:spPr>
+      </p:sp>
+      <p:sp>
+        <p:nvSpPr>
+          <p:cNvPr id="36" name="Text 34"/>
+          <p:cNvSpPr/>
+          <p:nvPr/>
+        </p:nvSpPr>
+        <p:spPr>
+          <a:xfrm>
+            <a:off x="6428232" y="3364992"/>
+            <a:ext cx="1645920" cy="475488"/>
+          </a:xfrm>
+          <a:prstGeom prst="rect">
+            <a:avLst/>
+          </a:prstGeom>
+          <a:noFill/>
+          <a:ln/>
+        </p:spPr>
+        <p:txBody>
+          <a:bodyPr wrap="square" lIns="0" tIns="0" rIns="0" bIns="0" rtlCol="0" anchor="ctr"/>
+          <a:lstStyle/>
+          <a:p>
+            <a:pPr algn="ctr" indent="0" marL="0">
+              <a:buNone/>
+            </a:pPr>
+            <a:r>
+              <a:rPr lang="en-US" sz="1400" b="1" dirty="0">
+                <a:solidFill>
+                  <a:srgbClr val="0D9488"/>
+                </a:solidFill>
+                <a:latin typeface="Trebuchet MS" pitchFamily="34" charset="0"/>
+                <a:ea typeface="Trebuchet MS" pitchFamily="34" charset="-122"/>
+                <a:cs typeface="Trebuchet MS" pitchFamily="34" charset="-120"/>
+              </a:rPr>
+              <a:t>ing</a:t>
+            </a:r>
+            <a:endParaRPr lang="en-US" sz="1400" dirty="0"/>
+          </a:p>
+        </p:txBody>
+      </p:sp>
+      <p:sp>
+        <p:nvSpPr>
+          <p:cNvPr id="37" name="Shape 35"/>
           <p:cNvSpPr/>
           <p:nvPr/>
         </p:nvSpPr>
@@ -15389,7 +16592,7 @@
       </p:sp>
       <p:sp>
         <p:nvSpPr>
-          <p:cNvPr id="34" name="Text 32"/>
+          <p:cNvPr id="38" name="Text 36"/>
           <p:cNvSpPr/>
           <p:nvPr/>
         </p:nvSpPr>
@@ -15428,7 +16631,7 @@
       </p:sp>
       <p:sp>
         <p:nvSpPr>
-          <p:cNvPr id="35" name="Shape 33"/>
+          <p:cNvPr id="39" name="Shape 37"/>
           <p:cNvSpPr/>
           <p:nvPr/>
         </p:nvSpPr>
@@ -15455,7 +16658,7 @@
       </p:sp>
       <p:sp>
         <p:nvSpPr>
-          <p:cNvPr id="36" name="Shape 34"/>
+          <p:cNvPr id="40" name="Shape 38"/>
           <p:cNvSpPr/>
           <p:nvPr/>
         </p:nvSpPr>
@@ -15482,7 +16685,7 @@
       </p:sp>
       <p:sp>
         <p:nvSpPr>
-          <p:cNvPr id="37" name="Text 35"/>
+          <p:cNvPr id="41" name="Text 39"/>
           <p:cNvSpPr/>
           <p:nvPr/>
         </p:nvSpPr>
@@ -15521,7 +16724,7 @@
       </p:sp>
       <p:sp>
         <p:nvSpPr>
-          <p:cNvPr id="38" name="Shape 36"/>
+          <p:cNvPr id="42" name="Shape 40"/>
           <p:cNvSpPr/>
           <p:nvPr/>
         </p:nvSpPr>
@@ -15548,7 +16751,7 @@
       </p:sp>
       <p:sp>
         <p:nvSpPr>
-          <p:cNvPr id="39" name="Text 37"/>
+          <p:cNvPr id="43" name="Text 41"/>
           <p:cNvSpPr/>
           <p:nvPr/>
         </p:nvSpPr>
@@ -15587,7 +16790,7 @@
       </p:sp>
       <p:sp>
         <p:nvSpPr>
-          <p:cNvPr id="40" name="Shape 38"/>
+          <p:cNvPr id="44" name="Shape 42"/>
           <p:cNvSpPr/>
           <p:nvPr/>
         </p:nvSpPr>
@@ -15614,7 +16817,7 @@
       </p:sp>
       <p:sp>
         <p:nvSpPr>
-          <p:cNvPr id="41" name="Text 39"/>
+          <p:cNvPr id="45" name="Text 43"/>
           <p:cNvSpPr/>
           <p:nvPr/>
         </p:nvSpPr>
@@ -15645,7 +16848,7 @@
                 <a:ea typeface="Trebuchet MS" pitchFamily="34" charset="-122"/>
                 <a:cs typeface="Trebuchet MS" pitchFamily="34" charset="-120"/>
               </a:rPr>
-              <a:t>p</a:t>
+              <a:t>c</a:t>
             </a:r>
             <a:endParaRPr lang="en-US" sz="900" dirty="0"/>
           </a:p>
@@ -15653,7 +16856,7 @@
       </p:sp>
       <p:sp>
         <p:nvSpPr>
-          <p:cNvPr id="42" name="Shape 40"/>
+          <p:cNvPr id="46" name="Shape 44"/>
           <p:cNvSpPr/>
           <p:nvPr/>
         </p:nvSpPr>
@@ -15680,7 +16883,7 @@
       </p:sp>
       <p:sp>
         <p:nvSpPr>
-          <p:cNvPr id="43" name="Text 41"/>
+          <p:cNvPr id="47" name="Text 45"/>
           <p:cNvSpPr/>
           <p:nvPr/>
         </p:nvSpPr>
@@ -15711,7 +16914,7 @@
                 <a:ea typeface="Trebuchet MS" pitchFamily="34" charset="-122"/>
                 <a:cs typeface="Trebuchet MS" pitchFamily="34" charset="-120"/>
               </a:rPr>
-              <a:t>ar</a:t>
+              <a:t>o</a:t>
             </a:r>
             <a:endParaRPr lang="en-US" sz="900" dirty="0"/>
           </a:p>
@@ -15719,7 +16922,7 @@
       </p:sp>
       <p:sp>
         <p:nvSpPr>
-          <p:cNvPr id="44" name="Shape 42"/>
+          <p:cNvPr id="48" name="Shape 46"/>
           <p:cNvSpPr/>
           <p:nvPr/>
         </p:nvSpPr>
@@ -15746,7 +16949,7 @@
       </p:sp>
       <p:sp>
         <p:nvSpPr>
-          <p:cNvPr id="45" name="Text 43"/>
+          <p:cNvPr id="49" name="Text 47"/>
           <p:cNvSpPr/>
           <p:nvPr/>
         </p:nvSpPr>
@@ -15777,7 +16980,7 @@
                 <a:ea typeface="Trebuchet MS" pitchFamily="34" charset="-122"/>
                 <a:cs typeface="Trebuchet MS" pitchFamily="34" charset="-120"/>
               </a:rPr>
-              <a:t>t</a:t>
+              <a:t>d</a:t>
             </a:r>
             <a:endParaRPr lang="en-US" sz="900" dirty="0"/>
           </a:p>
@@ -15785,7 +16988,7 @@
       </p:sp>
       <p:sp>
         <p:nvSpPr>
-          <p:cNvPr id="46" name="Shape 44"/>
+          <p:cNvPr id="50" name="Shape 48"/>
           <p:cNvSpPr/>
           <p:nvPr/>
         </p:nvSpPr>
@@ -15812,7 +17015,7 @@
       </p:sp>
       <p:sp>
         <p:nvSpPr>
-          <p:cNvPr id="47" name="Text 45"/>
+          <p:cNvPr id="51" name="Text 49"/>
           <p:cNvSpPr/>
           <p:nvPr/>
         </p:nvSpPr>
@@ -15843,7 +17046,7 @@
                 <a:ea typeface="Trebuchet MS" pitchFamily="34" charset="-122"/>
                 <a:cs typeface="Trebuchet MS" pitchFamily="34" charset="-120"/>
               </a:rPr>
-              <a:t>s</a:t>
+              <a:t>ing</a:t>
             </a:r>
             <a:endParaRPr lang="en-US" sz="900" dirty="0"/>
           </a:p>
@@ -16417,7 +17620,7 @@
                 <a:ea typeface="Calibri" pitchFamily="34" charset="-122"/>
                 <a:cs typeface="Calibri" pitchFamily="34" charset="-120"/>
               </a:rPr>
-              <a:t>Word Labs  •  wordlabs.app  •  Prefix: 'de-' = down, away, undo, remove</a:t>
+              <a:t>Word Labs  •  wordlabs.app  •  Prefix: 'de-' = down, away, remove, reverse</a:t>
             </a:r>
             <a:endParaRPr lang="en-US" sz="800" dirty="0"/>
           </a:p>
@@ -17057,7 +18260,7 @@
                 <a:ea typeface="Calibri" pitchFamily="34" charset="-122"/>
                 <a:cs typeface="Calibri" pitchFamily="34" charset="-120"/>
               </a:rPr>
-              <a:t>Word Labs  •  wordlabs.app  •  Prefix: 'de-' = down, away, undo, remove</a:t>
+              <a:t>Word Labs  •  wordlabs.app  •  Prefix: 'de-' = down, away, remove, reverse</a:t>
             </a:r>
             <a:endParaRPr lang="en-US" sz="800" dirty="0"/>
           </a:p>
@@ -17161,20 +18364,6 @@
               <a:buNone/>
             </a:pPr>
             <a:r>
-              <a:rPr lang="en-US" sz="1800" dirty="0">
-                <a:solidFill>
-                  <a:srgbClr val="0F172A"/>
-                </a:solidFill>
-                <a:latin typeface="Calibri" pitchFamily="34" charset="0"/>
-                <a:ea typeface="Calibri" pitchFamily="34" charset="-122"/>
-                <a:cs typeface="Calibri" pitchFamily="34" charset="-120"/>
-              </a:rPr>
-              <a:t>The explorer had to </a:t>
-            </a:r>
-            <a:pPr algn="l" indent="0" marL="0">
-              <a:buNone/>
-            </a:pPr>
-            <a:r>
               <a:rPr lang="en-US" sz="1800" b="1" dirty="0">
                 <a:solidFill>
                   <a:srgbClr val="0D9488"/>
@@ -17186,7 +18375,7 @@
                 <a:ea typeface="Calibri" pitchFamily="34" charset="-122"/>
                 <a:cs typeface="Calibri" pitchFamily="34" charset="-120"/>
               </a:rPr>
-              <a:t>defrost</a:t>
+              <a:t>Deforestation</a:t>
             </a:r>
             <a:pPr algn="l" indent="0" marL="0">
               <a:buNone/>
@@ -17200,7 +18389,7 @@
                 <a:ea typeface="Calibri" pitchFamily="34" charset="-122"/>
                 <a:cs typeface="Calibri" pitchFamily="34" charset="-120"/>
               </a:rPr>
-              <a:t> her equipment, </a:t>
+              <a:t> can </a:t>
             </a:r>
             <a:pPr algn="l" indent="0" marL="0">
               <a:buNone/>
@@ -17217,7 +18406,7 @@
                 <a:ea typeface="Calibri" pitchFamily="34" charset="-122"/>
                 <a:cs typeface="Calibri" pitchFamily="34" charset="-120"/>
               </a:rPr>
-              <a:t>decode</a:t>
+              <a:t>demolish</a:t>
             </a:r>
             <a:pPr algn="l" indent="0" marL="0">
               <a:buNone/>
@@ -17231,7 +18420,7 @@
                 <a:ea typeface="Calibri" pitchFamily="34" charset="-122"/>
                 <a:cs typeface="Calibri" pitchFamily="34" charset="-120"/>
               </a:rPr>
-              <a:t> the old map, and </a:t>
+              <a:t> habitats, so we must find ways to </a:t>
             </a:r>
             <a:pPr algn="l" indent="0" marL="0">
               <a:buNone/>
@@ -17248,7 +18437,7 @@
                 <a:ea typeface="Calibri" pitchFamily="34" charset="-122"/>
                 <a:cs typeface="Calibri" pitchFamily="34" charset="-120"/>
               </a:rPr>
-              <a:t>depart</a:t>
+              <a:t>decompose</a:t>
             </a:r>
             <a:pPr algn="l" indent="0" marL="0">
               <a:buNone/>
@@ -17262,7 +18451,7 @@
                 <a:ea typeface="Calibri" pitchFamily="34" charset="-122"/>
                 <a:cs typeface="Calibri" pitchFamily="34" charset="-120"/>
               </a:rPr>
-              <a:t> before sunrise.</a:t>
+              <a:t> waste instead of burning it.</a:t>
             </a:r>
             <a:endParaRPr lang="en-US" sz="1800" dirty="0"/>
           </a:p>
@@ -17417,7 +18606,7 @@
                 <a:ea typeface="Trebuchet MS" pitchFamily="34" charset="-122"/>
                 <a:cs typeface="Trebuchet MS" pitchFamily="34" charset="-120"/>
               </a:rPr>
-              <a:t>defrost</a:t>
+              <a:t>deforestation</a:t>
             </a:r>
             <a:endParaRPr lang="en-US" sz="1400" dirty="0"/>
           </a:p>
@@ -17545,7 +18734,7 @@
                 <a:ea typeface="Trebuchet MS" pitchFamily="34" charset="-122"/>
                 <a:cs typeface="Trebuchet MS" pitchFamily="34" charset="-120"/>
               </a:rPr>
-              <a:t>decode</a:t>
+              <a:t>demolish</a:t>
             </a:r>
             <a:endParaRPr lang="en-US" sz="1400" dirty="0"/>
           </a:p>
@@ -17673,7 +18862,7 @@
                 <a:ea typeface="Trebuchet MS" pitchFamily="34" charset="-122"/>
                 <a:cs typeface="Trebuchet MS" pitchFamily="34" charset="-120"/>
               </a:rPr>
-              <a:t>depart</a:t>
+              <a:t>decompose</a:t>
             </a:r>
             <a:endParaRPr lang="en-US" sz="1400" dirty="0"/>
           </a:p>
@@ -18004,7 +19193,7 @@
                 <a:ea typeface="Calibri" pitchFamily="34" charset="-122"/>
                 <a:cs typeface="Calibri" pitchFamily="34" charset="-120"/>
               </a:rPr>
-              <a:t>Word Labs  •  wordlabs.app  •  Prefix: 'de-' = down, away, undo, remove</a:t>
+              <a:t>Word Labs  •  wordlabs.app  •  Prefix: 'de-' = down, away, remove, reverse</a:t>
             </a:r>
             <a:endParaRPr lang="en-US" sz="800" dirty="0"/>
           </a:p>
@@ -18143,7 +19332,7 @@
                 <a:ea typeface="Trebuchet MS" pitchFamily="34" charset="-122"/>
                 <a:cs typeface="Trebuchet MS" pitchFamily="34" charset="-120"/>
               </a:rPr>
-              <a:t>defrost</a:t>
+              <a:t>deforestation</a:t>
             </a:r>
             <a:endParaRPr lang="en-US" sz="2800" dirty="0"/>
           </a:p>
@@ -18831,7 +20020,7 @@
                 <a:ea typeface="Calibri" pitchFamily="34" charset="-122"/>
                 <a:cs typeface="Calibri" pitchFamily="34" charset="-120"/>
               </a:rPr>
-              <a:t>Word Labs  •  wordlabs.app  •  Prefix: 'de-' = down, away, undo, remove</a:t>
+              <a:t>Word Labs  •  wordlabs.app  •  Prefix: 'de-' = down, away, remove, reverse</a:t>
             </a:r>
             <a:endParaRPr lang="en-US" sz="800" dirty="0"/>
           </a:p>
@@ -18970,7 +20159,7 @@
                 <a:ea typeface="Trebuchet MS" pitchFamily="34" charset="-122"/>
                 <a:cs typeface="Trebuchet MS" pitchFamily="34" charset="-120"/>
               </a:rPr>
-              <a:t>defrost</a:t>
+              <a:t>deforestation</a:t>
             </a:r>
             <a:endParaRPr lang="en-US" sz="2800" dirty="0"/>
           </a:p>
@@ -19050,8 +20239,8 @@
         </p:nvSpPr>
         <p:spPr>
           <a:xfrm>
-            <a:off x="2938272" y="2258568"/>
-            <a:ext cx="1828800" cy="292608"/>
+            <a:off x="1989734" y="2258568"/>
+            <a:ext cx="1581912" cy="292608"/>
           </a:xfrm>
           <a:prstGeom prst="rect">
             <a:avLst>
@@ -19084,8 +20273,8 @@
         </p:nvSpPr>
         <p:spPr>
           <a:xfrm>
-            <a:off x="2938272" y="2258568"/>
-            <a:ext cx="1828800" cy="292608"/>
+            <a:off x="1989734" y="2258568"/>
+            <a:ext cx="1581912" cy="292608"/>
           </a:xfrm>
           <a:prstGeom prst="rect">
             <a:avLst/>
@@ -19123,8 +20312,8 @@
         </p:nvSpPr>
         <p:spPr>
           <a:xfrm>
-            <a:off x="2938272" y="2569464"/>
-            <a:ext cx="1828800" cy="201168"/>
+            <a:off x="1989734" y="2569464"/>
+            <a:ext cx="1581912" cy="201168"/>
           </a:xfrm>
           <a:prstGeom prst="rect">
             <a:avLst/>
@@ -19148,7 +20337,7 @@
                 <a:ea typeface="Calibri" pitchFamily="34" charset="-122"/>
                 <a:cs typeface="Calibri" pitchFamily="34" charset="-120"/>
               </a:rPr>
-              <a:t>remove, undo</a:t>
+              <a:t>remove, away</a:t>
             </a:r>
             <a:endParaRPr lang="en-US" sz="850" dirty="0"/>
           </a:p>
@@ -19162,8 +20351,8 @@
         </p:nvSpPr>
         <p:spPr>
           <a:xfrm>
-            <a:off x="5803392" y="2258568"/>
-            <a:ext cx="1828800" cy="292608"/>
+            <a:off x="3659429" y="2258568"/>
+            <a:ext cx="1581912" cy="292608"/>
           </a:xfrm>
           <a:prstGeom prst="rect">
             <a:avLst>
@@ -19196,8 +20385,8 @@
         </p:nvSpPr>
         <p:spPr>
           <a:xfrm>
-            <a:off x="5803392" y="2258568"/>
-            <a:ext cx="1828800" cy="292608"/>
+            <a:off x="3659429" y="2258568"/>
+            <a:ext cx="1581912" cy="292608"/>
           </a:xfrm>
           <a:prstGeom prst="rect">
             <a:avLst/>
@@ -19221,7 +20410,7 @@
                 <a:ea typeface="Trebuchet MS" pitchFamily="34" charset="-122"/>
                 <a:cs typeface="Trebuchet MS" pitchFamily="34" charset="-120"/>
               </a:rPr>
-              <a:t>frost</a:t>
+              <a:t>forest</a:t>
             </a:r>
             <a:endParaRPr lang="en-US" sz="1300" dirty="0"/>
           </a:p>
@@ -19235,8 +20424,8 @@
         </p:nvSpPr>
         <p:spPr>
           <a:xfrm>
-            <a:off x="5803392" y="2569464"/>
-            <a:ext cx="1828800" cy="201168"/>
+            <a:off x="3659429" y="2569464"/>
+            <a:ext cx="1581912" cy="201168"/>
           </a:xfrm>
           <a:prstGeom prst="rect">
             <a:avLst/>
@@ -19260,7 +20449,7 @@
                 <a:ea typeface="Calibri" pitchFamily="34" charset="-122"/>
                 <a:cs typeface="Calibri" pitchFamily="34" charset="-120"/>
               </a:rPr>
-              <a:t>ice or frozen layer</a:t>
+              <a:t>large area of trees</a:t>
             </a:r>
             <a:endParaRPr lang="en-US" sz="850" dirty="0"/>
           </a:p>
@@ -19269,6 +20458,230 @@
       <p:sp>
         <p:nvSpPr>
           <p:cNvPr id="22" name="Shape 20"/>
+          <p:cNvSpPr/>
+          <p:nvPr/>
+        </p:nvSpPr>
+        <p:spPr>
+          <a:xfrm>
+            <a:off x="5329123" y="2258568"/>
+            <a:ext cx="1581912" cy="292608"/>
+          </a:xfrm>
+          <a:prstGeom prst="rect">
+            <a:avLst>
+              <a:gd name="adj" fmla="val 25000"/>
+            </a:avLst>
+          </a:prstGeom>
+          <a:solidFill>
+            <a:srgbClr val="FCE7F3"/>
+          </a:solidFill>
+          <a:ln w="19050">
+            <a:solidFill>
+              <a:srgbClr val="DB2777"/>
+            </a:solidFill>
+            <a:prstDash val="solid"/>
+          </a:ln>
+          <a:effectLst>
+            <a:outerShdw sx="100000" sy="100000" kx="0" ky="0" algn="bl" rotWithShape="0" blurRad="101600" dist="38100" dir="8100000">
+              <a:srgbClr val="000000">
+                <a:alpha val="12000"/>
+              </a:srgbClr>
+            </a:outerShdw>
+          </a:effectLst>
+        </p:spPr>
+      </p:sp>
+      <p:sp>
+        <p:nvSpPr>
+          <p:cNvPr id="23" name="Text 21"/>
+          <p:cNvSpPr/>
+          <p:nvPr/>
+        </p:nvSpPr>
+        <p:spPr>
+          <a:xfrm>
+            <a:off x="5329123" y="2258568"/>
+            <a:ext cx="1581912" cy="292608"/>
+          </a:xfrm>
+          <a:prstGeom prst="rect">
+            <a:avLst/>
+          </a:prstGeom>
+          <a:noFill/>
+          <a:ln/>
+        </p:spPr>
+        <p:txBody>
+          <a:bodyPr wrap="square" lIns="0" tIns="0" rIns="0" bIns="0" rtlCol="0" anchor="ctr"/>
+          <a:lstStyle/>
+          <a:p>
+            <a:pPr algn="ctr" indent="0" marL="0">
+              <a:buNone/>
+            </a:pPr>
+            <a:r>
+              <a:rPr lang="en-US" sz="1300" b="1" dirty="0">
+                <a:solidFill>
+                  <a:srgbClr val="9D174D"/>
+                </a:solidFill>
+                <a:latin typeface="Trebuchet MS" pitchFamily="34" charset="0"/>
+                <a:ea typeface="Trebuchet MS" pitchFamily="34" charset="-122"/>
+                <a:cs typeface="Trebuchet MS" pitchFamily="34" charset="-120"/>
+              </a:rPr>
+              <a:t>at</a:t>
+            </a:r>
+            <a:endParaRPr lang="en-US" sz="1300" dirty="0"/>
+          </a:p>
+        </p:txBody>
+      </p:sp>
+      <p:sp>
+        <p:nvSpPr>
+          <p:cNvPr id="24" name="Text 22"/>
+          <p:cNvSpPr/>
+          <p:nvPr/>
+        </p:nvSpPr>
+        <p:spPr>
+          <a:xfrm>
+            <a:off x="5329123" y="2569464"/>
+            <a:ext cx="1581912" cy="201168"/>
+          </a:xfrm>
+          <a:prstGeom prst="rect">
+            <a:avLst/>
+          </a:prstGeom>
+          <a:noFill/>
+          <a:ln/>
+        </p:spPr>
+        <p:txBody>
+          <a:bodyPr wrap="square" lIns="0" tIns="0" rIns="0" bIns="0" rtlCol="0" anchor="t"/>
+          <a:lstStyle/>
+          <a:p>
+            <a:pPr algn="ctr" indent="0" marL="0">
+              <a:buNone/>
+            </a:pPr>
+            <a:r>
+              <a:rPr lang="en-US" sz="850" dirty="0">
+                <a:solidFill>
+                  <a:srgbClr val="475569"/>
+                </a:solidFill>
+                <a:latin typeface="Calibri" pitchFamily="34" charset="0"/>
+                <a:ea typeface="Calibri" pitchFamily="34" charset="-122"/>
+                <a:cs typeface="Calibri" pitchFamily="34" charset="-120"/>
+              </a:rPr>
+              <a:t>action</a:t>
+            </a:r>
+            <a:endParaRPr lang="en-US" sz="850" dirty="0"/>
+          </a:p>
+        </p:txBody>
+      </p:sp>
+      <p:sp>
+        <p:nvSpPr>
+          <p:cNvPr id="25" name="Shape 23"/>
+          <p:cNvSpPr/>
+          <p:nvPr/>
+        </p:nvSpPr>
+        <p:spPr>
+          <a:xfrm>
+            <a:off x="6998818" y="2258568"/>
+            <a:ext cx="1581912" cy="292608"/>
+          </a:xfrm>
+          <a:prstGeom prst="rect">
+            <a:avLst>
+              <a:gd name="adj" fmla="val 25000"/>
+            </a:avLst>
+          </a:prstGeom>
+          <a:solidFill>
+            <a:srgbClr val="FCE7F3"/>
+          </a:solidFill>
+          <a:ln w="19050">
+            <a:solidFill>
+              <a:srgbClr val="DB2777"/>
+            </a:solidFill>
+            <a:prstDash val="solid"/>
+          </a:ln>
+          <a:effectLst>
+            <a:outerShdw sx="100000" sy="100000" kx="0" ky="0" algn="bl" rotWithShape="0" blurRad="101600" dist="38100" dir="8100000">
+              <a:srgbClr val="000000">
+                <a:alpha val="12000"/>
+              </a:srgbClr>
+            </a:outerShdw>
+          </a:effectLst>
+        </p:spPr>
+      </p:sp>
+      <p:sp>
+        <p:nvSpPr>
+          <p:cNvPr id="26" name="Text 24"/>
+          <p:cNvSpPr/>
+          <p:nvPr/>
+        </p:nvSpPr>
+        <p:spPr>
+          <a:xfrm>
+            <a:off x="6998818" y="2258568"/>
+            <a:ext cx="1581912" cy="292608"/>
+          </a:xfrm>
+          <a:prstGeom prst="rect">
+            <a:avLst/>
+          </a:prstGeom>
+          <a:noFill/>
+          <a:ln/>
+        </p:spPr>
+        <p:txBody>
+          <a:bodyPr wrap="square" lIns="0" tIns="0" rIns="0" bIns="0" rtlCol="0" anchor="ctr"/>
+          <a:lstStyle/>
+          <a:p>
+            <a:pPr algn="ctr" indent="0" marL="0">
+              <a:buNone/>
+            </a:pPr>
+            <a:r>
+              <a:rPr lang="en-US" sz="1300" b="1" dirty="0">
+                <a:solidFill>
+                  <a:srgbClr val="9D174D"/>
+                </a:solidFill>
+                <a:latin typeface="Trebuchet MS" pitchFamily="34" charset="0"/>
+                <a:ea typeface="Trebuchet MS" pitchFamily="34" charset="-122"/>
+                <a:cs typeface="Trebuchet MS" pitchFamily="34" charset="-120"/>
+              </a:rPr>
+              <a:t>ion</a:t>
+            </a:r>
+            <a:endParaRPr lang="en-US" sz="1300" dirty="0"/>
+          </a:p>
+        </p:txBody>
+      </p:sp>
+      <p:sp>
+        <p:nvSpPr>
+          <p:cNvPr id="27" name="Text 25"/>
+          <p:cNvSpPr/>
+          <p:nvPr/>
+        </p:nvSpPr>
+        <p:spPr>
+          <a:xfrm>
+            <a:off x="6998818" y="2569464"/>
+            <a:ext cx="1581912" cy="201168"/>
+          </a:xfrm>
+          <a:prstGeom prst="rect">
+            <a:avLst/>
+          </a:prstGeom>
+          <a:noFill/>
+          <a:ln/>
+        </p:spPr>
+        <p:txBody>
+          <a:bodyPr wrap="square" lIns="0" tIns="0" rIns="0" bIns="0" rtlCol="0" anchor="t"/>
+          <a:lstStyle/>
+          <a:p>
+            <a:pPr algn="ctr" indent="0" marL="0">
+              <a:buNone/>
+            </a:pPr>
+            <a:r>
+              <a:rPr lang="en-US" sz="850" dirty="0">
+                <a:solidFill>
+                  <a:srgbClr val="475569"/>
+                </a:solidFill>
+                <a:latin typeface="Calibri" pitchFamily="34" charset="0"/>
+                <a:ea typeface="Calibri" pitchFamily="34" charset="-122"/>
+                <a:cs typeface="Calibri" pitchFamily="34" charset="-120"/>
+              </a:rPr>
+              <a:t>state or process</a:t>
+            </a:r>
+            <a:endParaRPr lang="en-US" sz="850" dirty="0"/>
+          </a:p>
+        </p:txBody>
+      </p:sp>
+      <p:sp>
+        <p:nvSpPr>
+          <p:cNvPr id="28" name="Shape 26"/>
           <p:cNvSpPr/>
           <p:nvPr/>
         </p:nvSpPr>
@@ -19295,7 +20708,7 @@
       </p:sp>
       <p:sp>
         <p:nvSpPr>
-          <p:cNvPr id="23" name="Text 21"/>
+          <p:cNvPr id="29" name="Text 27"/>
           <p:cNvSpPr/>
           <p:nvPr/>
         </p:nvSpPr>
@@ -19334,7 +20747,7 @@
       </p:sp>
       <p:sp>
         <p:nvSpPr>
-          <p:cNvPr id="24" name="Shape 22"/>
+          <p:cNvPr id="30" name="Shape 28"/>
           <p:cNvSpPr/>
           <p:nvPr/>
         </p:nvSpPr>
@@ -19361,7 +20774,7 @@
       </p:sp>
       <p:sp>
         <p:nvSpPr>
-          <p:cNvPr id="25" name="Text 23"/>
+          <p:cNvPr id="31" name="Text 29"/>
           <p:cNvSpPr/>
           <p:nvPr/>
         </p:nvSpPr>
@@ -19400,7 +20813,7 @@
       </p:sp>
       <p:sp>
         <p:nvSpPr>
-          <p:cNvPr id="26" name="Shape 24"/>
+          <p:cNvPr id="32" name="Shape 30"/>
           <p:cNvSpPr/>
           <p:nvPr/>
         </p:nvSpPr>
@@ -19427,7 +20840,7 @@
       </p:sp>
       <p:sp>
         <p:nvSpPr>
-          <p:cNvPr id="27" name="Text 25"/>
+          <p:cNvPr id="33" name="Text 31"/>
           <p:cNvSpPr/>
           <p:nvPr/>
         </p:nvSpPr>
@@ -19466,7 +20879,7 @@
       </p:sp>
       <p:sp>
         <p:nvSpPr>
-          <p:cNvPr id="28" name="Shape 26"/>
+          <p:cNvPr id="34" name="Shape 32"/>
           <p:cNvSpPr/>
           <p:nvPr/>
         </p:nvSpPr>
@@ -19493,7 +20906,7 @@
       </p:sp>
       <p:sp>
         <p:nvSpPr>
-          <p:cNvPr id="29" name="Text 27"/>
+          <p:cNvPr id="35" name="Text 33"/>
           <p:cNvSpPr/>
           <p:nvPr/>
         </p:nvSpPr>
@@ -19816,7 +21229,7 @@
                 <a:ea typeface="Calibri" pitchFamily="34" charset="-122"/>
                 <a:cs typeface="Calibri" pitchFamily="34" charset="-120"/>
               </a:rPr>
-              <a:t>Word Labs  •  wordlabs.app  •  Prefix: 'de-' = down, away, undo, remove</a:t>
+              <a:t>Word Labs  •  wordlabs.app  •  Prefix: 'de-' = down, away, remove, reverse</a:t>
             </a:r>
             <a:endParaRPr lang="en-US" sz="800" dirty="0"/>
           </a:p>
@@ -19955,7 +21368,7 @@
                 <a:ea typeface="Trebuchet MS" pitchFamily="34" charset="-122"/>
                 <a:cs typeface="Trebuchet MS" pitchFamily="34" charset="-120"/>
               </a:rPr>
-              <a:t>defrost</a:t>
+              <a:t>deforestation</a:t>
             </a:r>
             <a:endParaRPr lang="en-US" sz="2800" dirty="0"/>
           </a:p>
@@ -20035,8 +21448,8 @@
         </p:nvSpPr>
         <p:spPr>
           <a:xfrm>
-            <a:off x="2938272" y="2258568"/>
-            <a:ext cx="1828800" cy="292608"/>
+            <a:off x="1989734" y="2258568"/>
+            <a:ext cx="1581912" cy="292608"/>
           </a:xfrm>
           <a:prstGeom prst="rect">
             <a:avLst>
@@ -20069,8 +21482,8 @@
         </p:nvSpPr>
         <p:spPr>
           <a:xfrm>
-            <a:off x="2938272" y="2258568"/>
-            <a:ext cx="1828800" cy="292608"/>
+            <a:off x="1989734" y="2258568"/>
+            <a:ext cx="1581912" cy="292608"/>
           </a:xfrm>
           <a:prstGeom prst="rect">
             <a:avLst/>
@@ -20108,8 +21521,8 @@
         </p:nvSpPr>
         <p:spPr>
           <a:xfrm>
-            <a:off x="2938272" y="2569464"/>
-            <a:ext cx="1828800" cy="201168"/>
+            <a:off x="1989734" y="2569464"/>
+            <a:ext cx="1581912" cy="201168"/>
           </a:xfrm>
           <a:prstGeom prst="rect">
             <a:avLst/>
@@ -20133,7 +21546,7 @@
                 <a:ea typeface="Calibri" pitchFamily="34" charset="-122"/>
                 <a:cs typeface="Calibri" pitchFamily="34" charset="-120"/>
               </a:rPr>
-              <a:t>remove, undo</a:t>
+              <a:t>remove, away</a:t>
             </a:r>
             <a:endParaRPr lang="en-US" sz="850" dirty="0"/>
           </a:p>
@@ -20147,8 +21560,8 @@
         </p:nvSpPr>
         <p:spPr>
           <a:xfrm>
-            <a:off x="5803392" y="2258568"/>
-            <a:ext cx="1828800" cy="292608"/>
+            <a:off x="3659429" y="2258568"/>
+            <a:ext cx="1581912" cy="292608"/>
           </a:xfrm>
           <a:prstGeom prst="rect">
             <a:avLst>
@@ -20181,8 +21594,8 @@
         </p:nvSpPr>
         <p:spPr>
           <a:xfrm>
-            <a:off x="5803392" y="2258568"/>
-            <a:ext cx="1828800" cy="292608"/>
+            <a:off x="3659429" y="2258568"/>
+            <a:ext cx="1581912" cy="292608"/>
           </a:xfrm>
           <a:prstGeom prst="rect">
             <a:avLst/>
@@ -20206,7 +21619,7 @@
                 <a:ea typeface="Trebuchet MS" pitchFamily="34" charset="-122"/>
                 <a:cs typeface="Trebuchet MS" pitchFamily="34" charset="-120"/>
               </a:rPr>
-              <a:t>frost</a:t>
+              <a:t>forest</a:t>
             </a:r>
             <a:endParaRPr lang="en-US" sz="1300" dirty="0"/>
           </a:p>
@@ -20220,8 +21633,8 @@
         </p:nvSpPr>
         <p:spPr>
           <a:xfrm>
-            <a:off x="5803392" y="2569464"/>
-            <a:ext cx="1828800" cy="201168"/>
+            <a:off x="3659429" y="2569464"/>
+            <a:ext cx="1581912" cy="201168"/>
           </a:xfrm>
           <a:prstGeom prst="rect">
             <a:avLst/>
@@ -20245,7 +21658,7 @@
                 <a:ea typeface="Calibri" pitchFamily="34" charset="-122"/>
                 <a:cs typeface="Calibri" pitchFamily="34" charset="-120"/>
               </a:rPr>
-              <a:t>ice or frozen layer</a:t>
+              <a:t>large area of trees</a:t>
             </a:r>
             <a:endParaRPr lang="en-US" sz="850" dirty="0"/>
           </a:p>
@@ -20254,6 +21667,230 @@
       <p:sp>
         <p:nvSpPr>
           <p:cNvPr id="22" name="Shape 20"/>
+          <p:cNvSpPr/>
+          <p:nvPr/>
+        </p:nvSpPr>
+        <p:spPr>
+          <a:xfrm>
+            <a:off x="5329123" y="2258568"/>
+            <a:ext cx="1581912" cy="292608"/>
+          </a:xfrm>
+          <a:prstGeom prst="rect">
+            <a:avLst>
+              <a:gd name="adj" fmla="val 25000"/>
+            </a:avLst>
+          </a:prstGeom>
+          <a:solidFill>
+            <a:srgbClr val="FCE7F3"/>
+          </a:solidFill>
+          <a:ln w="19050">
+            <a:solidFill>
+              <a:srgbClr val="DB2777"/>
+            </a:solidFill>
+            <a:prstDash val="solid"/>
+          </a:ln>
+          <a:effectLst>
+            <a:outerShdw sx="100000" sy="100000" kx="0" ky="0" algn="bl" rotWithShape="0" blurRad="101600" dist="38100" dir="8100000">
+              <a:srgbClr val="000000">
+                <a:alpha val="12000"/>
+              </a:srgbClr>
+            </a:outerShdw>
+          </a:effectLst>
+        </p:spPr>
+      </p:sp>
+      <p:sp>
+        <p:nvSpPr>
+          <p:cNvPr id="23" name="Text 21"/>
+          <p:cNvSpPr/>
+          <p:nvPr/>
+        </p:nvSpPr>
+        <p:spPr>
+          <a:xfrm>
+            <a:off x="5329123" y="2258568"/>
+            <a:ext cx="1581912" cy="292608"/>
+          </a:xfrm>
+          <a:prstGeom prst="rect">
+            <a:avLst/>
+          </a:prstGeom>
+          <a:noFill/>
+          <a:ln/>
+        </p:spPr>
+        <p:txBody>
+          <a:bodyPr wrap="square" lIns="0" tIns="0" rIns="0" bIns="0" rtlCol="0" anchor="ctr"/>
+          <a:lstStyle/>
+          <a:p>
+            <a:pPr algn="ctr" indent="0" marL="0">
+              <a:buNone/>
+            </a:pPr>
+            <a:r>
+              <a:rPr lang="en-US" sz="1300" b="1" dirty="0">
+                <a:solidFill>
+                  <a:srgbClr val="9D174D"/>
+                </a:solidFill>
+                <a:latin typeface="Trebuchet MS" pitchFamily="34" charset="0"/>
+                <a:ea typeface="Trebuchet MS" pitchFamily="34" charset="-122"/>
+                <a:cs typeface="Trebuchet MS" pitchFamily="34" charset="-120"/>
+              </a:rPr>
+              <a:t>at</a:t>
+            </a:r>
+            <a:endParaRPr lang="en-US" sz="1300" dirty="0"/>
+          </a:p>
+        </p:txBody>
+      </p:sp>
+      <p:sp>
+        <p:nvSpPr>
+          <p:cNvPr id="24" name="Text 22"/>
+          <p:cNvSpPr/>
+          <p:nvPr/>
+        </p:nvSpPr>
+        <p:spPr>
+          <a:xfrm>
+            <a:off x="5329123" y="2569464"/>
+            <a:ext cx="1581912" cy="201168"/>
+          </a:xfrm>
+          <a:prstGeom prst="rect">
+            <a:avLst/>
+          </a:prstGeom>
+          <a:noFill/>
+          <a:ln/>
+        </p:spPr>
+        <p:txBody>
+          <a:bodyPr wrap="square" lIns="0" tIns="0" rIns="0" bIns="0" rtlCol="0" anchor="t"/>
+          <a:lstStyle/>
+          <a:p>
+            <a:pPr algn="ctr" indent="0" marL="0">
+              <a:buNone/>
+            </a:pPr>
+            <a:r>
+              <a:rPr lang="en-US" sz="850" dirty="0">
+                <a:solidFill>
+                  <a:srgbClr val="475569"/>
+                </a:solidFill>
+                <a:latin typeface="Calibri" pitchFamily="34" charset="0"/>
+                <a:ea typeface="Calibri" pitchFamily="34" charset="-122"/>
+                <a:cs typeface="Calibri" pitchFamily="34" charset="-120"/>
+              </a:rPr>
+              <a:t>action</a:t>
+            </a:r>
+            <a:endParaRPr lang="en-US" sz="850" dirty="0"/>
+          </a:p>
+        </p:txBody>
+      </p:sp>
+      <p:sp>
+        <p:nvSpPr>
+          <p:cNvPr id="25" name="Shape 23"/>
+          <p:cNvSpPr/>
+          <p:nvPr/>
+        </p:nvSpPr>
+        <p:spPr>
+          <a:xfrm>
+            <a:off x="6998818" y="2258568"/>
+            <a:ext cx="1581912" cy="292608"/>
+          </a:xfrm>
+          <a:prstGeom prst="rect">
+            <a:avLst>
+              <a:gd name="adj" fmla="val 25000"/>
+            </a:avLst>
+          </a:prstGeom>
+          <a:solidFill>
+            <a:srgbClr val="FCE7F3"/>
+          </a:solidFill>
+          <a:ln w="19050">
+            <a:solidFill>
+              <a:srgbClr val="DB2777"/>
+            </a:solidFill>
+            <a:prstDash val="solid"/>
+          </a:ln>
+          <a:effectLst>
+            <a:outerShdw sx="100000" sy="100000" kx="0" ky="0" algn="bl" rotWithShape="0" blurRad="101600" dist="38100" dir="8100000">
+              <a:srgbClr val="000000">
+                <a:alpha val="12000"/>
+              </a:srgbClr>
+            </a:outerShdw>
+          </a:effectLst>
+        </p:spPr>
+      </p:sp>
+      <p:sp>
+        <p:nvSpPr>
+          <p:cNvPr id="26" name="Text 24"/>
+          <p:cNvSpPr/>
+          <p:nvPr/>
+        </p:nvSpPr>
+        <p:spPr>
+          <a:xfrm>
+            <a:off x="6998818" y="2258568"/>
+            <a:ext cx="1581912" cy="292608"/>
+          </a:xfrm>
+          <a:prstGeom prst="rect">
+            <a:avLst/>
+          </a:prstGeom>
+          <a:noFill/>
+          <a:ln/>
+        </p:spPr>
+        <p:txBody>
+          <a:bodyPr wrap="square" lIns="0" tIns="0" rIns="0" bIns="0" rtlCol="0" anchor="ctr"/>
+          <a:lstStyle/>
+          <a:p>
+            <a:pPr algn="ctr" indent="0" marL="0">
+              <a:buNone/>
+            </a:pPr>
+            <a:r>
+              <a:rPr lang="en-US" sz="1300" b="1" dirty="0">
+                <a:solidFill>
+                  <a:srgbClr val="9D174D"/>
+                </a:solidFill>
+                <a:latin typeface="Trebuchet MS" pitchFamily="34" charset="0"/>
+                <a:ea typeface="Trebuchet MS" pitchFamily="34" charset="-122"/>
+                <a:cs typeface="Trebuchet MS" pitchFamily="34" charset="-120"/>
+              </a:rPr>
+              <a:t>ion</a:t>
+            </a:r>
+            <a:endParaRPr lang="en-US" sz="1300" dirty="0"/>
+          </a:p>
+        </p:txBody>
+      </p:sp>
+      <p:sp>
+        <p:nvSpPr>
+          <p:cNvPr id="27" name="Text 25"/>
+          <p:cNvSpPr/>
+          <p:nvPr/>
+        </p:nvSpPr>
+        <p:spPr>
+          <a:xfrm>
+            <a:off x="6998818" y="2569464"/>
+            <a:ext cx="1581912" cy="201168"/>
+          </a:xfrm>
+          <a:prstGeom prst="rect">
+            <a:avLst/>
+          </a:prstGeom>
+          <a:noFill/>
+          <a:ln/>
+        </p:spPr>
+        <p:txBody>
+          <a:bodyPr wrap="square" lIns="0" tIns="0" rIns="0" bIns="0" rtlCol="0" anchor="t"/>
+          <a:lstStyle/>
+          <a:p>
+            <a:pPr algn="ctr" indent="0" marL="0">
+              <a:buNone/>
+            </a:pPr>
+            <a:r>
+              <a:rPr lang="en-US" sz="850" dirty="0">
+                <a:solidFill>
+                  <a:srgbClr val="475569"/>
+                </a:solidFill>
+                <a:latin typeface="Calibri" pitchFamily="34" charset="0"/>
+                <a:ea typeface="Calibri" pitchFamily="34" charset="-122"/>
+                <a:cs typeface="Calibri" pitchFamily="34" charset="-120"/>
+              </a:rPr>
+              <a:t>state or process</a:t>
+            </a:r>
+            <a:endParaRPr lang="en-US" sz="850" dirty="0"/>
+          </a:p>
+        </p:txBody>
+      </p:sp>
+      <p:sp>
+        <p:nvSpPr>
+          <p:cNvPr id="28" name="Shape 26"/>
           <p:cNvSpPr/>
           <p:nvPr/>
         </p:nvSpPr>
@@ -20280,7 +21917,7 @@
       </p:sp>
       <p:sp>
         <p:nvSpPr>
-          <p:cNvPr id="23" name="Text 21"/>
+          <p:cNvPr id="29" name="Text 27"/>
           <p:cNvSpPr/>
           <p:nvPr/>
         </p:nvSpPr>
@@ -20319,7 +21956,7 @@
       </p:sp>
       <p:sp>
         <p:nvSpPr>
-          <p:cNvPr id="24" name="Shape 22"/>
+          <p:cNvPr id="30" name="Shape 28"/>
           <p:cNvSpPr/>
           <p:nvPr/>
         </p:nvSpPr>
@@ -20346,14 +21983,14 @@
       </p:sp>
       <p:sp>
         <p:nvSpPr>
-          <p:cNvPr id="25" name="Shape 23"/>
-          <p:cNvSpPr/>
-          <p:nvPr/>
-        </p:nvSpPr>
-        <p:spPr>
-          <a:xfrm>
-            <a:off x="2999232" y="3364992"/>
-            <a:ext cx="1645920" cy="475488"/>
+          <p:cNvPr id="31" name="Shape 29"/>
+          <p:cNvSpPr/>
+          <p:nvPr/>
+        </p:nvSpPr>
+        <p:spPr>
+          <a:xfrm>
+            <a:off x="1978152" y="3364992"/>
+            <a:ext cx="1225296" cy="475488"/>
           </a:xfrm>
           <a:prstGeom prst="rect">
             <a:avLst>
@@ -20373,14 +22010,14 @@
       </p:sp>
       <p:sp>
         <p:nvSpPr>
-          <p:cNvPr id="26" name="Text 24"/>
-          <p:cNvSpPr/>
-          <p:nvPr/>
-        </p:nvSpPr>
-        <p:spPr>
-          <a:xfrm>
-            <a:off x="2999232" y="3364992"/>
-            <a:ext cx="1645920" cy="475488"/>
+          <p:cNvPr id="32" name="Text 30"/>
+          <p:cNvSpPr/>
+          <p:nvPr/>
+        </p:nvSpPr>
+        <p:spPr>
+          <a:xfrm>
+            <a:off x="1978152" y="3364992"/>
+            <a:ext cx="1225296" cy="475488"/>
           </a:xfrm>
           <a:prstGeom prst="rect">
             <a:avLst/>
@@ -20412,14 +22049,14 @@
       </p:sp>
       <p:sp>
         <p:nvSpPr>
-          <p:cNvPr id="27" name="Text 25"/>
-          <p:cNvSpPr/>
-          <p:nvPr/>
-        </p:nvSpPr>
-        <p:spPr>
-          <a:xfrm>
-            <a:off x="4645152" y="3364992"/>
-            <a:ext cx="1097280" cy="475488"/>
+          <p:cNvPr id="33" name="Text 31"/>
+          <p:cNvSpPr/>
+          <p:nvPr/>
+        </p:nvSpPr>
+        <p:spPr>
+          <a:xfrm>
+            <a:off x="3203448" y="3364992"/>
+            <a:ext cx="76200" cy="475488"/>
           </a:xfrm>
           <a:prstGeom prst="rect">
             <a:avLst/>
@@ -20451,14 +22088,14 @@
       </p:sp>
       <p:sp>
         <p:nvSpPr>
-          <p:cNvPr id="28" name="Shape 26"/>
-          <p:cNvSpPr/>
-          <p:nvPr/>
-        </p:nvSpPr>
-        <p:spPr>
-          <a:xfrm>
-            <a:off x="5742432" y="3364992"/>
-            <a:ext cx="1645920" cy="475488"/>
+          <p:cNvPr id="34" name="Shape 32"/>
+          <p:cNvSpPr/>
+          <p:nvPr/>
+        </p:nvSpPr>
+        <p:spPr>
+          <a:xfrm>
+            <a:off x="3279648" y="3364992"/>
+            <a:ext cx="1225296" cy="475488"/>
           </a:xfrm>
           <a:prstGeom prst="rect">
             <a:avLst>
@@ -20478,14 +22115,14 @@
       </p:sp>
       <p:sp>
         <p:nvSpPr>
-          <p:cNvPr id="29" name="Text 27"/>
-          <p:cNvSpPr/>
-          <p:nvPr/>
-        </p:nvSpPr>
-        <p:spPr>
-          <a:xfrm>
-            <a:off x="5742432" y="3364992"/>
-            <a:ext cx="1645920" cy="475488"/>
+          <p:cNvPr id="35" name="Text 33"/>
+          <p:cNvSpPr/>
+          <p:nvPr/>
+        </p:nvSpPr>
+        <p:spPr>
+          <a:xfrm>
+            <a:off x="3279648" y="3364992"/>
+            <a:ext cx="1225296" cy="475488"/>
           </a:xfrm>
           <a:prstGeom prst="rect">
             <a:avLst/>
@@ -20509,7 +22146,7 @@
                 <a:ea typeface="Trebuchet MS" pitchFamily="34" charset="-122"/>
                 <a:cs typeface="Trebuchet MS" pitchFamily="34" charset="-120"/>
               </a:rPr>
-              <a:t>frost</a:t>
+              <a:t>for</a:t>
             </a:r>
             <a:endParaRPr lang="en-US" sz="1400" dirty="0"/>
           </a:p>
@@ -20517,7 +22154,322 @@
       </p:sp>
       <p:sp>
         <p:nvSpPr>
-          <p:cNvPr id="30" name="Shape 28"/>
+          <p:cNvPr id="36" name="Text 34"/>
+          <p:cNvSpPr/>
+          <p:nvPr/>
+        </p:nvSpPr>
+        <p:spPr>
+          <a:xfrm>
+            <a:off x="4504944" y="3364992"/>
+            <a:ext cx="76200" cy="475488"/>
+          </a:xfrm>
+          <a:prstGeom prst="rect">
+            <a:avLst/>
+          </a:prstGeom>
+          <a:noFill/>
+          <a:ln/>
+        </p:spPr>
+        <p:txBody>
+          <a:bodyPr wrap="square" lIns="0" tIns="0" rIns="0" bIns="0" rtlCol="0" anchor="ctr"/>
+          <a:lstStyle/>
+          <a:p>
+            <a:pPr algn="ctr" indent="0" marL="0">
+              <a:buNone/>
+            </a:pPr>
+            <a:r>
+              <a:rPr lang="en-US" sz="1600" b="1" dirty="0">
+                <a:solidFill>
+                  <a:srgbClr val="0D9488"/>
+                </a:solidFill>
+                <a:latin typeface="Trebuchet MS" pitchFamily="34" charset="0"/>
+                <a:ea typeface="Trebuchet MS" pitchFamily="34" charset="-122"/>
+                <a:cs typeface="Trebuchet MS" pitchFamily="34" charset="-120"/>
+              </a:rPr>
+              <a:t>·</a:t>
+            </a:r>
+            <a:endParaRPr lang="en-US" sz="1600" dirty="0"/>
+          </a:p>
+        </p:txBody>
+      </p:sp>
+      <p:sp>
+        <p:nvSpPr>
+          <p:cNvPr id="37" name="Shape 35"/>
+          <p:cNvSpPr/>
+          <p:nvPr/>
+        </p:nvSpPr>
+        <p:spPr>
+          <a:xfrm>
+            <a:off x="4581144" y="3364992"/>
+            <a:ext cx="1225296" cy="475488"/>
+          </a:xfrm>
+          <a:prstGeom prst="rect">
+            <a:avLst>
+              <a:gd name="adj" fmla="val 9615"/>
+            </a:avLst>
+          </a:prstGeom>
+          <a:solidFill>
+            <a:srgbClr val="FFFFFF"/>
+          </a:solidFill>
+          <a:ln w="12700">
+            <a:solidFill>
+              <a:srgbClr val="0D9488"/>
+            </a:solidFill>
+            <a:prstDash val="solid"/>
+          </a:ln>
+        </p:spPr>
+      </p:sp>
+      <p:sp>
+        <p:nvSpPr>
+          <p:cNvPr id="38" name="Text 36"/>
+          <p:cNvSpPr/>
+          <p:nvPr/>
+        </p:nvSpPr>
+        <p:spPr>
+          <a:xfrm>
+            <a:off x="4581144" y="3364992"/>
+            <a:ext cx="1225296" cy="475488"/>
+          </a:xfrm>
+          <a:prstGeom prst="rect">
+            <a:avLst/>
+          </a:prstGeom>
+          <a:noFill/>
+          <a:ln/>
+        </p:spPr>
+        <p:txBody>
+          <a:bodyPr wrap="square" lIns="0" tIns="0" rIns="0" bIns="0" rtlCol="0" anchor="ctr"/>
+          <a:lstStyle/>
+          <a:p>
+            <a:pPr algn="ctr" indent="0" marL="0">
+              <a:buNone/>
+            </a:pPr>
+            <a:r>
+              <a:rPr lang="en-US" sz="1400" b="1" dirty="0">
+                <a:solidFill>
+                  <a:srgbClr val="0D9488"/>
+                </a:solidFill>
+                <a:latin typeface="Trebuchet MS" pitchFamily="34" charset="0"/>
+                <a:ea typeface="Trebuchet MS" pitchFamily="34" charset="-122"/>
+                <a:cs typeface="Trebuchet MS" pitchFamily="34" charset="-120"/>
+              </a:rPr>
+              <a:t>est</a:t>
+            </a:r>
+            <a:endParaRPr lang="en-US" sz="1400" dirty="0"/>
+          </a:p>
+        </p:txBody>
+      </p:sp>
+      <p:sp>
+        <p:nvSpPr>
+          <p:cNvPr id="39" name="Text 37"/>
+          <p:cNvSpPr/>
+          <p:nvPr/>
+        </p:nvSpPr>
+        <p:spPr>
+          <a:xfrm>
+            <a:off x="5806440" y="3364992"/>
+            <a:ext cx="76200" cy="475488"/>
+          </a:xfrm>
+          <a:prstGeom prst="rect">
+            <a:avLst/>
+          </a:prstGeom>
+          <a:noFill/>
+          <a:ln/>
+        </p:spPr>
+        <p:txBody>
+          <a:bodyPr wrap="square" lIns="0" tIns="0" rIns="0" bIns="0" rtlCol="0" anchor="ctr"/>
+          <a:lstStyle/>
+          <a:p>
+            <a:pPr algn="ctr" indent="0" marL="0">
+              <a:buNone/>
+            </a:pPr>
+            <a:r>
+              <a:rPr lang="en-US" sz="1600" b="1" dirty="0">
+                <a:solidFill>
+                  <a:srgbClr val="0D9488"/>
+                </a:solidFill>
+                <a:latin typeface="Trebuchet MS" pitchFamily="34" charset="0"/>
+                <a:ea typeface="Trebuchet MS" pitchFamily="34" charset="-122"/>
+                <a:cs typeface="Trebuchet MS" pitchFamily="34" charset="-120"/>
+              </a:rPr>
+              <a:t>·</a:t>
+            </a:r>
+            <a:endParaRPr lang="en-US" sz="1600" dirty="0"/>
+          </a:p>
+        </p:txBody>
+      </p:sp>
+      <p:sp>
+        <p:nvSpPr>
+          <p:cNvPr id="40" name="Shape 38"/>
+          <p:cNvSpPr/>
+          <p:nvPr/>
+        </p:nvSpPr>
+        <p:spPr>
+          <a:xfrm>
+            <a:off x="5882640" y="3364992"/>
+            <a:ext cx="1225296" cy="475488"/>
+          </a:xfrm>
+          <a:prstGeom prst="rect">
+            <a:avLst>
+              <a:gd name="adj" fmla="val 9615"/>
+            </a:avLst>
+          </a:prstGeom>
+          <a:solidFill>
+            <a:srgbClr val="FFFFFF"/>
+          </a:solidFill>
+          <a:ln w="12700">
+            <a:solidFill>
+              <a:srgbClr val="0D9488"/>
+            </a:solidFill>
+            <a:prstDash val="solid"/>
+          </a:ln>
+        </p:spPr>
+      </p:sp>
+      <p:sp>
+        <p:nvSpPr>
+          <p:cNvPr id="41" name="Text 39"/>
+          <p:cNvSpPr/>
+          <p:nvPr/>
+        </p:nvSpPr>
+        <p:spPr>
+          <a:xfrm>
+            <a:off x="5882640" y="3364992"/>
+            <a:ext cx="1225296" cy="475488"/>
+          </a:xfrm>
+          <a:prstGeom prst="rect">
+            <a:avLst/>
+          </a:prstGeom>
+          <a:noFill/>
+          <a:ln/>
+        </p:spPr>
+        <p:txBody>
+          <a:bodyPr wrap="square" lIns="0" tIns="0" rIns="0" bIns="0" rtlCol="0" anchor="ctr"/>
+          <a:lstStyle/>
+          <a:p>
+            <a:pPr algn="ctr" indent="0" marL="0">
+              <a:buNone/>
+            </a:pPr>
+            <a:r>
+              <a:rPr lang="en-US" sz="1400" b="1" dirty="0">
+                <a:solidFill>
+                  <a:srgbClr val="0D9488"/>
+                </a:solidFill>
+                <a:latin typeface="Trebuchet MS" pitchFamily="34" charset="0"/>
+                <a:ea typeface="Trebuchet MS" pitchFamily="34" charset="-122"/>
+                <a:cs typeface="Trebuchet MS" pitchFamily="34" charset="-120"/>
+              </a:rPr>
+              <a:t>a</a:t>
+            </a:r>
+            <a:endParaRPr lang="en-US" sz="1400" dirty="0"/>
+          </a:p>
+        </p:txBody>
+      </p:sp>
+      <p:sp>
+        <p:nvSpPr>
+          <p:cNvPr id="42" name="Text 40"/>
+          <p:cNvSpPr/>
+          <p:nvPr/>
+        </p:nvSpPr>
+        <p:spPr>
+          <a:xfrm>
+            <a:off x="7107936" y="3364992"/>
+            <a:ext cx="76200" cy="475488"/>
+          </a:xfrm>
+          <a:prstGeom prst="rect">
+            <a:avLst/>
+          </a:prstGeom>
+          <a:noFill/>
+          <a:ln/>
+        </p:spPr>
+        <p:txBody>
+          <a:bodyPr wrap="square" lIns="0" tIns="0" rIns="0" bIns="0" rtlCol="0" anchor="ctr"/>
+          <a:lstStyle/>
+          <a:p>
+            <a:pPr algn="ctr" indent="0" marL="0">
+              <a:buNone/>
+            </a:pPr>
+            <a:r>
+              <a:rPr lang="en-US" sz="1600" b="1" dirty="0">
+                <a:solidFill>
+                  <a:srgbClr val="0D9488"/>
+                </a:solidFill>
+                <a:latin typeface="Trebuchet MS" pitchFamily="34" charset="0"/>
+                <a:ea typeface="Trebuchet MS" pitchFamily="34" charset="-122"/>
+                <a:cs typeface="Trebuchet MS" pitchFamily="34" charset="-120"/>
+              </a:rPr>
+              <a:t>·</a:t>
+            </a:r>
+            <a:endParaRPr lang="en-US" sz="1600" dirty="0"/>
+          </a:p>
+        </p:txBody>
+      </p:sp>
+      <p:sp>
+        <p:nvSpPr>
+          <p:cNvPr id="43" name="Shape 41"/>
+          <p:cNvSpPr/>
+          <p:nvPr/>
+        </p:nvSpPr>
+        <p:spPr>
+          <a:xfrm>
+            <a:off x="7184136" y="3364992"/>
+            <a:ext cx="1225296" cy="475488"/>
+          </a:xfrm>
+          <a:prstGeom prst="rect">
+            <a:avLst>
+              <a:gd name="adj" fmla="val 9615"/>
+            </a:avLst>
+          </a:prstGeom>
+          <a:solidFill>
+            <a:srgbClr val="FFFFFF"/>
+          </a:solidFill>
+          <a:ln w="12700">
+            <a:solidFill>
+              <a:srgbClr val="0D9488"/>
+            </a:solidFill>
+            <a:prstDash val="solid"/>
+          </a:ln>
+        </p:spPr>
+      </p:sp>
+      <p:sp>
+        <p:nvSpPr>
+          <p:cNvPr id="44" name="Text 42"/>
+          <p:cNvSpPr/>
+          <p:nvPr/>
+        </p:nvSpPr>
+        <p:spPr>
+          <a:xfrm>
+            <a:off x="7184136" y="3364992"/>
+            <a:ext cx="1225296" cy="475488"/>
+          </a:xfrm>
+          <a:prstGeom prst="rect">
+            <a:avLst/>
+          </a:prstGeom>
+          <a:noFill/>
+          <a:ln/>
+        </p:spPr>
+        <p:txBody>
+          <a:bodyPr wrap="square" lIns="0" tIns="0" rIns="0" bIns="0" rtlCol="0" anchor="ctr"/>
+          <a:lstStyle/>
+          <a:p>
+            <a:pPr algn="ctr" indent="0" marL="0">
+              <a:buNone/>
+            </a:pPr>
+            <a:r>
+              <a:rPr lang="en-US" sz="1400" b="1" dirty="0">
+                <a:solidFill>
+                  <a:srgbClr val="0D9488"/>
+                </a:solidFill>
+                <a:latin typeface="Trebuchet MS" pitchFamily="34" charset="0"/>
+                <a:ea typeface="Trebuchet MS" pitchFamily="34" charset="-122"/>
+                <a:cs typeface="Trebuchet MS" pitchFamily="34" charset="-120"/>
+              </a:rPr>
+              <a:t>tion</a:t>
+            </a:r>
+            <a:endParaRPr lang="en-US" sz="1400" dirty="0"/>
+          </a:p>
+        </p:txBody>
+      </p:sp>
+      <p:sp>
+        <p:nvSpPr>
+          <p:cNvPr id="45" name="Shape 43"/>
           <p:cNvSpPr/>
           <p:nvPr/>
         </p:nvSpPr>
@@ -20544,7 +22496,7 @@
       </p:sp>
       <p:sp>
         <p:nvSpPr>
-          <p:cNvPr id="31" name="Text 29"/>
+          <p:cNvPr id="46" name="Text 44"/>
           <p:cNvSpPr/>
           <p:nvPr/>
         </p:nvSpPr>
@@ -20583,7 +22535,7 @@
       </p:sp>
       <p:sp>
         <p:nvSpPr>
-          <p:cNvPr id="32" name="Shape 30"/>
+          <p:cNvPr id="47" name="Shape 45"/>
           <p:cNvSpPr/>
           <p:nvPr/>
         </p:nvSpPr>
@@ -20610,7 +22562,7 @@
       </p:sp>
       <p:sp>
         <p:nvSpPr>
-          <p:cNvPr id="33" name="Text 31"/>
+          <p:cNvPr id="48" name="Text 46"/>
           <p:cNvSpPr/>
           <p:nvPr/>
         </p:nvSpPr>
@@ -20933,7 +22885,7 @@
                 <a:ea typeface="Calibri" pitchFamily="34" charset="-122"/>
                 <a:cs typeface="Calibri" pitchFamily="34" charset="-120"/>
               </a:rPr>
-              <a:t>Word Labs  •  wordlabs.app  •  Prefix: 'de-' = down, away, undo, remove</a:t>
+              <a:t>Word Labs  •  wordlabs.app  •  Prefix: 'de-' = down, away, remove, reverse</a:t>
             </a:r>
             <a:endParaRPr lang="en-US" sz="800" dirty="0"/>
           </a:p>
@@ -21072,7 +23024,7 @@
                 <a:ea typeface="Trebuchet MS" pitchFamily="34" charset="-122"/>
                 <a:cs typeface="Trebuchet MS" pitchFamily="34" charset="-120"/>
               </a:rPr>
-              <a:t>defrost</a:t>
+              <a:t>deforestation</a:t>
             </a:r>
             <a:endParaRPr lang="en-US" sz="2800" dirty="0"/>
           </a:p>
@@ -21152,8 +23104,8 @@
         </p:nvSpPr>
         <p:spPr>
           <a:xfrm>
-            <a:off x="2938272" y="2258568"/>
-            <a:ext cx="1828800" cy="292608"/>
+            <a:off x="1989734" y="2258568"/>
+            <a:ext cx="1581912" cy="292608"/>
           </a:xfrm>
           <a:prstGeom prst="rect">
             <a:avLst>
@@ -21186,8 +23138,8 @@
         </p:nvSpPr>
         <p:spPr>
           <a:xfrm>
-            <a:off x="2938272" y="2258568"/>
-            <a:ext cx="1828800" cy="292608"/>
+            <a:off x="1989734" y="2258568"/>
+            <a:ext cx="1581912" cy="292608"/>
           </a:xfrm>
           <a:prstGeom prst="rect">
             <a:avLst/>
@@ -21225,8 +23177,8 @@
         </p:nvSpPr>
         <p:spPr>
           <a:xfrm>
-            <a:off x="2938272" y="2569464"/>
-            <a:ext cx="1828800" cy="201168"/>
+            <a:off x="1989734" y="2569464"/>
+            <a:ext cx="1581912" cy="201168"/>
           </a:xfrm>
           <a:prstGeom prst="rect">
             <a:avLst/>
@@ -21250,7 +23202,7 @@
                 <a:ea typeface="Calibri" pitchFamily="34" charset="-122"/>
                 <a:cs typeface="Calibri" pitchFamily="34" charset="-120"/>
               </a:rPr>
-              <a:t>remove, undo</a:t>
+              <a:t>remove, away</a:t>
             </a:r>
             <a:endParaRPr lang="en-US" sz="850" dirty="0"/>
           </a:p>
@@ -21264,8 +23216,8 @@
         </p:nvSpPr>
         <p:spPr>
           <a:xfrm>
-            <a:off x="5803392" y="2258568"/>
-            <a:ext cx="1828800" cy="292608"/>
+            <a:off x="3659429" y="2258568"/>
+            <a:ext cx="1581912" cy="292608"/>
           </a:xfrm>
           <a:prstGeom prst="rect">
             <a:avLst>
@@ -21298,8 +23250,8 @@
         </p:nvSpPr>
         <p:spPr>
           <a:xfrm>
-            <a:off x="5803392" y="2258568"/>
-            <a:ext cx="1828800" cy="292608"/>
+            <a:off x="3659429" y="2258568"/>
+            <a:ext cx="1581912" cy="292608"/>
           </a:xfrm>
           <a:prstGeom prst="rect">
             <a:avLst/>
@@ -21323,7 +23275,7 @@
                 <a:ea typeface="Trebuchet MS" pitchFamily="34" charset="-122"/>
                 <a:cs typeface="Trebuchet MS" pitchFamily="34" charset="-120"/>
               </a:rPr>
-              <a:t>frost</a:t>
+              <a:t>forest</a:t>
             </a:r>
             <a:endParaRPr lang="en-US" sz="1300" dirty="0"/>
           </a:p>
@@ -21337,8 +23289,8 @@
         </p:nvSpPr>
         <p:spPr>
           <a:xfrm>
-            <a:off x="5803392" y="2569464"/>
-            <a:ext cx="1828800" cy="201168"/>
+            <a:off x="3659429" y="2569464"/>
+            <a:ext cx="1581912" cy="201168"/>
           </a:xfrm>
           <a:prstGeom prst="rect">
             <a:avLst/>
@@ -21362,7 +23314,7 @@
                 <a:ea typeface="Calibri" pitchFamily="34" charset="-122"/>
                 <a:cs typeface="Calibri" pitchFamily="34" charset="-120"/>
               </a:rPr>
-              <a:t>ice or frozen layer</a:t>
+              <a:t>large area of trees</a:t>
             </a:r>
             <a:endParaRPr lang="en-US" sz="850" dirty="0"/>
           </a:p>
@@ -21371,6 +23323,230 @@
       <p:sp>
         <p:nvSpPr>
           <p:cNvPr id="22" name="Shape 20"/>
+          <p:cNvSpPr/>
+          <p:nvPr/>
+        </p:nvSpPr>
+        <p:spPr>
+          <a:xfrm>
+            <a:off x="5329123" y="2258568"/>
+            <a:ext cx="1581912" cy="292608"/>
+          </a:xfrm>
+          <a:prstGeom prst="rect">
+            <a:avLst>
+              <a:gd name="adj" fmla="val 25000"/>
+            </a:avLst>
+          </a:prstGeom>
+          <a:solidFill>
+            <a:srgbClr val="FCE7F3"/>
+          </a:solidFill>
+          <a:ln w="19050">
+            <a:solidFill>
+              <a:srgbClr val="DB2777"/>
+            </a:solidFill>
+            <a:prstDash val="solid"/>
+          </a:ln>
+          <a:effectLst>
+            <a:outerShdw sx="100000" sy="100000" kx="0" ky="0" algn="bl" rotWithShape="0" blurRad="101600" dist="38100" dir="8100000">
+              <a:srgbClr val="000000">
+                <a:alpha val="12000"/>
+              </a:srgbClr>
+            </a:outerShdw>
+          </a:effectLst>
+        </p:spPr>
+      </p:sp>
+      <p:sp>
+        <p:nvSpPr>
+          <p:cNvPr id="23" name="Text 21"/>
+          <p:cNvSpPr/>
+          <p:nvPr/>
+        </p:nvSpPr>
+        <p:spPr>
+          <a:xfrm>
+            <a:off x="5329123" y="2258568"/>
+            <a:ext cx="1581912" cy="292608"/>
+          </a:xfrm>
+          <a:prstGeom prst="rect">
+            <a:avLst/>
+          </a:prstGeom>
+          <a:noFill/>
+          <a:ln/>
+        </p:spPr>
+        <p:txBody>
+          <a:bodyPr wrap="square" lIns="0" tIns="0" rIns="0" bIns="0" rtlCol="0" anchor="ctr"/>
+          <a:lstStyle/>
+          <a:p>
+            <a:pPr algn="ctr" indent="0" marL="0">
+              <a:buNone/>
+            </a:pPr>
+            <a:r>
+              <a:rPr lang="en-US" sz="1300" b="1" dirty="0">
+                <a:solidFill>
+                  <a:srgbClr val="9D174D"/>
+                </a:solidFill>
+                <a:latin typeface="Trebuchet MS" pitchFamily="34" charset="0"/>
+                <a:ea typeface="Trebuchet MS" pitchFamily="34" charset="-122"/>
+                <a:cs typeface="Trebuchet MS" pitchFamily="34" charset="-120"/>
+              </a:rPr>
+              <a:t>at</a:t>
+            </a:r>
+            <a:endParaRPr lang="en-US" sz="1300" dirty="0"/>
+          </a:p>
+        </p:txBody>
+      </p:sp>
+      <p:sp>
+        <p:nvSpPr>
+          <p:cNvPr id="24" name="Text 22"/>
+          <p:cNvSpPr/>
+          <p:nvPr/>
+        </p:nvSpPr>
+        <p:spPr>
+          <a:xfrm>
+            <a:off x="5329123" y="2569464"/>
+            <a:ext cx="1581912" cy="201168"/>
+          </a:xfrm>
+          <a:prstGeom prst="rect">
+            <a:avLst/>
+          </a:prstGeom>
+          <a:noFill/>
+          <a:ln/>
+        </p:spPr>
+        <p:txBody>
+          <a:bodyPr wrap="square" lIns="0" tIns="0" rIns="0" bIns="0" rtlCol="0" anchor="t"/>
+          <a:lstStyle/>
+          <a:p>
+            <a:pPr algn="ctr" indent="0" marL="0">
+              <a:buNone/>
+            </a:pPr>
+            <a:r>
+              <a:rPr lang="en-US" sz="850" dirty="0">
+                <a:solidFill>
+                  <a:srgbClr val="475569"/>
+                </a:solidFill>
+                <a:latin typeface="Calibri" pitchFamily="34" charset="0"/>
+                <a:ea typeface="Calibri" pitchFamily="34" charset="-122"/>
+                <a:cs typeface="Calibri" pitchFamily="34" charset="-120"/>
+              </a:rPr>
+              <a:t>action</a:t>
+            </a:r>
+            <a:endParaRPr lang="en-US" sz="850" dirty="0"/>
+          </a:p>
+        </p:txBody>
+      </p:sp>
+      <p:sp>
+        <p:nvSpPr>
+          <p:cNvPr id="25" name="Shape 23"/>
+          <p:cNvSpPr/>
+          <p:nvPr/>
+        </p:nvSpPr>
+        <p:spPr>
+          <a:xfrm>
+            <a:off x="6998818" y="2258568"/>
+            <a:ext cx="1581912" cy="292608"/>
+          </a:xfrm>
+          <a:prstGeom prst="rect">
+            <a:avLst>
+              <a:gd name="adj" fmla="val 25000"/>
+            </a:avLst>
+          </a:prstGeom>
+          <a:solidFill>
+            <a:srgbClr val="FCE7F3"/>
+          </a:solidFill>
+          <a:ln w="19050">
+            <a:solidFill>
+              <a:srgbClr val="DB2777"/>
+            </a:solidFill>
+            <a:prstDash val="solid"/>
+          </a:ln>
+          <a:effectLst>
+            <a:outerShdw sx="100000" sy="100000" kx="0" ky="0" algn="bl" rotWithShape="0" blurRad="101600" dist="38100" dir="8100000">
+              <a:srgbClr val="000000">
+                <a:alpha val="12000"/>
+              </a:srgbClr>
+            </a:outerShdw>
+          </a:effectLst>
+        </p:spPr>
+      </p:sp>
+      <p:sp>
+        <p:nvSpPr>
+          <p:cNvPr id="26" name="Text 24"/>
+          <p:cNvSpPr/>
+          <p:nvPr/>
+        </p:nvSpPr>
+        <p:spPr>
+          <a:xfrm>
+            <a:off x="6998818" y="2258568"/>
+            <a:ext cx="1581912" cy="292608"/>
+          </a:xfrm>
+          <a:prstGeom prst="rect">
+            <a:avLst/>
+          </a:prstGeom>
+          <a:noFill/>
+          <a:ln/>
+        </p:spPr>
+        <p:txBody>
+          <a:bodyPr wrap="square" lIns="0" tIns="0" rIns="0" bIns="0" rtlCol="0" anchor="ctr"/>
+          <a:lstStyle/>
+          <a:p>
+            <a:pPr algn="ctr" indent="0" marL="0">
+              <a:buNone/>
+            </a:pPr>
+            <a:r>
+              <a:rPr lang="en-US" sz="1300" b="1" dirty="0">
+                <a:solidFill>
+                  <a:srgbClr val="9D174D"/>
+                </a:solidFill>
+                <a:latin typeface="Trebuchet MS" pitchFamily="34" charset="0"/>
+                <a:ea typeface="Trebuchet MS" pitchFamily="34" charset="-122"/>
+                <a:cs typeface="Trebuchet MS" pitchFamily="34" charset="-120"/>
+              </a:rPr>
+              <a:t>ion</a:t>
+            </a:r>
+            <a:endParaRPr lang="en-US" sz="1300" dirty="0"/>
+          </a:p>
+        </p:txBody>
+      </p:sp>
+      <p:sp>
+        <p:nvSpPr>
+          <p:cNvPr id="27" name="Text 25"/>
+          <p:cNvSpPr/>
+          <p:nvPr/>
+        </p:nvSpPr>
+        <p:spPr>
+          <a:xfrm>
+            <a:off x="6998818" y="2569464"/>
+            <a:ext cx="1581912" cy="201168"/>
+          </a:xfrm>
+          <a:prstGeom prst="rect">
+            <a:avLst/>
+          </a:prstGeom>
+          <a:noFill/>
+          <a:ln/>
+        </p:spPr>
+        <p:txBody>
+          <a:bodyPr wrap="square" lIns="0" tIns="0" rIns="0" bIns="0" rtlCol="0" anchor="t"/>
+          <a:lstStyle/>
+          <a:p>
+            <a:pPr algn="ctr" indent="0" marL="0">
+              <a:buNone/>
+            </a:pPr>
+            <a:r>
+              <a:rPr lang="en-US" sz="850" dirty="0">
+                <a:solidFill>
+                  <a:srgbClr val="475569"/>
+                </a:solidFill>
+                <a:latin typeface="Calibri" pitchFamily="34" charset="0"/>
+                <a:ea typeface="Calibri" pitchFamily="34" charset="-122"/>
+                <a:cs typeface="Calibri" pitchFamily="34" charset="-120"/>
+              </a:rPr>
+              <a:t>state or process</a:t>
+            </a:r>
+            <a:endParaRPr lang="en-US" sz="850" dirty="0"/>
+          </a:p>
+        </p:txBody>
+      </p:sp>
+      <p:sp>
+        <p:nvSpPr>
+          <p:cNvPr id="28" name="Shape 26"/>
           <p:cNvSpPr/>
           <p:nvPr/>
         </p:nvSpPr>
@@ -21397,7 +23573,7 @@
       </p:sp>
       <p:sp>
         <p:nvSpPr>
-          <p:cNvPr id="23" name="Text 21"/>
+          <p:cNvPr id="29" name="Text 27"/>
           <p:cNvSpPr/>
           <p:nvPr/>
         </p:nvSpPr>
@@ -21436,7 +23612,7 @@
       </p:sp>
       <p:sp>
         <p:nvSpPr>
-          <p:cNvPr id="24" name="Shape 22"/>
+          <p:cNvPr id="30" name="Shape 28"/>
           <p:cNvSpPr/>
           <p:nvPr/>
         </p:nvSpPr>
@@ -21463,14 +23639,14 @@
       </p:sp>
       <p:sp>
         <p:nvSpPr>
-          <p:cNvPr id="25" name="Shape 23"/>
-          <p:cNvSpPr/>
-          <p:nvPr/>
-        </p:nvSpPr>
-        <p:spPr>
-          <a:xfrm>
-            <a:off x="2999232" y="3364992"/>
-            <a:ext cx="1645920" cy="475488"/>
+          <p:cNvPr id="31" name="Shape 29"/>
+          <p:cNvSpPr/>
+          <p:nvPr/>
+        </p:nvSpPr>
+        <p:spPr>
+          <a:xfrm>
+            <a:off x="1978152" y="3364992"/>
+            <a:ext cx="1225296" cy="475488"/>
           </a:xfrm>
           <a:prstGeom prst="rect">
             <a:avLst>
@@ -21490,14 +23666,14 @@
       </p:sp>
       <p:sp>
         <p:nvSpPr>
-          <p:cNvPr id="26" name="Text 24"/>
-          <p:cNvSpPr/>
-          <p:nvPr/>
-        </p:nvSpPr>
-        <p:spPr>
-          <a:xfrm>
-            <a:off x="2999232" y="3364992"/>
-            <a:ext cx="1645920" cy="475488"/>
+          <p:cNvPr id="32" name="Text 30"/>
+          <p:cNvSpPr/>
+          <p:nvPr/>
+        </p:nvSpPr>
+        <p:spPr>
+          <a:xfrm>
+            <a:off x="1978152" y="3364992"/>
+            <a:ext cx="1225296" cy="475488"/>
           </a:xfrm>
           <a:prstGeom prst="rect">
             <a:avLst/>
@@ -21529,14 +23705,14 @@
       </p:sp>
       <p:sp>
         <p:nvSpPr>
-          <p:cNvPr id="27" name="Text 25"/>
-          <p:cNvSpPr/>
-          <p:nvPr/>
-        </p:nvSpPr>
-        <p:spPr>
-          <a:xfrm>
-            <a:off x="4645152" y="3364992"/>
-            <a:ext cx="1097280" cy="475488"/>
+          <p:cNvPr id="33" name="Text 31"/>
+          <p:cNvSpPr/>
+          <p:nvPr/>
+        </p:nvSpPr>
+        <p:spPr>
+          <a:xfrm>
+            <a:off x="3203448" y="3364992"/>
+            <a:ext cx="76200" cy="475488"/>
           </a:xfrm>
           <a:prstGeom prst="rect">
             <a:avLst/>
@@ -21568,14 +23744,14 @@
       </p:sp>
       <p:sp>
         <p:nvSpPr>
-          <p:cNvPr id="28" name="Shape 26"/>
-          <p:cNvSpPr/>
-          <p:nvPr/>
-        </p:nvSpPr>
-        <p:spPr>
-          <a:xfrm>
-            <a:off x="5742432" y="3364992"/>
-            <a:ext cx="1645920" cy="475488"/>
+          <p:cNvPr id="34" name="Shape 32"/>
+          <p:cNvSpPr/>
+          <p:nvPr/>
+        </p:nvSpPr>
+        <p:spPr>
+          <a:xfrm>
+            <a:off x="3279648" y="3364992"/>
+            <a:ext cx="1225296" cy="475488"/>
           </a:xfrm>
           <a:prstGeom prst="rect">
             <a:avLst>
@@ -21595,14 +23771,14 @@
       </p:sp>
       <p:sp>
         <p:nvSpPr>
-          <p:cNvPr id="29" name="Text 27"/>
-          <p:cNvSpPr/>
-          <p:nvPr/>
-        </p:nvSpPr>
-        <p:spPr>
-          <a:xfrm>
-            <a:off x="5742432" y="3364992"/>
-            <a:ext cx="1645920" cy="475488"/>
+          <p:cNvPr id="35" name="Text 33"/>
+          <p:cNvSpPr/>
+          <p:nvPr/>
+        </p:nvSpPr>
+        <p:spPr>
+          <a:xfrm>
+            <a:off x="3279648" y="3364992"/>
+            <a:ext cx="1225296" cy="475488"/>
           </a:xfrm>
           <a:prstGeom prst="rect">
             <a:avLst/>
@@ -21626,7 +23802,7 @@
                 <a:ea typeface="Trebuchet MS" pitchFamily="34" charset="-122"/>
                 <a:cs typeface="Trebuchet MS" pitchFamily="34" charset="-120"/>
               </a:rPr>
-              <a:t>frost</a:t>
+              <a:t>for</a:t>
             </a:r>
             <a:endParaRPr lang="en-US" sz="1400" dirty="0"/>
           </a:p>
@@ -21634,7 +23810,322 @@
       </p:sp>
       <p:sp>
         <p:nvSpPr>
-          <p:cNvPr id="30" name="Shape 28"/>
+          <p:cNvPr id="36" name="Text 34"/>
+          <p:cNvSpPr/>
+          <p:nvPr/>
+        </p:nvSpPr>
+        <p:spPr>
+          <a:xfrm>
+            <a:off x="4504944" y="3364992"/>
+            <a:ext cx="76200" cy="475488"/>
+          </a:xfrm>
+          <a:prstGeom prst="rect">
+            <a:avLst/>
+          </a:prstGeom>
+          <a:noFill/>
+          <a:ln/>
+        </p:spPr>
+        <p:txBody>
+          <a:bodyPr wrap="square" lIns="0" tIns="0" rIns="0" bIns="0" rtlCol="0" anchor="ctr"/>
+          <a:lstStyle/>
+          <a:p>
+            <a:pPr algn="ctr" indent="0" marL="0">
+              <a:buNone/>
+            </a:pPr>
+            <a:r>
+              <a:rPr lang="en-US" sz="1600" b="1" dirty="0">
+                <a:solidFill>
+                  <a:srgbClr val="0D9488"/>
+                </a:solidFill>
+                <a:latin typeface="Trebuchet MS" pitchFamily="34" charset="0"/>
+                <a:ea typeface="Trebuchet MS" pitchFamily="34" charset="-122"/>
+                <a:cs typeface="Trebuchet MS" pitchFamily="34" charset="-120"/>
+              </a:rPr>
+              <a:t>·</a:t>
+            </a:r>
+            <a:endParaRPr lang="en-US" sz="1600" dirty="0"/>
+          </a:p>
+        </p:txBody>
+      </p:sp>
+      <p:sp>
+        <p:nvSpPr>
+          <p:cNvPr id="37" name="Shape 35"/>
+          <p:cNvSpPr/>
+          <p:nvPr/>
+        </p:nvSpPr>
+        <p:spPr>
+          <a:xfrm>
+            <a:off x="4581144" y="3364992"/>
+            <a:ext cx="1225296" cy="475488"/>
+          </a:xfrm>
+          <a:prstGeom prst="rect">
+            <a:avLst>
+              <a:gd name="adj" fmla="val 9615"/>
+            </a:avLst>
+          </a:prstGeom>
+          <a:solidFill>
+            <a:srgbClr val="FFFFFF"/>
+          </a:solidFill>
+          <a:ln w="12700">
+            <a:solidFill>
+              <a:srgbClr val="0D9488"/>
+            </a:solidFill>
+            <a:prstDash val="solid"/>
+          </a:ln>
+        </p:spPr>
+      </p:sp>
+      <p:sp>
+        <p:nvSpPr>
+          <p:cNvPr id="38" name="Text 36"/>
+          <p:cNvSpPr/>
+          <p:nvPr/>
+        </p:nvSpPr>
+        <p:spPr>
+          <a:xfrm>
+            <a:off x="4581144" y="3364992"/>
+            <a:ext cx="1225296" cy="475488"/>
+          </a:xfrm>
+          <a:prstGeom prst="rect">
+            <a:avLst/>
+          </a:prstGeom>
+          <a:noFill/>
+          <a:ln/>
+        </p:spPr>
+        <p:txBody>
+          <a:bodyPr wrap="square" lIns="0" tIns="0" rIns="0" bIns="0" rtlCol="0" anchor="ctr"/>
+          <a:lstStyle/>
+          <a:p>
+            <a:pPr algn="ctr" indent="0" marL="0">
+              <a:buNone/>
+            </a:pPr>
+            <a:r>
+              <a:rPr lang="en-US" sz="1400" b="1" dirty="0">
+                <a:solidFill>
+                  <a:srgbClr val="0D9488"/>
+                </a:solidFill>
+                <a:latin typeface="Trebuchet MS" pitchFamily="34" charset="0"/>
+                <a:ea typeface="Trebuchet MS" pitchFamily="34" charset="-122"/>
+                <a:cs typeface="Trebuchet MS" pitchFamily="34" charset="-120"/>
+              </a:rPr>
+              <a:t>est</a:t>
+            </a:r>
+            <a:endParaRPr lang="en-US" sz="1400" dirty="0"/>
+          </a:p>
+        </p:txBody>
+      </p:sp>
+      <p:sp>
+        <p:nvSpPr>
+          <p:cNvPr id="39" name="Text 37"/>
+          <p:cNvSpPr/>
+          <p:nvPr/>
+        </p:nvSpPr>
+        <p:spPr>
+          <a:xfrm>
+            <a:off x="5806440" y="3364992"/>
+            <a:ext cx="76200" cy="475488"/>
+          </a:xfrm>
+          <a:prstGeom prst="rect">
+            <a:avLst/>
+          </a:prstGeom>
+          <a:noFill/>
+          <a:ln/>
+        </p:spPr>
+        <p:txBody>
+          <a:bodyPr wrap="square" lIns="0" tIns="0" rIns="0" bIns="0" rtlCol="0" anchor="ctr"/>
+          <a:lstStyle/>
+          <a:p>
+            <a:pPr algn="ctr" indent="0" marL="0">
+              <a:buNone/>
+            </a:pPr>
+            <a:r>
+              <a:rPr lang="en-US" sz="1600" b="1" dirty="0">
+                <a:solidFill>
+                  <a:srgbClr val="0D9488"/>
+                </a:solidFill>
+                <a:latin typeface="Trebuchet MS" pitchFamily="34" charset="0"/>
+                <a:ea typeface="Trebuchet MS" pitchFamily="34" charset="-122"/>
+                <a:cs typeface="Trebuchet MS" pitchFamily="34" charset="-120"/>
+              </a:rPr>
+              <a:t>·</a:t>
+            </a:r>
+            <a:endParaRPr lang="en-US" sz="1600" dirty="0"/>
+          </a:p>
+        </p:txBody>
+      </p:sp>
+      <p:sp>
+        <p:nvSpPr>
+          <p:cNvPr id="40" name="Shape 38"/>
+          <p:cNvSpPr/>
+          <p:nvPr/>
+        </p:nvSpPr>
+        <p:spPr>
+          <a:xfrm>
+            <a:off x="5882640" y="3364992"/>
+            <a:ext cx="1225296" cy="475488"/>
+          </a:xfrm>
+          <a:prstGeom prst="rect">
+            <a:avLst>
+              <a:gd name="adj" fmla="val 9615"/>
+            </a:avLst>
+          </a:prstGeom>
+          <a:solidFill>
+            <a:srgbClr val="FFFFFF"/>
+          </a:solidFill>
+          <a:ln w="12700">
+            <a:solidFill>
+              <a:srgbClr val="0D9488"/>
+            </a:solidFill>
+            <a:prstDash val="solid"/>
+          </a:ln>
+        </p:spPr>
+      </p:sp>
+      <p:sp>
+        <p:nvSpPr>
+          <p:cNvPr id="41" name="Text 39"/>
+          <p:cNvSpPr/>
+          <p:nvPr/>
+        </p:nvSpPr>
+        <p:spPr>
+          <a:xfrm>
+            <a:off x="5882640" y="3364992"/>
+            <a:ext cx="1225296" cy="475488"/>
+          </a:xfrm>
+          <a:prstGeom prst="rect">
+            <a:avLst/>
+          </a:prstGeom>
+          <a:noFill/>
+          <a:ln/>
+        </p:spPr>
+        <p:txBody>
+          <a:bodyPr wrap="square" lIns="0" tIns="0" rIns="0" bIns="0" rtlCol="0" anchor="ctr"/>
+          <a:lstStyle/>
+          <a:p>
+            <a:pPr algn="ctr" indent="0" marL="0">
+              <a:buNone/>
+            </a:pPr>
+            <a:r>
+              <a:rPr lang="en-US" sz="1400" b="1" dirty="0">
+                <a:solidFill>
+                  <a:srgbClr val="0D9488"/>
+                </a:solidFill>
+                <a:latin typeface="Trebuchet MS" pitchFamily="34" charset="0"/>
+                <a:ea typeface="Trebuchet MS" pitchFamily="34" charset="-122"/>
+                <a:cs typeface="Trebuchet MS" pitchFamily="34" charset="-120"/>
+              </a:rPr>
+              <a:t>a</a:t>
+            </a:r>
+            <a:endParaRPr lang="en-US" sz="1400" dirty="0"/>
+          </a:p>
+        </p:txBody>
+      </p:sp>
+      <p:sp>
+        <p:nvSpPr>
+          <p:cNvPr id="42" name="Text 40"/>
+          <p:cNvSpPr/>
+          <p:nvPr/>
+        </p:nvSpPr>
+        <p:spPr>
+          <a:xfrm>
+            <a:off x="7107936" y="3364992"/>
+            <a:ext cx="76200" cy="475488"/>
+          </a:xfrm>
+          <a:prstGeom prst="rect">
+            <a:avLst/>
+          </a:prstGeom>
+          <a:noFill/>
+          <a:ln/>
+        </p:spPr>
+        <p:txBody>
+          <a:bodyPr wrap="square" lIns="0" tIns="0" rIns="0" bIns="0" rtlCol="0" anchor="ctr"/>
+          <a:lstStyle/>
+          <a:p>
+            <a:pPr algn="ctr" indent="0" marL="0">
+              <a:buNone/>
+            </a:pPr>
+            <a:r>
+              <a:rPr lang="en-US" sz="1600" b="1" dirty="0">
+                <a:solidFill>
+                  <a:srgbClr val="0D9488"/>
+                </a:solidFill>
+                <a:latin typeface="Trebuchet MS" pitchFamily="34" charset="0"/>
+                <a:ea typeface="Trebuchet MS" pitchFamily="34" charset="-122"/>
+                <a:cs typeface="Trebuchet MS" pitchFamily="34" charset="-120"/>
+              </a:rPr>
+              <a:t>·</a:t>
+            </a:r>
+            <a:endParaRPr lang="en-US" sz="1600" dirty="0"/>
+          </a:p>
+        </p:txBody>
+      </p:sp>
+      <p:sp>
+        <p:nvSpPr>
+          <p:cNvPr id="43" name="Shape 41"/>
+          <p:cNvSpPr/>
+          <p:nvPr/>
+        </p:nvSpPr>
+        <p:spPr>
+          <a:xfrm>
+            <a:off x="7184136" y="3364992"/>
+            <a:ext cx="1225296" cy="475488"/>
+          </a:xfrm>
+          <a:prstGeom prst="rect">
+            <a:avLst>
+              <a:gd name="adj" fmla="val 9615"/>
+            </a:avLst>
+          </a:prstGeom>
+          <a:solidFill>
+            <a:srgbClr val="FFFFFF"/>
+          </a:solidFill>
+          <a:ln w="12700">
+            <a:solidFill>
+              <a:srgbClr val="0D9488"/>
+            </a:solidFill>
+            <a:prstDash val="solid"/>
+          </a:ln>
+        </p:spPr>
+      </p:sp>
+      <p:sp>
+        <p:nvSpPr>
+          <p:cNvPr id="44" name="Text 42"/>
+          <p:cNvSpPr/>
+          <p:nvPr/>
+        </p:nvSpPr>
+        <p:spPr>
+          <a:xfrm>
+            <a:off x="7184136" y="3364992"/>
+            <a:ext cx="1225296" cy="475488"/>
+          </a:xfrm>
+          <a:prstGeom prst="rect">
+            <a:avLst/>
+          </a:prstGeom>
+          <a:noFill/>
+          <a:ln/>
+        </p:spPr>
+        <p:txBody>
+          <a:bodyPr wrap="square" lIns="0" tIns="0" rIns="0" bIns="0" rtlCol="0" anchor="ctr"/>
+          <a:lstStyle/>
+          <a:p>
+            <a:pPr algn="ctr" indent="0" marL="0">
+              <a:buNone/>
+            </a:pPr>
+            <a:r>
+              <a:rPr lang="en-US" sz="1400" b="1" dirty="0">
+                <a:solidFill>
+                  <a:srgbClr val="0D9488"/>
+                </a:solidFill>
+                <a:latin typeface="Trebuchet MS" pitchFamily="34" charset="0"/>
+                <a:ea typeface="Trebuchet MS" pitchFamily="34" charset="-122"/>
+                <a:cs typeface="Trebuchet MS" pitchFamily="34" charset="-120"/>
+              </a:rPr>
+              <a:t>tion</a:t>
+            </a:r>
+            <a:endParaRPr lang="en-US" sz="1400" dirty="0"/>
+          </a:p>
+        </p:txBody>
+      </p:sp>
+      <p:sp>
+        <p:nvSpPr>
+          <p:cNvPr id="45" name="Shape 43"/>
           <p:cNvSpPr/>
           <p:nvPr/>
         </p:nvSpPr>
@@ -21661,7 +24152,7 @@
       </p:sp>
       <p:sp>
         <p:nvSpPr>
-          <p:cNvPr id="31" name="Text 29"/>
+          <p:cNvPr id="46" name="Text 44"/>
           <p:cNvSpPr/>
           <p:nvPr/>
         </p:nvSpPr>
@@ -21700,18 +24191,18 @@
       </p:sp>
       <p:sp>
         <p:nvSpPr>
-          <p:cNvPr id="32" name="Shape 30"/>
+          <p:cNvPr id="47" name="Shape 45"/>
           <p:cNvSpPr/>
           <p:nvPr/>
         </p:nvSpPr>
         <p:spPr>
           <a:xfrm>
             <a:off x="1874520" y="4096512"/>
-            <a:ext cx="6903720" cy="658368"/>
+            <a:ext cx="6903720" cy="804672"/>
           </a:xfrm>
           <a:prstGeom prst="rect">
             <a:avLst>
-              <a:gd name="adj" fmla="val 8333"/>
+              <a:gd name="adj" fmla="val 6818"/>
             </a:avLst>
           </a:prstGeom>
           <a:solidFill>
@@ -21727,18 +24218,18 @@
       </p:sp>
       <p:sp>
         <p:nvSpPr>
-          <p:cNvPr id="33" name="Shape 31"/>
-          <p:cNvSpPr/>
-          <p:nvPr/>
-        </p:nvSpPr>
-        <p:spPr>
-          <a:xfrm>
-            <a:off x="2124837" y="4169664"/>
-            <a:ext cx="685800" cy="475488"/>
+          <p:cNvPr id="48" name="Shape 46"/>
+          <p:cNvSpPr/>
+          <p:nvPr/>
+        </p:nvSpPr>
+        <p:spPr>
+          <a:xfrm>
+            <a:off x="1951828" y="4169664"/>
+            <a:ext cx="603504" cy="384048"/>
           </a:xfrm>
           <a:prstGeom prst="rect">
             <a:avLst>
-              <a:gd name="adj" fmla="val 7692"/>
+              <a:gd name="adj" fmla="val 9524"/>
             </a:avLst>
           </a:prstGeom>
           <a:solidFill>
@@ -21754,14 +24245,14 @@
       </p:sp>
       <p:sp>
         <p:nvSpPr>
-          <p:cNvPr id="34" name="Text 32"/>
-          <p:cNvSpPr/>
-          <p:nvPr/>
-        </p:nvSpPr>
-        <p:spPr>
-          <a:xfrm>
-            <a:off x="2124837" y="4169664"/>
-            <a:ext cx="685800" cy="475488"/>
+          <p:cNvPr id="49" name="Text 47"/>
+          <p:cNvSpPr/>
+          <p:nvPr/>
+        </p:nvSpPr>
+        <p:spPr>
+          <a:xfrm>
+            <a:off x="1951828" y="4169664"/>
+            <a:ext cx="603504" cy="384048"/>
           </a:xfrm>
           <a:prstGeom prst="rect">
             <a:avLst/>
@@ -21793,18 +24284,18 @@
       </p:sp>
       <p:sp>
         <p:nvSpPr>
-          <p:cNvPr id="35" name="Shape 33"/>
-          <p:cNvSpPr/>
-          <p:nvPr/>
-        </p:nvSpPr>
-        <p:spPr>
-          <a:xfrm>
-            <a:off x="3033522" y="4169664"/>
-            <a:ext cx="685800" cy="475488"/>
+          <p:cNvPr id="50" name="Shape 48"/>
+          <p:cNvSpPr/>
+          <p:nvPr/>
+        </p:nvSpPr>
+        <p:spPr>
+          <a:xfrm>
+            <a:off x="2605209" y="4169664"/>
+            <a:ext cx="603504" cy="384048"/>
           </a:xfrm>
           <a:prstGeom prst="rect">
             <a:avLst>
-              <a:gd name="adj" fmla="val 7692"/>
+              <a:gd name="adj" fmla="val 9524"/>
             </a:avLst>
           </a:prstGeom>
           <a:solidFill>
@@ -21820,14 +24311,14 @@
       </p:sp>
       <p:sp>
         <p:nvSpPr>
-          <p:cNvPr id="36" name="Text 34"/>
-          <p:cNvSpPr/>
-          <p:nvPr/>
-        </p:nvSpPr>
-        <p:spPr>
-          <a:xfrm>
-            <a:off x="3033522" y="4169664"/>
-            <a:ext cx="685800" cy="475488"/>
+          <p:cNvPr id="51" name="Text 49"/>
+          <p:cNvSpPr/>
+          <p:nvPr/>
+        </p:nvSpPr>
+        <p:spPr>
+          <a:xfrm>
+            <a:off x="2605209" y="4169664"/>
+            <a:ext cx="603504" cy="384048"/>
           </a:xfrm>
           <a:prstGeom prst="rect">
             <a:avLst/>
@@ -21859,18 +24350,18 @@
       </p:sp>
       <p:sp>
         <p:nvSpPr>
-          <p:cNvPr id="37" name="Shape 35"/>
-          <p:cNvSpPr/>
-          <p:nvPr/>
-        </p:nvSpPr>
-        <p:spPr>
-          <a:xfrm>
-            <a:off x="3942207" y="4169664"/>
-            <a:ext cx="685800" cy="475488"/>
+          <p:cNvPr id="52" name="Shape 50"/>
+          <p:cNvSpPr/>
+          <p:nvPr/>
+        </p:nvSpPr>
+        <p:spPr>
+          <a:xfrm>
+            <a:off x="3258589" y="4169664"/>
+            <a:ext cx="603504" cy="384048"/>
           </a:xfrm>
           <a:prstGeom prst="rect">
             <a:avLst>
-              <a:gd name="adj" fmla="val 7692"/>
+              <a:gd name="adj" fmla="val 9524"/>
             </a:avLst>
           </a:prstGeom>
           <a:solidFill>
@@ -21886,14 +24377,14 @@
       </p:sp>
       <p:sp>
         <p:nvSpPr>
-          <p:cNvPr id="38" name="Text 36"/>
-          <p:cNvSpPr/>
-          <p:nvPr/>
-        </p:nvSpPr>
-        <p:spPr>
-          <a:xfrm>
-            <a:off x="3942207" y="4169664"/>
-            <a:ext cx="685800" cy="475488"/>
+          <p:cNvPr id="53" name="Text 51"/>
+          <p:cNvSpPr/>
+          <p:nvPr/>
+        </p:nvSpPr>
+        <p:spPr>
+          <a:xfrm>
+            <a:off x="3258589" y="4169664"/>
+            <a:ext cx="603504" cy="384048"/>
           </a:xfrm>
           <a:prstGeom prst="rect">
             <a:avLst/>
@@ -21925,18 +24416,18 @@
       </p:sp>
       <p:sp>
         <p:nvSpPr>
-          <p:cNvPr id="39" name="Shape 37"/>
-          <p:cNvSpPr/>
-          <p:nvPr/>
-        </p:nvSpPr>
-        <p:spPr>
-          <a:xfrm>
-            <a:off x="4850892" y="4169664"/>
-            <a:ext cx="685800" cy="475488"/>
+          <p:cNvPr id="54" name="Shape 52"/>
+          <p:cNvSpPr/>
+          <p:nvPr/>
+        </p:nvSpPr>
+        <p:spPr>
+          <a:xfrm>
+            <a:off x="3911969" y="4169664"/>
+            <a:ext cx="603504" cy="384048"/>
           </a:xfrm>
           <a:prstGeom prst="rect">
             <a:avLst>
-              <a:gd name="adj" fmla="val 7692"/>
+              <a:gd name="adj" fmla="val 9524"/>
             </a:avLst>
           </a:prstGeom>
           <a:solidFill>
@@ -21952,14 +24443,14 @@
       </p:sp>
       <p:sp>
         <p:nvSpPr>
-          <p:cNvPr id="40" name="Text 38"/>
-          <p:cNvSpPr/>
-          <p:nvPr/>
-        </p:nvSpPr>
-        <p:spPr>
-          <a:xfrm>
-            <a:off x="4850892" y="4169664"/>
-            <a:ext cx="685800" cy="475488"/>
+          <p:cNvPr id="55" name="Text 53"/>
+          <p:cNvSpPr/>
+          <p:nvPr/>
+        </p:nvSpPr>
+        <p:spPr>
+          <a:xfrm>
+            <a:off x="3911969" y="4169664"/>
+            <a:ext cx="603504" cy="384048"/>
           </a:xfrm>
           <a:prstGeom prst="rect">
             <a:avLst/>
@@ -21983,7 +24474,7 @@
                 <a:ea typeface="Trebuchet MS" pitchFamily="34" charset="-122"/>
                 <a:cs typeface="Trebuchet MS" pitchFamily="34" charset="-120"/>
               </a:rPr>
-              <a:t>r</a:t>
+              <a:t>or</a:t>
             </a:r>
             <a:endParaRPr lang="en-US" sz="900" dirty="0"/>
           </a:p>
@@ -21991,18 +24482,18 @@
       </p:sp>
       <p:sp>
         <p:nvSpPr>
-          <p:cNvPr id="41" name="Shape 39"/>
-          <p:cNvSpPr/>
-          <p:nvPr/>
-        </p:nvSpPr>
-        <p:spPr>
-          <a:xfrm>
-            <a:off x="5759577" y="4169664"/>
-            <a:ext cx="685800" cy="475488"/>
+          <p:cNvPr id="56" name="Shape 54"/>
+          <p:cNvSpPr/>
+          <p:nvPr/>
+        </p:nvSpPr>
+        <p:spPr>
+          <a:xfrm>
+            <a:off x="4565350" y="4169664"/>
+            <a:ext cx="603504" cy="384048"/>
           </a:xfrm>
           <a:prstGeom prst="rect">
             <a:avLst>
-              <a:gd name="adj" fmla="val 7692"/>
+              <a:gd name="adj" fmla="val 9524"/>
             </a:avLst>
           </a:prstGeom>
           <a:solidFill>
@@ -22018,14 +24509,14 @@
       </p:sp>
       <p:sp>
         <p:nvSpPr>
-          <p:cNvPr id="42" name="Text 40"/>
-          <p:cNvSpPr/>
-          <p:nvPr/>
-        </p:nvSpPr>
-        <p:spPr>
-          <a:xfrm>
-            <a:off x="5759577" y="4169664"/>
-            <a:ext cx="685800" cy="475488"/>
+          <p:cNvPr id="57" name="Text 55"/>
+          <p:cNvSpPr/>
+          <p:nvPr/>
+        </p:nvSpPr>
+        <p:spPr>
+          <a:xfrm>
+            <a:off x="4565350" y="4169664"/>
+            <a:ext cx="603504" cy="384048"/>
           </a:xfrm>
           <a:prstGeom prst="rect">
             <a:avLst/>
@@ -22049,7 +24540,7 @@
                 <a:ea typeface="Trebuchet MS" pitchFamily="34" charset="-122"/>
                 <a:cs typeface="Trebuchet MS" pitchFamily="34" charset="-120"/>
               </a:rPr>
-              <a:t>o</a:t>
+              <a:t>e</a:t>
             </a:r>
             <a:endParaRPr lang="en-US" sz="900" dirty="0"/>
           </a:p>
@@ -22057,18 +24548,18 @@
       </p:sp>
       <p:sp>
         <p:nvSpPr>
-          <p:cNvPr id="43" name="Shape 41"/>
-          <p:cNvSpPr/>
-          <p:nvPr/>
-        </p:nvSpPr>
-        <p:spPr>
-          <a:xfrm>
-            <a:off x="6668262" y="4169664"/>
-            <a:ext cx="685800" cy="475488"/>
+          <p:cNvPr id="58" name="Shape 56"/>
+          <p:cNvSpPr/>
+          <p:nvPr/>
+        </p:nvSpPr>
+        <p:spPr>
+          <a:xfrm>
+            <a:off x="5218730" y="4169664"/>
+            <a:ext cx="603504" cy="384048"/>
           </a:xfrm>
           <a:prstGeom prst="rect">
             <a:avLst>
-              <a:gd name="adj" fmla="val 7692"/>
+              <a:gd name="adj" fmla="val 9524"/>
             </a:avLst>
           </a:prstGeom>
           <a:solidFill>
@@ -22084,14 +24575,14 @@
       </p:sp>
       <p:sp>
         <p:nvSpPr>
-          <p:cNvPr id="44" name="Text 42"/>
-          <p:cNvSpPr/>
-          <p:nvPr/>
-        </p:nvSpPr>
-        <p:spPr>
-          <a:xfrm>
-            <a:off x="6668262" y="4169664"/>
-            <a:ext cx="685800" cy="475488"/>
+          <p:cNvPr id="59" name="Text 57"/>
+          <p:cNvSpPr/>
+          <p:nvPr/>
+        </p:nvSpPr>
+        <p:spPr>
+          <a:xfrm>
+            <a:off x="5218730" y="4169664"/>
+            <a:ext cx="603504" cy="384048"/>
           </a:xfrm>
           <a:prstGeom prst="rect">
             <a:avLst/>
@@ -22123,18 +24614,18 @@
       </p:sp>
       <p:sp>
         <p:nvSpPr>
-          <p:cNvPr id="45" name="Shape 43"/>
-          <p:cNvSpPr/>
-          <p:nvPr/>
-        </p:nvSpPr>
-        <p:spPr>
-          <a:xfrm>
-            <a:off x="7576947" y="4169664"/>
-            <a:ext cx="685800" cy="475488"/>
+          <p:cNvPr id="60" name="Shape 58"/>
+          <p:cNvSpPr/>
+          <p:nvPr/>
+        </p:nvSpPr>
+        <p:spPr>
+          <a:xfrm>
+            <a:off x="5872111" y="4169664"/>
+            <a:ext cx="603504" cy="384048"/>
           </a:xfrm>
           <a:prstGeom prst="rect">
             <a:avLst>
-              <a:gd name="adj" fmla="val 7692"/>
+              <a:gd name="adj" fmla="val 9524"/>
             </a:avLst>
           </a:prstGeom>
           <a:solidFill>
@@ -22150,14 +24641,14 @@
       </p:sp>
       <p:sp>
         <p:nvSpPr>
-          <p:cNvPr id="46" name="Text 44"/>
-          <p:cNvSpPr/>
-          <p:nvPr/>
-        </p:nvSpPr>
-        <p:spPr>
-          <a:xfrm>
-            <a:off x="7576947" y="4169664"/>
-            <a:ext cx="685800" cy="475488"/>
+          <p:cNvPr id="61" name="Text 59"/>
+          <p:cNvSpPr/>
+          <p:nvPr/>
+        </p:nvSpPr>
+        <p:spPr>
+          <a:xfrm>
+            <a:off x="5872111" y="4169664"/>
+            <a:ext cx="603504" cy="384048"/>
           </a:xfrm>
           <a:prstGeom prst="rect">
             <a:avLst/>
@@ -22182,6 +24673,243 @@
                 <a:cs typeface="Trebuchet MS" pitchFamily="34" charset="-120"/>
               </a:rPr>
               <a:t>t</a:t>
+            </a:r>
+            <a:endParaRPr lang="en-US" sz="900" dirty="0"/>
+          </a:p>
+        </p:txBody>
+      </p:sp>
+      <p:sp>
+        <p:nvSpPr>
+          <p:cNvPr id="62" name="Shape 60"/>
+          <p:cNvSpPr/>
+          <p:nvPr/>
+        </p:nvSpPr>
+        <p:spPr>
+          <a:xfrm>
+            <a:off x="6525491" y="4169664"/>
+            <a:ext cx="603504" cy="384048"/>
+          </a:xfrm>
+          <a:prstGeom prst="rect">
+            <a:avLst>
+              <a:gd name="adj" fmla="val 9524"/>
+            </a:avLst>
+          </a:prstGeom>
+          <a:solidFill>
+            <a:srgbClr val="FFFFFF"/>
+          </a:solidFill>
+          <a:ln w="12700">
+            <a:solidFill>
+              <a:srgbClr val="DB2777"/>
+            </a:solidFill>
+            <a:prstDash val="solid"/>
+          </a:ln>
+        </p:spPr>
+      </p:sp>
+      <p:sp>
+        <p:nvSpPr>
+          <p:cNvPr id="63" name="Text 61"/>
+          <p:cNvSpPr/>
+          <p:nvPr/>
+        </p:nvSpPr>
+        <p:spPr>
+          <a:xfrm>
+            <a:off x="6525491" y="4169664"/>
+            <a:ext cx="603504" cy="384048"/>
+          </a:xfrm>
+          <a:prstGeom prst="rect">
+            <a:avLst/>
+          </a:prstGeom>
+          <a:noFill/>
+          <a:ln/>
+        </p:spPr>
+        <p:txBody>
+          <a:bodyPr wrap="square" lIns="0" tIns="0" rIns="0" bIns="0" rtlCol="0" anchor="ctr"/>
+          <a:lstStyle/>
+          <a:p>
+            <a:pPr algn="ctr" indent="0" marL="0">
+              <a:buNone/>
+            </a:pPr>
+            <a:r>
+              <a:rPr lang="en-US" sz="900" b="1" dirty="0">
+                <a:solidFill>
+                  <a:srgbClr val="9D174D"/>
+                </a:solidFill>
+                <a:latin typeface="Trebuchet MS" pitchFamily="34" charset="0"/>
+                <a:ea typeface="Trebuchet MS" pitchFamily="34" charset="-122"/>
+                <a:cs typeface="Trebuchet MS" pitchFamily="34" charset="-120"/>
+              </a:rPr>
+              <a:t>a</a:t>
+            </a:r>
+            <a:endParaRPr lang="en-US" sz="900" dirty="0"/>
+          </a:p>
+        </p:txBody>
+      </p:sp>
+      <p:sp>
+        <p:nvSpPr>
+          <p:cNvPr id="64" name="Shape 62"/>
+          <p:cNvSpPr/>
+          <p:nvPr/>
+        </p:nvSpPr>
+        <p:spPr>
+          <a:xfrm>
+            <a:off x="7178871" y="4169664"/>
+            <a:ext cx="603504" cy="384048"/>
+          </a:xfrm>
+          <a:prstGeom prst="rect">
+            <a:avLst>
+              <a:gd name="adj" fmla="val 9524"/>
+            </a:avLst>
+          </a:prstGeom>
+          <a:solidFill>
+            <a:srgbClr val="FFFFFF"/>
+          </a:solidFill>
+          <a:ln w="12700">
+            <a:solidFill>
+              <a:srgbClr val="DB2777"/>
+            </a:solidFill>
+            <a:prstDash val="solid"/>
+          </a:ln>
+        </p:spPr>
+      </p:sp>
+      <p:sp>
+        <p:nvSpPr>
+          <p:cNvPr id="65" name="Text 63"/>
+          <p:cNvSpPr/>
+          <p:nvPr/>
+        </p:nvSpPr>
+        <p:spPr>
+          <a:xfrm>
+            <a:off x="7178871" y="4169664"/>
+            <a:ext cx="603504" cy="384048"/>
+          </a:xfrm>
+          <a:prstGeom prst="rect">
+            <a:avLst/>
+          </a:prstGeom>
+          <a:noFill/>
+          <a:ln/>
+        </p:spPr>
+        <p:txBody>
+          <a:bodyPr wrap="square" lIns="0" tIns="0" rIns="0" bIns="0" rtlCol="0" anchor="ctr"/>
+          <a:lstStyle/>
+          <a:p>
+            <a:pPr algn="ctr" indent="0" marL="0">
+              <a:buNone/>
+            </a:pPr>
+            <a:r>
+              <a:rPr lang="en-US" sz="900" b="1" dirty="0">
+                <a:solidFill>
+                  <a:srgbClr val="9D174D"/>
+                </a:solidFill>
+                <a:latin typeface="Trebuchet MS" pitchFamily="34" charset="0"/>
+                <a:ea typeface="Trebuchet MS" pitchFamily="34" charset="-122"/>
+                <a:cs typeface="Trebuchet MS" pitchFamily="34" charset="-120"/>
+              </a:rPr>
+              <a:t>ti</a:t>
+            </a:r>
+            <a:endParaRPr lang="en-US" sz="900" dirty="0"/>
+          </a:p>
+        </p:txBody>
+      </p:sp>
+      <p:sp>
+        <p:nvSpPr>
+          <p:cNvPr id="66" name="Text 64"/>
+          <p:cNvSpPr/>
+          <p:nvPr/>
+        </p:nvSpPr>
+        <p:spPr>
+          <a:xfrm>
+            <a:off x="7178871" y="4572000"/>
+            <a:ext cx="603504" cy="219456"/>
+          </a:xfrm>
+          <a:prstGeom prst="rect">
+            <a:avLst/>
+          </a:prstGeom>
+          <a:noFill/>
+          <a:ln/>
+        </p:spPr>
+        <p:txBody>
+          <a:bodyPr wrap="square" lIns="0" tIns="0" rIns="0" bIns="0" rtlCol="0" anchor="t"/>
+          <a:lstStyle/>
+          <a:p>
+            <a:pPr algn="ctr" indent="0" marL="0">
+              <a:buNone/>
+            </a:pPr>
+            <a:r>
+              <a:rPr lang="en-US" sz="750" i="1" dirty="0">
+                <a:solidFill>
+                  <a:srgbClr val="94A3B8"/>
+                </a:solidFill>
+                <a:latin typeface="Calibri" pitchFamily="34" charset="0"/>
+                <a:ea typeface="Calibri" pitchFamily="34" charset="-122"/>
+                <a:cs typeface="Calibri" pitchFamily="34" charset="-120"/>
+              </a:rPr>
+              <a:t>/sh/</a:t>
+            </a:r>
+            <a:endParaRPr lang="en-US" sz="750" dirty="0"/>
+          </a:p>
+        </p:txBody>
+      </p:sp>
+      <p:sp>
+        <p:nvSpPr>
+          <p:cNvPr id="67" name="Shape 65"/>
+          <p:cNvSpPr/>
+          <p:nvPr/>
+        </p:nvSpPr>
+        <p:spPr>
+          <a:xfrm>
+            <a:off x="7832252" y="4169664"/>
+            <a:ext cx="603504" cy="384048"/>
+          </a:xfrm>
+          <a:prstGeom prst="rect">
+            <a:avLst>
+              <a:gd name="adj" fmla="val 9524"/>
+            </a:avLst>
+          </a:prstGeom>
+          <a:solidFill>
+            <a:srgbClr val="FFFFFF"/>
+          </a:solidFill>
+          <a:ln w="12700">
+            <a:solidFill>
+              <a:srgbClr val="DB2777"/>
+            </a:solidFill>
+            <a:prstDash val="solid"/>
+          </a:ln>
+        </p:spPr>
+      </p:sp>
+      <p:sp>
+        <p:nvSpPr>
+          <p:cNvPr id="68" name="Text 66"/>
+          <p:cNvSpPr/>
+          <p:nvPr/>
+        </p:nvSpPr>
+        <p:spPr>
+          <a:xfrm>
+            <a:off x="7832252" y="4169664"/>
+            <a:ext cx="603504" cy="384048"/>
+          </a:xfrm>
+          <a:prstGeom prst="rect">
+            <a:avLst/>
+          </a:prstGeom>
+          <a:noFill/>
+          <a:ln/>
+        </p:spPr>
+        <p:txBody>
+          <a:bodyPr wrap="square" lIns="0" tIns="0" rIns="0" bIns="0" rtlCol="0" anchor="ctr"/>
+          <a:lstStyle/>
+          <a:p>
+            <a:pPr algn="ctr" indent="0" marL="0">
+              <a:buNone/>
+            </a:pPr>
+            <a:r>
+              <a:rPr lang="en-US" sz="900" b="1" dirty="0">
+                <a:solidFill>
+                  <a:srgbClr val="9D174D"/>
+                </a:solidFill>
+                <a:latin typeface="Trebuchet MS" pitchFamily="34" charset="0"/>
+                <a:ea typeface="Trebuchet MS" pitchFamily="34" charset="-122"/>
+                <a:cs typeface="Trebuchet MS" pitchFamily="34" charset="-120"/>
+              </a:rPr>
+              <a:t>on</a:t>
             </a:r>
             <a:endParaRPr lang="en-US" sz="900" dirty="0"/>
           </a:p>
@@ -22473,7 +25201,7 @@
                 <a:ea typeface="Calibri" pitchFamily="34" charset="-122"/>
                 <a:cs typeface="Calibri" pitchFamily="34" charset="-120"/>
               </a:rPr>
-              <a:t>Word Labs  •  wordlabs.app  •  Prefix: 'de-' = down, away, undo, remove</a:t>
+              <a:t>Word Labs  •  wordlabs.app  •  Prefix: 'de-' = down, away, remove, reverse</a:t>
             </a:r>
             <a:endParaRPr lang="en-US" sz="800" dirty="0"/>
           </a:p>
@@ -22612,7 +25340,7 @@
                 <a:ea typeface="Trebuchet MS" pitchFamily="34" charset="-122"/>
                 <a:cs typeface="Trebuchet MS" pitchFamily="34" charset="-120"/>
               </a:rPr>
-              <a:t>decode</a:t>
+              <a:t>demolish</a:t>
             </a:r>
             <a:endParaRPr lang="en-US" sz="2800" dirty="0"/>
           </a:p>
@@ -23300,7 +26028,7 @@
                 <a:ea typeface="Calibri" pitchFamily="34" charset="-122"/>
                 <a:cs typeface="Calibri" pitchFamily="34" charset="-120"/>
               </a:rPr>
-              <a:t>Word Labs  •  wordlabs.app  •  Prefix: 'de-' = down, away, undo, remove</a:t>
+              <a:t>Word Labs  •  wordlabs.app  •  Prefix: 'de-' = down, away, remove, reverse</a:t>
             </a:r>
             <a:endParaRPr lang="en-US" sz="800" dirty="0"/>
           </a:p>
@@ -23439,7 +26167,7 @@
                 <a:ea typeface="Trebuchet MS" pitchFamily="34" charset="-122"/>
                 <a:cs typeface="Trebuchet MS" pitchFamily="34" charset="-120"/>
               </a:rPr>
-              <a:t>decode</a:t>
+              <a:t>demolish</a:t>
             </a:r>
             <a:endParaRPr lang="en-US" sz="2800" dirty="0"/>
           </a:p>
@@ -23617,7 +26345,7 @@
                 <a:ea typeface="Calibri" pitchFamily="34" charset="-122"/>
                 <a:cs typeface="Calibri" pitchFamily="34" charset="-120"/>
               </a:rPr>
-              <a:t>undo, reverse</a:t>
+              <a:t>down, away</a:t>
             </a:r>
             <a:endParaRPr lang="en-US" sz="850" dirty="0"/>
           </a:p>
@@ -23690,7 +26418,7 @@
                 <a:ea typeface="Trebuchet MS" pitchFamily="34" charset="-122"/>
                 <a:cs typeface="Trebuchet MS" pitchFamily="34" charset="-120"/>
               </a:rPr>
-              <a:t>code</a:t>
+              <a:t>molish</a:t>
             </a:r>
             <a:endParaRPr lang="en-US" sz="1300" dirty="0"/>
           </a:p>
@@ -23729,7 +26457,7 @@
                 <a:ea typeface="Calibri" pitchFamily="34" charset="-122"/>
                 <a:cs typeface="Calibri" pitchFamily="34" charset="-120"/>
               </a:rPr>
-              <a:t>a system of hidden symbols or words</a:t>
+              <a:t>to build, structure</a:t>
             </a:r>
             <a:endParaRPr lang="en-US" sz="850" dirty="0"/>
           </a:p>
@@ -24285,7 +27013,7 @@
                 <a:ea typeface="Calibri" pitchFamily="34" charset="-122"/>
                 <a:cs typeface="Calibri" pitchFamily="34" charset="-120"/>
               </a:rPr>
-              <a:t>Word Labs  •  wordlabs.app  •  Prefix: 'de-' = down, away, undo, remove</a:t>
+              <a:t>Word Labs  •  wordlabs.app  •  Prefix: 'de-' = down, away, remove, reverse</a:t>
             </a:r>
             <a:endParaRPr lang="en-US" sz="800" dirty="0"/>
           </a:p>
@@ -24358,7 +27086,7 @@
                 <a:ea typeface="Trebuchet MS" pitchFamily="34" charset="-122"/>
                 <a:cs typeface="Trebuchet MS" pitchFamily="34" charset="-120"/>
               </a:rPr>
-              <a:t>We are learning that the prefix 'de-' means 'down, away, undo, remove'.</a:t>
+              <a:t>We are learning that the prefix 'de-' means 'down, away, remove, reverse'.</a:t>
             </a:r>
             <a:endParaRPr lang="en-US" sz="2000" dirty="0"/>
           </a:p>
@@ -25004,7 +27732,7 @@
                 <a:ea typeface="Calibri" pitchFamily="34" charset="-122"/>
                 <a:cs typeface="Calibri" pitchFamily="34" charset="-120"/>
               </a:rPr>
-              <a:t>Word Labs  •  wordlabs.app  •  Prefix: 'de-' = down, away, undo, remove</a:t>
+              <a:t>Word Labs  •  wordlabs.app  •  Prefix: 'de-' = down, away, remove, reverse</a:t>
             </a:r>
             <a:endParaRPr lang="en-US" sz="800" dirty="0"/>
           </a:p>
@@ -25143,7 +27871,7 @@
                 <a:ea typeface="Trebuchet MS" pitchFamily="34" charset="-122"/>
                 <a:cs typeface="Trebuchet MS" pitchFamily="34" charset="-120"/>
               </a:rPr>
-              <a:t>decode</a:t>
+              <a:t>demolish</a:t>
             </a:r>
             <a:endParaRPr lang="en-US" sz="2800" dirty="0"/>
           </a:p>
@@ -25321,7 +28049,7 @@
                 <a:ea typeface="Calibri" pitchFamily="34" charset="-122"/>
                 <a:cs typeface="Calibri" pitchFamily="34" charset="-120"/>
               </a:rPr>
-              <a:t>undo, reverse</a:t>
+              <a:t>down, away</a:t>
             </a:r>
             <a:endParaRPr lang="en-US" sz="850" dirty="0"/>
           </a:p>
@@ -25394,7 +28122,7 @@
                 <a:ea typeface="Trebuchet MS" pitchFamily="34" charset="-122"/>
                 <a:cs typeface="Trebuchet MS" pitchFamily="34" charset="-120"/>
               </a:rPr>
-              <a:t>code</a:t>
+              <a:t>molish</a:t>
             </a:r>
             <a:endParaRPr lang="en-US" sz="1300" dirty="0"/>
           </a:p>
@@ -25433,7 +28161,7 @@
                 <a:ea typeface="Calibri" pitchFamily="34" charset="-122"/>
                 <a:cs typeface="Calibri" pitchFamily="34" charset="-120"/>
               </a:rPr>
-              <a:t>a system of hidden symbols or words</a:t>
+              <a:t>to build, structure</a:t>
             </a:r>
             <a:endParaRPr lang="en-US" sz="850" dirty="0"/>
           </a:p>
@@ -25540,7 +28268,7 @@
         </p:nvSpPr>
         <p:spPr>
           <a:xfrm>
-            <a:off x="2999232" y="3364992"/>
+            <a:off x="2313432" y="3364992"/>
             <a:ext cx="1645920" cy="475488"/>
           </a:xfrm>
           <a:prstGeom prst="rect">
@@ -25567,7 +28295,7 @@
         </p:nvSpPr>
         <p:spPr>
           <a:xfrm>
-            <a:off x="2999232" y="3364992"/>
+            <a:off x="2313432" y="3364992"/>
             <a:ext cx="1645920" cy="475488"/>
           </a:xfrm>
           <a:prstGeom prst="rect">
@@ -25606,8 +28334,8 @@
         </p:nvSpPr>
         <p:spPr>
           <a:xfrm>
-            <a:off x="4645152" y="3364992"/>
-            <a:ext cx="1097280" cy="475488"/>
+            <a:off x="3959352" y="3364992"/>
+            <a:ext cx="411480" cy="475488"/>
           </a:xfrm>
           <a:prstGeom prst="rect">
             <a:avLst/>
@@ -25645,7 +28373,7 @@
         </p:nvSpPr>
         <p:spPr>
           <a:xfrm>
-            <a:off x="5742432" y="3364992"/>
+            <a:off x="4370832" y="3364992"/>
             <a:ext cx="1645920" cy="475488"/>
           </a:xfrm>
           <a:prstGeom prst="rect">
@@ -25672,7 +28400,7 @@
         </p:nvSpPr>
         <p:spPr>
           <a:xfrm>
-            <a:off x="5742432" y="3364992"/>
+            <a:off x="4370832" y="3364992"/>
             <a:ext cx="1645920" cy="475488"/>
           </a:xfrm>
           <a:prstGeom prst="rect">
@@ -25697,7 +28425,7 @@
                 <a:ea typeface="Trebuchet MS" pitchFamily="34" charset="-122"/>
                 <a:cs typeface="Trebuchet MS" pitchFamily="34" charset="-120"/>
               </a:rPr>
-              <a:t>code</a:t>
+              <a:t>mol</a:t>
             </a:r>
             <a:endParaRPr lang="en-US" sz="1400" dirty="0"/>
           </a:p>
@@ -25705,7 +28433,112 @@
       </p:sp>
       <p:sp>
         <p:nvSpPr>
-          <p:cNvPr id="30" name="Shape 28"/>
+          <p:cNvPr id="30" name="Text 28"/>
+          <p:cNvSpPr/>
+          <p:nvPr/>
+        </p:nvSpPr>
+        <p:spPr>
+          <a:xfrm>
+            <a:off x="6016752" y="3364992"/>
+            <a:ext cx="411480" cy="475488"/>
+          </a:xfrm>
+          <a:prstGeom prst="rect">
+            <a:avLst/>
+          </a:prstGeom>
+          <a:noFill/>
+          <a:ln/>
+        </p:spPr>
+        <p:txBody>
+          <a:bodyPr wrap="square" lIns="0" tIns="0" rIns="0" bIns="0" rtlCol="0" anchor="ctr"/>
+          <a:lstStyle/>
+          <a:p>
+            <a:pPr algn="ctr" indent="0" marL="0">
+              <a:buNone/>
+            </a:pPr>
+            <a:r>
+              <a:rPr lang="en-US" sz="1600" b="1" dirty="0">
+                <a:solidFill>
+                  <a:srgbClr val="0D9488"/>
+                </a:solidFill>
+                <a:latin typeface="Trebuchet MS" pitchFamily="34" charset="0"/>
+                <a:ea typeface="Trebuchet MS" pitchFamily="34" charset="-122"/>
+                <a:cs typeface="Trebuchet MS" pitchFamily="34" charset="-120"/>
+              </a:rPr>
+              <a:t>·</a:t>
+            </a:r>
+            <a:endParaRPr lang="en-US" sz="1600" dirty="0"/>
+          </a:p>
+        </p:txBody>
+      </p:sp>
+      <p:sp>
+        <p:nvSpPr>
+          <p:cNvPr id="31" name="Shape 29"/>
+          <p:cNvSpPr/>
+          <p:nvPr/>
+        </p:nvSpPr>
+        <p:spPr>
+          <a:xfrm>
+            <a:off x="6428232" y="3364992"/>
+            <a:ext cx="1645920" cy="475488"/>
+          </a:xfrm>
+          <a:prstGeom prst="rect">
+            <a:avLst>
+              <a:gd name="adj" fmla="val 9615"/>
+            </a:avLst>
+          </a:prstGeom>
+          <a:solidFill>
+            <a:srgbClr val="FFFFFF"/>
+          </a:solidFill>
+          <a:ln w="12700">
+            <a:solidFill>
+              <a:srgbClr val="0D9488"/>
+            </a:solidFill>
+            <a:prstDash val="solid"/>
+          </a:ln>
+        </p:spPr>
+      </p:sp>
+      <p:sp>
+        <p:nvSpPr>
+          <p:cNvPr id="32" name="Text 30"/>
+          <p:cNvSpPr/>
+          <p:nvPr/>
+        </p:nvSpPr>
+        <p:spPr>
+          <a:xfrm>
+            <a:off x="6428232" y="3364992"/>
+            <a:ext cx="1645920" cy="475488"/>
+          </a:xfrm>
+          <a:prstGeom prst="rect">
+            <a:avLst/>
+          </a:prstGeom>
+          <a:noFill/>
+          <a:ln/>
+        </p:spPr>
+        <p:txBody>
+          <a:bodyPr wrap="square" lIns="0" tIns="0" rIns="0" bIns="0" rtlCol="0" anchor="ctr"/>
+          <a:lstStyle/>
+          <a:p>
+            <a:pPr algn="ctr" indent="0" marL="0">
+              <a:buNone/>
+            </a:pPr>
+            <a:r>
+              <a:rPr lang="en-US" sz="1400" b="1" dirty="0">
+                <a:solidFill>
+                  <a:srgbClr val="0D9488"/>
+                </a:solidFill>
+                <a:latin typeface="Trebuchet MS" pitchFamily="34" charset="0"/>
+                <a:ea typeface="Trebuchet MS" pitchFamily="34" charset="-122"/>
+                <a:cs typeface="Trebuchet MS" pitchFamily="34" charset="-120"/>
+              </a:rPr>
+              <a:t>ish</a:t>
+            </a:r>
+            <a:endParaRPr lang="en-US" sz="1400" dirty="0"/>
+          </a:p>
+        </p:txBody>
+      </p:sp>
+      <p:sp>
+        <p:nvSpPr>
+          <p:cNvPr id="33" name="Shape 31"/>
           <p:cNvSpPr/>
           <p:nvPr/>
         </p:nvSpPr>
@@ -25732,7 +28565,7 @@
       </p:sp>
       <p:sp>
         <p:nvSpPr>
-          <p:cNvPr id="31" name="Text 29"/>
+          <p:cNvPr id="34" name="Text 32"/>
           <p:cNvSpPr/>
           <p:nvPr/>
         </p:nvSpPr>
@@ -25771,7 +28604,7 @@
       </p:sp>
       <p:sp>
         <p:nvSpPr>
-          <p:cNvPr id="32" name="Shape 30"/>
+          <p:cNvPr id="35" name="Shape 33"/>
           <p:cNvSpPr/>
           <p:nvPr/>
         </p:nvSpPr>
@@ -25798,7 +28631,7 @@
       </p:sp>
       <p:sp>
         <p:nvSpPr>
-          <p:cNvPr id="33" name="Text 31"/>
+          <p:cNvPr id="36" name="Text 34"/>
           <p:cNvSpPr/>
           <p:nvPr/>
         </p:nvSpPr>
@@ -26121,7 +28954,7 @@
                 <a:ea typeface="Calibri" pitchFamily="34" charset="-122"/>
                 <a:cs typeface="Calibri" pitchFamily="34" charset="-120"/>
               </a:rPr>
-              <a:t>Word Labs  •  wordlabs.app  •  Prefix: 'de-' = down, away, undo, remove</a:t>
+              <a:t>Word Labs  •  wordlabs.app  •  Prefix: 'de-' = down, away, remove, reverse</a:t>
             </a:r>
             <a:endParaRPr lang="en-US" sz="800" dirty="0"/>
           </a:p>
@@ -26260,7 +29093,7 @@
                 <a:ea typeface="Trebuchet MS" pitchFamily="34" charset="-122"/>
                 <a:cs typeface="Trebuchet MS" pitchFamily="34" charset="-120"/>
               </a:rPr>
-              <a:t>decode</a:t>
+              <a:t>demolish</a:t>
             </a:r>
             <a:endParaRPr lang="en-US" sz="2800" dirty="0"/>
           </a:p>
@@ -26438,7 +29271,7 @@
                 <a:ea typeface="Calibri" pitchFamily="34" charset="-122"/>
                 <a:cs typeface="Calibri" pitchFamily="34" charset="-120"/>
               </a:rPr>
-              <a:t>undo, reverse</a:t>
+              <a:t>down, away</a:t>
             </a:r>
             <a:endParaRPr lang="en-US" sz="850" dirty="0"/>
           </a:p>
@@ -26511,7 +29344,7 @@
                 <a:ea typeface="Trebuchet MS" pitchFamily="34" charset="-122"/>
                 <a:cs typeface="Trebuchet MS" pitchFamily="34" charset="-120"/>
               </a:rPr>
-              <a:t>code</a:t>
+              <a:t>molish</a:t>
             </a:r>
             <a:endParaRPr lang="en-US" sz="1300" dirty="0"/>
           </a:p>
@@ -26550,7 +29383,7 @@
                 <a:ea typeface="Calibri" pitchFamily="34" charset="-122"/>
                 <a:cs typeface="Calibri" pitchFamily="34" charset="-120"/>
               </a:rPr>
-              <a:t>a system of hidden symbols or words</a:t>
+              <a:t>to build, structure</a:t>
             </a:r>
             <a:endParaRPr lang="en-US" sz="850" dirty="0"/>
           </a:p>
@@ -26657,7 +29490,7 @@
         </p:nvSpPr>
         <p:spPr>
           <a:xfrm>
-            <a:off x="2999232" y="3364992"/>
+            <a:off x="2313432" y="3364992"/>
             <a:ext cx="1645920" cy="475488"/>
           </a:xfrm>
           <a:prstGeom prst="rect">
@@ -26684,7 +29517,7 @@
         </p:nvSpPr>
         <p:spPr>
           <a:xfrm>
-            <a:off x="2999232" y="3364992"/>
+            <a:off x="2313432" y="3364992"/>
             <a:ext cx="1645920" cy="475488"/>
           </a:xfrm>
           <a:prstGeom prst="rect">
@@ -26723,8 +29556,8 @@
         </p:nvSpPr>
         <p:spPr>
           <a:xfrm>
-            <a:off x="4645152" y="3364992"/>
-            <a:ext cx="1097280" cy="475488"/>
+            <a:off x="3959352" y="3364992"/>
+            <a:ext cx="411480" cy="475488"/>
           </a:xfrm>
           <a:prstGeom prst="rect">
             <a:avLst/>
@@ -26762,7 +29595,7 @@
         </p:nvSpPr>
         <p:spPr>
           <a:xfrm>
-            <a:off x="5742432" y="3364992"/>
+            <a:off x="4370832" y="3364992"/>
             <a:ext cx="1645920" cy="475488"/>
           </a:xfrm>
           <a:prstGeom prst="rect">
@@ -26789,7 +29622,7 @@
         </p:nvSpPr>
         <p:spPr>
           <a:xfrm>
-            <a:off x="5742432" y="3364992"/>
+            <a:off x="4370832" y="3364992"/>
             <a:ext cx="1645920" cy="475488"/>
           </a:xfrm>
           <a:prstGeom prst="rect">
@@ -26814,7 +29647,7 @@
                 <a:ea typeface="Trebuchet MS" pitchFamily="34" charset="-122"/>
                 <a:cs typeface="Trebuchet MS" pitchFamily="34" charset="-120"/>
               </a:rPr>
-              <a:t>code</a:t>
+              <a:t>mol</a:t>
             </a:r>
             <a:endParaRPr lang="en-US" sz="1400" dirty="0"/>
           </a:p>
@@ -26822,7 +29655,112 @@
       </p:sp>
       <p:sp>
         <p:nvSpPr>
-          <p:cNvPr id="30" name="Shape 28"/>
+          <p:cNvPr id="30" name="Text 28"/>
+          <p:cNvSpPr/>
+          <p:nvPr/>
+        </p:nvSpPr>
+        <p:spPr>
+          <a:xfrm>
+            <a:off x="6016752" y="3364992"/>
+            <a:ext cx="411480" cy="475488"/>
+          </a:xfrm>
+          <a:prstGeom prst="rect">
+            <a:avLst/>
+          </a:prstGeom>
+          <a:noFill/>
+          <a:ln/>
+        </p:spPr>
+        <p:txBody>
+          <a:bodyPr wrap="square" lIns="0" tIns="0" rIns="0" bIns="0" rtlCol="0" anchor="ctr"/>
+          <a:lstStyle/>
+          <a:p>
+            <a:pPr algn="ctr" indent="0" marL="0">
+              <a:buNone/>
+            </a:pPr>
+            <a:r>
+              <a:rPr lang="en-US" sz="1600" b="1" dirty="0">
+                <a:solidFill>
+                  <a:srgbClr val="0D9488"/>
+                </a:solidFill>
+                <a:latin typeface="Trebuchet MS" pitchFamily="34" charset="0"/>
+                <a:ea typeface="Trebuchet MS" pitchFamily="34" charset="-122"/>
+                <a:cs typeface="Trebuchet MS" pitchFamily="34" charset="-120"/>
+              </a:rPr>
+              <a:t>·</a:t>
+            </a:r>
+            <a:endParaRPr lang="en-US" sz="1600" dirty="0"/>
+          </a:p>
+        </p:txBody>
+      </p:sp>
+      <p:sp>
+        <p:nvSpPr>
+          <p:cNvPr id="31" name="Shape 29"/>
+          <p:cNvSpPr/>
+          <p:nvPr/>
+        </p:nvSpPr>
+        <p:spPr>
+          <a:xfrm>
+            <a:off x="6428232" y="3364992"/>
+            <a:ext cx="1645920" cy="475488"/>
+          </a:xfrm>
+          <a:prstGeom prst="rect">
+            <a:avLst>
+              <a:gd name="adj" fmla="val 9615"/>
+            </a:avLst>
+          </a:prstGeom>
+          <a:solidFill>
+            <a:srgbClr val="FFFFFF"/>
+          </a:solidFill>
+          <a:ln w="12700">
+            <a:solidFill>
+              <a:srgbClr val="0D9488"/>
+            </a:solidFill>
+            <a:prstDash val="solid"/>
+          </a:ln>
+        </p:spPr>
+      </p:sp>
+      <p:sp>
+        <p:nvSpPr>
+          <p:cNvPr id="32" name="Text 30"/>
+          <p:cNvSpPr/>
+          <p:nvPr/>
+        </p:nvSpPr>
+        <p:spPr>
+          <a:xfrm>
+            <a:off x="6428232" y="3364992"/>
+            <a:ext cx="1645920" cy="475488"/>
+          </a:xfrm>
+          <a:prstGeom prst="rect">
+            <a:avLst/>
+          </a:prstGeom>
+          <a:noFill/>
+          <a:ln/>
+        </p:spPr>
+        <p:txBody>
+          <a:bodyPr wrap="square" lIns="0" tIns="0" rIns="0" bIns="0" rtlCol="0" anchor="ctr"/>
+          <a:lstStyle/>
+          <a:p>
+            <a:pPr algn="ctr" indent="0" marL="0">
+              <a:buNone/>
+            </a:pPr>
+            <a:r>
+              <a:rPr lang="en-US" sz="1400" b="1" dirty="0">
+                <a:solidFill>
+                  <a:srgbClr val="0D9488"/>
+                </a:solidFill>
+                <a:latin typeface="Trebuchet MS" pitchFamily="34" charset="0"/>
+                <a:ea typeface="Trebuchet MS" pitchFamily="34" charset="-122"/>
+                <a:cs typeface="Trebuchet MS" pitchFamily="34" charset="-120"/>
+              </a:rPr>
+              <a:t>ish</a:t>
+            </a:r>
+            <a:endParaRPr lang="en-US" sz="1400" dirty="0"/>
+          </a:p>
+        </p:txBody>
+      </p:sp>
+      <p:sp>
+        <p:nvSpPr>
+          <p:cNvPr id="33" name="Shape 31"/>
           <p:cNvSpPr/>
           <p:nvPr/>
         </p:nvSpPr>
@@ -26849,7 +29787,7 @@
       </p:sp>
       <p:sp>
         <p:nvSpPr>
-          <p:cNvPr id="31" name="Text 29"/>
+          <p:cNvPr id="34" name="Text 32"/>
           <p:cNvSpPr/>
           <p:nvPr/>
         </p:nvSpPr>
@@ -26888,18 +29826,18 @@
       </p:sp>
       <p:sp>
         <p:nvSpPr>
-          <p:cNvPr id="32" name="Shape 30"/>
+          <p:cNvPr id="35" name="Shape 33"/>
           <p:cNvSpPr/>
           <p:nvPr/>
         </p:nvSpPr>
         <p:spPr>
           <a:xfrm>
             <a:off x="1874520" y="4096512"/>
-            <a:ext cx="6903720" cy="804672"/>
+            <a:ext cx="6903720" cy="658368"/>
           </a:xfrm>
           <a:prstGeom prst="rect">
             <a:avLst>
-              <a:gd name="adj" fmla="val 6818"/>
+              <a:gd name="adj" fmla="val 8333"/>
             </a:avLst>
           </a:prstGeom>
           <a:solidFill>
@@ -26915,18 +29853,18 @@
       </p:sp>
       <p:sp>
         <p:nvSpPr>
-          <p:cNvPr id="33" name="Shape 31"/>
-          <p:cNvSpPr/>
-          <p:nvPr/>
-        </p:nvSpPr>
-        <p:spPr>
-          <a:xfrm>
-            <a:off x="2427732" y="4169664"/>
-            <a:ext cx="685800" cy="384048"/>
+          <p:cNvPr id="36" name="Shape 34"/>
+          <p:cNvSpPr/>
+          <p:nvPr/>
+        </p:nvSpPr>
+        <p:spPr>
+          <a:xfrm>
+            <a:off x="2124837" y="4169664"/>
+            <a:ext cx="685800" cy="475488"/>
           </a:xfrm>
           <a:prstGeom prst="rect">
             <a:avLst>
-              <a:gd name="adj" fmla="val 9524"/>
+              <a:gd name="adj" fmla="val 7692"/>
             </a:avLst>
           </a:prstGeom>
           <a:solidFill>
@@ -26942,14 +29880,14 @@
       </p:sp>
       <p:sp>
         <p:nvSpPr>
-          <p:cNvPr id="34" name="Text 32"/>
-          <p:cNvSpPr/>
-          <p:nvPr/>
-        </p:nvSpPr>
-        <p:spPr>
-          <a:xfrm>
-            <a:off x="2427732" y="4169664"/>
-            <a:ext cx="685800" cy="384048"/>
+          <p:cNvPr id="37" name="Text 35"/>
+          <p:cNvSpPr/>
+          <p:nvPr/>
+        </p:nvSpPr>
+        <p:spPr>
+          <a:xfrm>
+            <a:off x="2124837" y="4169664"/>
+            <a:ext cx="685800" cy="475488"/>
           </a:xfrm>
           <a:prstGeom prst="rect">
             <a:avLst/>
@@ -26981,18 +29919,18 @@
       </p:sp>
       <p:sp>
         <p:nvSpPr>
-          <p:cNvPr id="35" name="Shape 33"/>
-          <p:cNvSpPr/>
-          <p:nvPr/>
-        </p:nvSpPr>
-        <p:spPr>
-          <a:xfrm>
-            <a:off x="3639312" y="4169664"/>
-            <a:ext cx="685800" cy="384048"/>
+          <p:cNvPr id="38" name="Shape 36"/>
+          <p:cNvSpPr/>
+          <p:nvPr/>
+        </p:nvSpPr>
+        <p:spPr>
+          <a:xfrm>
+            <a:off x="3033522" y="4169664"/>
+            <a:ext cx="685800" cy="475488"/>
           </a:xfrm>
           <a:prstGeom prst="rect">
             <a:avLst>
-              <a:gd name="adj" fmla="val 9524"/>
+              <a:gd name="adj" fmla="val 7692"/>
             </a:avLst>
           </a:prstGeom>
           <a:solidFill>
@@ -27008,14 +29946,14 @@
       </p:sp>
       <p:sp>
         <p:nvSpPr>
-          <p:cNvPr id="36" name="Text 34"/>
-          <p:cNvSpPr/>
-          <p:nvPr/>
-        </p:nvSpPr>
-        <p:spPr>
-          <a:xfrm>
-            <a:off x="3639312" y="4169664"/>
-            <a:ext cx="685800" cy="384048"/>
+          <p:cNvPr id="39" name="Text 37"/>
+          <p:cNvSpPr/>
+          <p:nvPr/>
+        </p:nvSpPr>
+        <p:spPr>
+          <a:xfrm>
+            <a:off x="3033522" y="4169664"/>
+            <a:ext cx="685800" cy="475488"/>
           </a:xfrm>
           <a:prstGeom prst="rect">
             <a:avLst/>
@@ -27047,18 +29985,18 @@
       </p:sp>
       <p:sp>
         <p:nvSpPr>
-          <p:cNvPr id="37" name="Shape 35"/>
-          <p:cNvSpPr/>
-          <p:nvPr/>
-        </p:nvSpPr>
-        <p:spPr>
-          <a:xfrm>
-            <a:off x="4850892" y="4169664"/>
-            <a:ext cx="685800" cy="384048"/>
+          <p:cNvPr id="40" name="Shape 38"/>
+          <p:cNvSpPr/>
+          <p:nvPr/>
+        </p:nvSpPr>
+        <p:spPr>
+          <a:xfrm>
+            <a:off x="3942207" y="4169664"/>
+            <a:ext cx="685800" cy="475488"/>
           </a:xfrm>
           <a:prstGeom prst="rect">
             <a:avLst>
-              <a:gd name="adj" fmla="val 9524"/>
+              <a:gd name="adj" fmla="val 7692"/>
             </a:avLst>
           </a:prstGeom>
           <a:solidFill>
@@ -27074,14 +30012,14 @@
       </p:sp>
       <p:sp>
         <p:nvSpPr>
-          <p:cNvPr id="38" name="Text 36"/>
-          <p:cNvSpPr/>
-          <p:nvPr/>
-        </p:nvSpPr>
-        <p:spPr>
-          <a:xfrm>
-            <a:off x="4850892" y="4169664"/>
-            <a:ext cx="685800" cy="384048"/>
+          <p:cNvPr id="41" name="Text 39"/>
+          <p:cNvSpPr/>
+          <p:nvPr/>
+        </p:nvSpPr>
+        <p:spPr>
+          <a:xfrm>
+            <a:off x="3942207" y="4169664"/>
+            <a:ext cx="685800" cy="475488"/>
           </a:xfrm>
           <a:prstGeom prst="rect">
             <a:avLst/>
@@ -27105,7 +30043,7 @@
                 <a:ea typeface="Trebuchet MS" pitchFamily="34" charset="-122"/>
                 <a:cs typeface="Trebuchet MS" pitchFamily="34" charset="-120"/>
               </a:rPr>
-              <a:t>c</a:t>
+              <a:t>m</a:t>
             </a:r>
             <a:endParaRPr lang="en-US" sz="900" dirty="0"/>
           </a:p>
@@ -27113,57 +30051,18 @@
       </p:sp>
       <p:sp>
         <p:nvSpPr>
-          <p:cNvPr id="39" name="Text 37"/>
-          <p:cNvSpPr/>
-          <p:nvPr/>
-        </p:nvSpPr>
-        <p:spPr>
-          <a:xfrm>
-            <a:off x="4850892" y="4572000"/>
-            <a:ext cx="685800" cy="219456"/>
-          </a:xfrm>
-          <a:prstGeom prst="rect">
-            <a:avLst/>
-          </a:prstGeom>
-          <a:noFill/>
-          <a:ln/>
-        </p:spPr>
-        <p:txBody>
-          <a:bodyPr wrap="square" lIns="0" tIns="0" rIns="0" bIns="0" rtlCol="0" anchor="t"/>
-          <a:lstStyle/>
-          <a:p>
-            <a:pPr algn="ctr" indent="0" marL="0">
-              <a:buNone/>
-            </a:pPr>
-            <a:r>
-              <a:rPr lang="en-US" sz="750" i="1" dirty="0">
-                <a:solidFill>
-                  <a:srgbClr val="94A3B8"/>
-                </a:solidFill>
-                <a:latin typeface="Calibri" pitchFamily="34" charset="0"/>
-                <a:ea typeface="Calibri" pitchFamily="34" charset="-122"/>
-                <a:cs typeface="Calibri" pitchFamily="34" charset="-120"/>
-              </a:rPr>
-              <a:t>/k/</a:t>
-            </a:r>
-            <a:endParaRPr lang="en-US" sz="750" dirty="0"/>
-          </a:p>
-        </p:txBody>
-      </p:sp>
-      <p:sp>
-        <p:nvSpPr>
-          <p:cNvPr id="40" name="Shape 38"/>
-          <p:cNvSpPr/>
-          <p:nvPr/>
-        </p:nvSpPr>
-        <p:spPr>
-          <a:xfrm>
-            <a:off x="6062472" y="4169664"/>
-            <a:ext cx="685800" cy="384048"/>
+          <p:cNvPr id="42" name="Shape 40"/>
+          <p:cNvSpPr/>
+          <p:nvPr/>
+        </p:nvSpPr>
+        <p:spPr>
+          <a:xfrm>
+            <a:off x="4850892" y="4169664"/>
+            <a:ext cx="685800" cy="475488"/>
           </a:xfrm>
           <a:prstGeom prst="rect">
             <a:avLst>
-              <a:gd name="adj" fmla="val 9524"/>
+              <a:gd name="adj" fmla="val 7692"/>
             </a:avLst>
           </a:prstGeom>
           <a:solidFill>
@@ -27179,14 +30078,14 @@
       </p:sp>
       <p:sp>
         <p:nvSpPr>
-          <p:cNvPr id="41" name="Text 39"/>
-          <p:cNvSpPr/>
-          <p:nvPr/>
-        </p:nvSpPr>
-        <p:spPr>
-          <a:xfrm>
-            <a:off x="6062472" y="4169664"/>
-            <a:ext cx="685800" cy="384048"/>
+          <p:cNvPr id="43" name="Text 41"/>
+          <p:cNvSpPr/>
+          <p:nvPr/>
+        </p:nvSpPr>
+        <p:spPr>
+          <a:xfrm>
+            <a:off x="4850892" y="4169664"/>
+            <a:ext cx="685800" cy="475488"/>
           </a:xfrm>
           <a:prstGeom prst="rect">
             <a:avLst/>
@@ -27218,18 +30117,18 @@
       </p:sp>
       <p:sp>
         <p:nvSpPr>
-          <p:cNvPr id="42" name="Shape 40"/>
-          <p:cNvSpPr/>
-          <p:nvPr/>
-        </p:nvSpPr>
-        <p:spPr>
-          <a:xfrm>
-            <a:off x="7274052" y="4169664"/>
-            <a:ext cx="685800" cy="384048"/>
+          <p:cNvPr id="44" name="Shape 42"/>
+          <p:cNvSpPr/>
+          <p:nvPr/>
+        </p:nvSpPr>
+        <p:spPr>
+          <a:xfrm>
+            <a:off x="5759577" y="4169664"/>
+            <a:ext cx="685800" cy="475488"/>
           </a:xfrm>
           <a:prstGeom prst="rect">
             <a:avLst>
-              <a:gd name="adj" fmla="val 9524"/>
+              <a:gd name="adj" fmla="val 7692"/>
             </a:avLst>
           </a:prstGeom>
           <a:solidFill>
@@ -27245,14 +30144,14 @@
       </p:sp>
       <p:sp>
         <p:nvSpPr>
-          <p:cNvPr id="43" name="Text 41"/>
-          <p:cNvSpPr/>
-          <p:nvPr/>
-        </p:nvSpPr>
-        <p:spPr>
-          <a:xfrm>
-            <a:off x="7274052" y="4169664"/>
-            <a:ext cx="685800" cy="384048"/>
+          <p:cNvPr id="45" name="Text 43"/>
+          <p:cNvSpPr/>
+          <p:nvPr/>
+        </p:nvSpPr>
+        <p:spPr>
+          <a:xfrm>
+            <a:off x="5759577" y="4169664"/>
+            <a:ext cx="685800" cy="475488"/>
           </a:xfrm>
           <a:prstGeom prst="rect">
             <a:avLst/>
@@ -27276,7 +30175,7 @@
                 <a:ea typeface="Trebuchet MS" pitchFamily="34" charset="-122"/>
                 <a:cs typeface="Trebuchet MS" pitchFamily="34" charset="-120"/>
               </a:rPr>
-              <a:t>de</a:t>
+              <a:t>l</a:t>
             </a:r>
             <a:endParaRPr lang="en-US" sz="900" dirty="0"/>
           </a:p>
@@ -27284,40 +30183,133 @@
       </p:sp>
       <p:sp>
         <p:nvSpPr>
-          <p:cNvPr id="44" name="Text 42"/>
-          <p:cNvSpPr/>
-          <p:nvPr/>
-        </p:nvSpPr>
-        <p:spPr>
-          <a:xfrm>
-            <a:off x="7274052" y="4572000"/>
-            <a:ext cx="685800" cy="219456"/>
-          </a:xfrm>
-          <a:prstGeom prst="rect">
-            <a:avLst/>
-          </a:prstGeom>
-          <a:noFill/>
-          <a:ln/>
-        </p:spPr>
-        <p:txBody>
-          <a:bodyPr wrap="square" lIns="0" tIns="0" rIns="0" bIns="0" rtlCol="0" anchor="t"/>
-          <a:lstStyle/>
-          <a:p>
-            <a:pPr algn="ctr" indent="0" marL="0">
-              <a:buNone/>
-            </a:pPr>
-            <a:r>
-              <a:rPr lang="en-US" sz="750" i="1" dirty="0">
-                <a:solidFill>
-                  <a:srgbClr val="94A3B8"/>
-                </a:solidFill>
-                <a:latin typeface="Calibri" pitchFamily="34" charset="0"/>
-                <a:ea typeface="Calibri" pitchFamily="34" charset="-122"/>
-                <a:cs typeface="Calibri" pitchFamily="34" charset="-120"/>
-              </a:rPr>
-              <a:t>/d/</a:t>
-            </a:r>
-            <a:endParaRPr lang="en-US" sz="750" dirty="0"/>
+          <p:cNvPr id="46" name="Shape 44"/>
+          <p:cNvSpPr/>
+          <p:nvPr/>
+        </p:nvSpPr>
+        <p:spPr>
+          <a:xfrm>
+            <a:off x="6668262" y="4169664"/>
+            <a:ext cx="685800" cy="475488"/>
+          </a:xfrm>
+          <a:prstGeom prst="rect">
+            <a:avLst>
+              <a:gd name="adj" fmla="val 7692"/>
+            </a:avLst>
+          </a:prstGeom>
+          <a:solidFill>
+            <a:srgbClr val="FFFFFF"/>
+          </a:solidFill>
+          <a:ln w="12700">
+            <a:solidFill>
+              <a:srgbClr val="DB2777"/>
+            </a:solidFill>
+            <a:prstDash val="solid"/>
+          </a:ln>
+        </p:spPr>
+      </p:sp>
+      <p:sp>
+        <p:nvSpPr>
+          <p:cNvPr id="47" name="Text 45"/>
+          <p:cNvSpPr/>
+          <p:nvPr/>
+        </p:nvSpPr>
+        <p:spPr>
+          <a:xfrm>
+            <a:off x="6668262" y="4169664"/>
+            <a:ext cx="685800" cy="475488"/>
+          </a:xfrm>
+          <a:prstGeom prst="rect">
+            <a:avLst/>
+          </a:prstGeom>
+          <a:noFill/>
+          <a:ln/>
+        </p:spPr>
+        <p:txBody>
+          <a:bodyPr wrap="square" lIns="0" tIns="0" rIns="0" bIns="0" rtlCol="0" anchor="ctr"/>
+          <a:lstStyle/>
+          <a:p>
+            <a:pPr algn="ctr" indent="0" marL="0">
+              <a:buNone/>
+            </a:pPr>
+            <a:r>
+              <a:rPr lang="en-US" sz="900" b="1" dirty="0">
+                <a:solidFill>
+                  <a:srgbClr val="9D174D"/>
+                </a:solidFill>
+                <a:latin typeface="Trebuchet MS" pitchFamily="34" charset="0"/>
+                <a:ea typeface="Trebuchet MS" pitchFamily="34" charset="-122"/>
+                <a:cs typeface="Trebuchet MS" pitchFamily="34" charset="-120"/>
+              </a:rPr>
+              <a:t>i</a:t>
+            </a:r>
+            <a:endParaRPr lang="en-US" sz="900" dirty="0"/>
+          </a:p>
+        </p:txBody>
+      </p:sp>
+      <p:sp>
+        <p:nvSpPr>
+          <p:cNvPr id="48" name="Shape 46"/>
+          <p:cNvSpPr/>
+          <p:nvPr/>
+        </p:nvSpPr>
+        <p:spPr>
+          <a:xfrm>
+            <a:off x="7576947" y="4169664"/>
+            <a:ext cx="685800" cy="475488"/>
+          </a:xfrm>
+          <a:prstGeom prst="rect">
+            <a:avLst>
+              <a:gd name="adj" fmla="val 7692"/>
+            </a:avLst>
+          </a:prstGeom>
+          <a:solidFill>
+            <a:srgbClr val="FFFFFF"/>
+          </a:solidFill>
+          <a:ln w="12700">
+            <a:solidFill>
+              <a:srgbClr val="DB2777"/>
+            </a:solidFill>
+            <a:prstDash val="solid"/>
+          </a:ln>
+        </p:spPr>
+      </p:sp>
+      <p:sp>
+        <p:nvSpPr>
+          <p:cNvPr id="49" name="Text 47"/>
+          <p:cNvSpPr/>
+          <p:nvPr/>
+        </p:nvSpPr>
+        <p:spPr>
+          <a:xfrm>
+            <a:off x="7576947" y="4169664"/>
+            <a:ext cx="685800" cy="475488"/>
+          </a:xfrm>
+          <a:prstGeom prst="rect">
+            <a:avLst/>
+          </a:prstGeom>
+          <a:noFill/>
+          <a:ln/>
+        </p:spPr>
+        <p:txBody>
+          <a:bodyPr wrap="square" lIns="0" tIns="0" rIns="0" bIns="0" rtlCol="0" anchor="ctr"/>
+          <a:lstStyle/>
+          <a:p>
+            <a:pPr algn="ctr" indent="0" marL="0">
+              <a:buNone/>
+            </a:pPr>
+            <a:r>
+              <a:rPr lang="en-US" sz="900" b="1" dirty="0">
+                <a:solidFill>
+                  <a:srgbClr val="9D174D"/>
+                </a:solidFill>
+                <a:latin typeface="Trebuchet MS" pitchFamily="34" charset="0"/>
+                <a:ea typeface="Trebuchet MS" pitchFamily="34" charset="-122"/>
+                <a:cs typeface="Trebuchet MS" pitchFamily="34" charset="-120"/>
+              </a:rPr>
+              <a:t>sh</a:t>
+            </a:r>
+            <a:endParaRPr lang="en-US" sz="900" dirty="0"/>
           </a:p>
         </p:txBody>
       </p:sp>
@@ -27607,7 +30599,7 @@
                 <a:ea typeface="Calibri" pitchFamily="34" charset="-122"/>
                 <a:cs typeface="Calibri" pitchFamily="34" charset="-120"/>
               </a:rPr>
-              <a:t>Word Labs  •  wordlabs.app  •  Prefix: 'de-' = down, away, undo, remove</a:t>
+              <a:t>Word Labs  •  wordlabs.app  •  Prefix: 'de-' = down, away, remove, reverse</a:t>
             </a:r>
             <a:endParaRPr lang="en-US" sz="800" dirty="0"/>
           </a:p>
@@ -27746,7 +30738,7 @@
                 <a:ea typeface="Trebuchet MS" pitchFamily="34" charset="-122"/>
                 <a:cs typeface="Trebuchet MS" pitchFamily="34" charset="-120"/>
               </a:rPr>
-              <a:t>depart</a:t>
+              <a:t>decompose</a:t>
             </a:r>
             <a:endParaRPr lang="en-US" sz="2800" dirty="0"/>
           </a:p>
@@ -28434,7 +31426,7 @@
                 <a:ea typeface="Calibri" pitchFamily="34" charset="-122"/>
                 <a:cs typeface="Calibri" pitchFamily="34" charset="-120"/>
               </a:rPr>
-              <a:t>Word Labs  •  wordlabs.app  •  Prefix: 'de-' = down, away, undo, remove</a:t>
+              <a:t>Word Labs  •  wordlabs.app  •  Prefix: 'de-' = down, away, remove, reverse</a:t>
             </a:r>
             <a:endParaRPr lang="en-US" sz="800" dirty="0"/>
           </a:p>
@@ -28573,7 +31565,7 @@
                 <a:ea typeface="Trebuchet MS" pitchFamily="34" charset="-122"/>
                 <a:cs typeface="Trebuchet MS" pitchFamily="34" charset="-120"/>
               </a:rPr>
-              <a:t>depart</a:t>
+              <a:t>decompose</a:t>
             </a:r>
             <a:endParaRPr lang="en-US" sz="2800" dirty="0"/>
           </a:p>
@@ -28751,7 +31743,7 @@
                 <a:ea typeface="Calibri" pitchFamily="34" charset="-122"/>
                 <a:cs typeface="Calibri" pitchFamily="34" charset="-120"/>
               </a:rPr>
-              <a:t>away</a:t>
+              <a:t>down, away</a:t>
             </a:r>
             <a:endParaRPr lang="en-US" sz="850" dirty="0"/>
           </a:p>
@@ -28824,7 +31816,7 @@
                 <a:ea typeface="Trebuchet MS" pitchFamily="34" charset="-122"/>
                 <a:cs typeface="Trebuchet MS" pitchFamily="34" charset="-120"/>
               </a:rPr>
-              <a:t>part</a:t>
+              <a:t>compose</a:t>
             </a:r>
             <a:endParaRPr lang="en-US" sz="1300" dirty="0"/>
           </a:p>
@@ -28863,7 +31855,7 @@
                 <a:ea typeface="Calibri" pitchFamily="34" charset="-122"/>
                 <a:cs typeface="Calibri" pitchFamily="34" charset="-120"/>
               </a:rPr>
-              <a:t>to go away, leave</a:t>
+              <a:t>to put together</a:t>
             </a:r>
             <a:endParaRPr lang="en-US" sz="850" dirty="0"/>
           </a:p>
@@ -29419,7 +32411,7 @@
                 <a:ea typeface="Calibri" pitchFamily="34" charset="-122"/>
                 <a:cs typeface="Calibri" pitchFamily="34" charset="-120"/>
               </a:rPr>
-              <a:t>Word Labs  •  wordlabs.app  •  Prefix: 'de-' = down, away, undo, remove</a:t>
+              <a:t>Word Labs  •  wordlabs.app  •  Prefix: 'de-' = down, away, remove, reverse</a:t>
             </a:r>
             <a:endParaRPr lang="en-US" sz="800" dirty="0"/>
           </a:p>
@@ -29558,7 +32550,7 @@
                 <a:ea typeface="Trebuchet MS" pitchFamily="34" charset="-122"/>
                 <a:cs typeface="Trebuchet MS" pitchFamily="34" charset="-120"/>
               </a:rPr>
-              <a:t>depart</a:t>
+              <a:t>decompose</a:t>
             </a:r>
             <a:endParaRPr lang="en-US" sz="2800" dirty="0"/>
           </a:p>
@@ -29736,7 +32728,7 @@
                 <a:ea typeface="Calibri" pitchFamily="34" charset="-122"/>
                 <a:cs typeface="Calibri" pitchFamily="34" charset="-120"/>
               </a:rPr>
-              <a:t>away</a:t>
+              <a:t>down, away</a:t>
             </a:r>
             <a:endParaRPr lang="en-US" sz="850" dirty="0"/>
           </a:p>
@@ -29809,7 +32801,7 @@
                 <a:ea typeface="Trebuchet MS" pitchFamily="34" charset="-122"/>
                 <a:cs typeface="Trebuchet MS" pitchFamily="34" charset="-120"/>
               </a:rPr>
-              <a:t>part</a:t>
+              <a:t>compose</a:t>
             </a:r>
             <a:endParaRPr lang="en-US" sz="1300" dirty="0"/>
           </a:p>
@@ -29848,7 +32840,7 @@
                 <a:ea typeface="Calibri" pitchFamily="34" charset="-122"/>
                 <a:cs typeface="Calibri" pitchFamily="34" charset="-120"/>
               </a:rPr>
-              <a:t>to go away, leave</a:t>
+              <a:t>to put together</a:t>
             </a:r>
             <a:endParaRPr lang="en-US" sz="850" dirty="0"/>
           </a:p>
@@ -29955,7 +32947,7 @@
         </p:nvSpPr>
         <p:spPr>
           <a:xfrm>
-            <a:off x="2999232" y="3364992"/>
+            <a:off x="2313432" y="3364992"/>
             <a:ext cx="1645920" cy="475488"/>
           </a:xfrm>
           <a:prstGeom prst="rect">
@@ -29982,7 +32974,7 @@
         </p:nvSpPr>
         <p:spPr>
           <a:xfrm>
-            <a:off x="2999232" y="3364992"/>
+            <a:off x="2313432" y="3364992"/>
             <a:ext cx="1645920" cy="475488"/>
           </a:xfrm>
           <a:prstGeom prst="rect">
@@ -30021,8 +33013,8 @@
         </p:nvSpPr>
         <p:spPr>
           <a:xfrm>
-            <a:off x="4645152" y="3364992"/>
-            <a:ext cx="1097280" cy="475488"/>
+            <a:off x="3959352" y="3364992"/>
+            <a:ext cx="411480" cy="475488"/>
           </a:xfrm>
           <a:prstGeom prst="rect">
             <a:avLst/>
@@ -30060,7 +33052,7 @@
         </p:nvSpPr>
         <p:spPr>
           <a:xfrm>
-            <a:off x="5742432" y="3364992"/>
+            <a:off x="4370832" y="3364992"/>
             <a:ext cx="1645920" cy="475488"/>
           </a:xfrm>
           <a:prstGeom prst="rect">
@@ -30087,7 +33079,7 @@
         </p:nvSpPr>
         <p:spPr>
           <a:xfrm>
-            <a:off x="5742432" y="3364992"/>
+            <a:off x="4370832" y="3364992"/>
             <a:ext cx="1645920" cy="475488"/>
           </a:xfrm>
           <a:prstGeom prst="rect">
@@ -30112,7 +33104,7 @@
                 <a:ea typeface="Trebuchet MS" pitchFamily="34" charset="-122"/>
                 <a:cs typeface="Trebuchet MS" pitchFamily="34" charset="-120"/>
               </a:rPr>
-              <a:t>part</a:t>
+              <a:t>com</a:t>
             </a:r>
             <a:endParaRPr lang="en-US" sz="1400" dirty="0"/>
           </a:p>
@@ -30120,7 +33112,112 @@
       </p:sp>
       <p:sp>
         <p:nvSpPr>
-          <p:cNvPr id="30" name="Shape 28"/>
+          <p:cNvPr id="30" name="Text 28"/>
+          <p:cNvSpPr/>
+          <p:nvPr/>
+        </p:nvSpPr>
+        <p:spPr>
+          <a:xfrm>
+            <a:off x="6016752" y="3364992"/>
+            <a:ext cx="411480" cy="475488"/>
+          </a:xfrm>
+          <a:prstGeom prst="rect">
+            <a:avLst/>
+          </a:prstGeom>
+          <a:noFill/>
+          <a:ln/>
+        </p:spPr>
+        <p:txBody>
+          <a:bodyPr wrap="square" lIns="0" tIns="0" rIns="0" bIns="0" rtlCol="0" anchor="ctr"/>
+          <a:lstStyle/>
+          <a:p>
+            <a:pPr algn="ctr" indent="0" marL="0">
+              <a:buNone/>
+            </a:pPr>
+            <a:r>
+              <a:rPr lang="en-US" sz="1600" b="1" dirty="0">
+                <a:solidFill>
+                  <a:srgbClr val="0D9488"/>
+                </a:solidFill>
+                <a:latin typeface="Trebuchet MS" pitchFamily="34" charset="0"/>
+                <a:ea typeface="Trebuchet MS" pitchFamily="34" charset="-122"/>
+                <a:cs typeface="Trebuchet MS" pitchFamily="34" charset="-120"/>
+              </a:rPr>
+              <a:t>·</a:t>
+            </a:r>
+            <a:endParaRPr lang="en-US" sz="1600" dirty="0"/>
+          </a:p>
+        </p:txBody>
+      </p:sp>
+      <p:sp>
+        <p:nvSpPr>
+          <p:cNvPr id="31" name="Shape 29"/>
+          <p:cNvSpPr/>
+          <p:nvPr/>
+        </p:nvSpPr>
+        <p:spPr>
+          <a:xfrm>
+            <a:off x="6428232" y="3364992"/>
+            <a:ext cx="1645920" cy="475488"/>
+          </a:xfrm>
+          <a:prstGeom prst="rect">
+            <a:avLst>
+              <a:gd name="adj" fmla="val 9615"/>
+            </a:avLst>
+          </a:prstGeom>
+          <a:solidFill>
+            <a:srgbClr val="FFFFFF"/>
+          </a:solidFill>
+          <a:ln w="12700">
+            <a:solidFill>
+              <a:srgbClr val="0D9488"/>
+            </a:solidFill>
+            <a:prstDash val="solid"/>
+          </a:ln>
+        </p:spPr>
+      </p:sp>
+      <p:sp>
+        <p:nvSpPr>
+          <p:cNvPr id="32" name="Text 30"/>
+          <p:cNvSpPr/>
+          <p:nvPr/>
+        </p:nvSpPr>
+        <p:spPr>
+          <a:xfrm>
+            <a:off x="6428232" y="3364992"/>
+            <a:ext cx="1645920" cy="475488"/>
+          </a:xfrm>
+          <a:prstGeom prst="rect">
+            <a:avLst/>
+          </a:prstGeom>
+          <a:noFill/>
+          <a:ln/>
+        </p:spPr>
+        <p:txBody>
+          <a:bodyPr wrap="square" lIns="0" tIns="0" rIns="0" bIns="0" rtlCol="0" anchor="ctr"/>
+          <a:lstStyle/>
+          <a:p>
+            <a:pPr algn="ctr" indent="0" marL="0">
+              <a:buNone/>
+            </a:pPr>
+            <a:r>
+              <a:rPr lang="en-US" sz="1400" b="1" dirty="0">
+                <a:solidFill>
+                  <a:srgbClr val="0D9488"/>
+                </a:solidFill>
+                <a:latin typeface="Trebuchet MS" pitchFamily="34" charset="0"/>
+                <a:ea typeface="Trebuchet MS" pitchFamily="34" charset="-122"/>
+                <a:cs typeface="Trebuchet MS" pitchFamily="34" charset="-120"/>
+              </a:rPr>
+              <a:t>pose</a:t>
+            </a:r>
+            <a:endParaRPr lang="en-US" sz="1400" dirty="0"/>
+          </a:p>
+        </p:txBody>
+      </p:sp>
+      <p:sp>
+        <p:nvSpPr>
+          <p:cNvPr id="33" name="Shape 31"/>
           <p:cNvSpPr/>
           <p:nvPr/>
         </p:nvSpPr>
@@ -30147,7 +33244,7 @@
       </p:sp>
       <p:sp>
         <p:nvSpPr>
-          <p:cNvPr id="31" name="Text 29"/>
+          <p:cNvPr id="34" name="Text 32"/>
           <p:cNvSpPr/>
           <p:nvPr/>
         </p:nvSpPr>
@@ -30186,7 +33283,7 @@
       </p:sp>
       <p:sp>
         <p:nvSpPr>
-          <p:cNvPr id="32" name="Shape 30"/>
+          <p:cNvPr id="35" name="Shape 33"/>
           <p:cNvSpPr/>
           <p:nvPr/>
         </p:nvSpPr>
@@ -30213,7 +33310,7 @@
       </p:sp>
       <p:sp>
         <p:nvSpPr>
-          <p:cNvPr id="33" name="Text 31"/>
+          <p:cNvPr id="36" name="Text 34"/>
           <p:cNvSpPr/>
           <p:nvPr/>
         </p:nvSpPr>
@@ -30536,7 +33633,7 @@
                 <a:ea typeface="Calibri" pitchFamily="34" charset="-122"/>
                 <a:cs typeface="Calibri" pitchFamily="34" charset="-120"/>
               </a:rPr>
-              <a:t>Word Labs  •  wordlabs.app  •  Prefix: 'de-' = down, away, undo, remove</a:t>
+              <a:t>Word Labs  •  wordlabs.app  •  Prefix: 'de-' = down, away, remove, reverse</a:t>
             </a:r>
             <a:endParaRPr lang="en-US" sz="800" dirty="0"/>
           </a:p>
@@ -30675,7 +33772,7 @@
                 <a:ea typeface="Trebuchet MS" pitchFamily="34" charset="-122"/>
                 <a:cs typeface="Trebuchet MS" pitchFamily="34" charset="-120"/>
               </a:rPr>
-              <a:t>depart</a:t>
+              <a:t>decompose</a:t>
             </a:r>
             <a:endParaRPr lang="en-US" sz="2800" dirty="0"/>
           </a:p>
@@ -30853,7 +33950,7 @@
                 <a:ea typeface="Calibri" pitchFamily="34" charset="-122"/>
                 <a:cs typeface="Calibri" pitchFamily="34" charset="-120"/>
               </a:rPr>
-              <a:t>away</a:t>
+              <a:t>down, away</a:t>
             </a:r>
             <a:endParaRPr lang="en-US" sz="850" dirty="0"/>
           </a:p>
@@ -30926,7 +34023,7 @@
                 <a:ea typeface="Trebuchet MS" pitchFamily="34" charset="-122"/>
                 <a:cs typeface="Trebuchet MS" pitchFamily="34" charset="-120"/>
               </a:rPr>
-              <a:t>part</a:t>
+              <a:t>compose</a:t>
             </a:r>
             <a:endParaRPr lang="en-US" sz="1300" dirty="0"/>
           </a:p>
@@ -30965,7 +34062,7 @@
                 <a:ea typeface="Calibri" pitchFamily="34" charset="-122"/>
                 <a:cs typeface="Calibri" pitchFamily="34" charset="-120"/>
               </a:rPr>
-              <a:t>to go away, leave</a:t>
+              <a:t>to put together</a:t>
             </a:r>
             <a:endParaRPr lang="en-US" sz="850" dirty="0"/>
           </a:p>
@@ -31072,7 +34169,7 @@
         </p:nvSpPr>
         <p:spPr>
           <a:xfrm>
-            <a:off x="2999232" y="3364992"/>
+            <a:off x="2313432" y="3364992"/>
             <a:ext cx="1645920" cy="475488"/>
           </a:xfrm>
           <a:prstGeom prst="rect">
@@ -31099,7 +34196,7 @@
         </p:nvSpPr>
         <p:spPr>
           <a:xfrm>
-            <a:off x="2999232" y="3364992"/>
+            <a:off x="2313432" y="3364992"/>
             <a:ext cx="1645920" cy="475488"/>
           </a:xfrm>
           <a:prstGeom prst="rect">
@@ -31138,8 +34235,8 @@
         </p:nvSpPr>
         <p:spPr>
           <a:xfrm>
-            <a:off x="4645152" y="3364992"/>
-            <a:ext cx="1097280" cy="475488"/>
+            <a:off x="3959352" y="3364992"/>
+            <a:ext cx="411480" cy="475488"/>
           </a:xfrm>
           <a:prstGeom prst="rect">
             <a:avLst/>
@@ -31177,7 +34274,7 @@
         </p:nvSpPr>
         <p:spPr>
           <a:xfrm>
-            <a:off x="5742432" y="3364992"/>
+            <a:off x="4370832" y="3364992"/>
             <a:ext cx="1645920" cy="475488"/>
           </a:xfrm>
           <a:prstGeom prst="rect">
@@ -31204,7 +34301,7 @@
         </p:nvSpPr>
         <p:spPr>
           <a:xfrm>
-            <a:off x="5742432" y="3364992"/>
+            <a:off x="4370832" y="3364992"/>
             <a:ext cx="1645920" cy="475488"/>
           </a:xfrm>
           <a:prstGeom prst="rect">
@@ -31229,7 +34326,7 @@
                 <a:ea typeface="Trebuchet MS" pitchFamily="34" charset="-122"/>
                 <a:cs typeface="Trebuchet MS" pitchFamily="34" charset="-120"/>
               </a:rPr>
-              <a:t>part</a:t>
+              <a:t>com</a:t>
             </a:r>
             <a:endParaRPr lang="en-US" sz="1400" dirty="0"/>
           </a:p>
@@ -31237,7 +34334,112 @@
       </p:sp>
       <p:sp>
         <p:nvSpPr>
-          <p:cNvPr id="30" name="Shape 28"/>
+          <p:cNvPr id="30" name="Text 28"/>
+          <p:cNvSpPr/>
+          <p:nvPr/>
+        </p:nvSpPr>
+        <p:spPr>
+          <a:xfrm>
+            <a:off x="6016752" y="3364992"/>
+            <a:ext cx="411480" cy="475488"/>
+          </a:xfrm>
+          <a:prstGeom prst="rect">
+            <a:avLst/>
+          </a:prstGeom>
+          <a:noFill/>
+          <a:ln/>
+        </p:spPr>
+        <p:txBody>
+          <a:bodyPr wrap="square" lIns="0" tIns="0" rIns="0" bIns="0" rtlCol="0" anchor="ctr"/>
+          <a:lstStyle/>
+          <a:p>
+            <a:pPr algn="ctr" indent="0" marL="0">
+              <a:buNone/>
+            </a:pPr>
+            <a:r>
+              <a:rPr lang="en-US" sz="1600" b="1" dirty="0">
+                <a:solidFill>
+                  <a:srgbClr val="0D9488"/>
+                </a:solidFill>
+                <a:latin typeface="Trebuchet MS" pitchFamily="34" charset="0"/>
+                <a:ea typeface="Trebuchet MS" pitchFamily="34" charset="-122"/>
+                <a:cs typeface="Trebuchet MS" pitchFamily="34" charset="-120"/>
+              </a:rPr>
+              <a:t>·</a:t>
+            </a:r>
+            <a:endParaRPr lang="en-US" sz="1600" dirty="0"/>
+          </a:p>
+        </p:txBody>
+      </p:sp>
+      <p:sp>
+        <p:nvSpPr>
+          <p:cNvPr id="31" name="Shape 29"/>
+          <p:cNvSpPr/>
+          <p:nvPr/>
+        </p:nvSpPr>
+        <p:spPr>
+          <a:xfrm>
+            <a:off x="6428232" y="3364992"/>
+            <a:ext cx="1645920" cy="475488"/>
+          </a:xfrm>
+          <a:prstGeom prst="rect">
+            <a:avLst>
+              <a:gd name="adj" fmla="val 9615"/>
+            </a:avLst>
+          </a:prstGeom>
+          <a:solidFill>
+            <a:srgbClr val="FFFFFF"/>
+          </a:solidFill>
+          <a:ln w="12700">
+            <a:solidFill>
+              <a:srgbClr val="0D9488"/>
+            </a:solidFill>
+            <a:prstDash val="solid"/>
+          </a:ln>
+        </p:spPr>
+      </p:sp>
+      <p:sp>
+        <p:nvSpPr>
+          <p:cNvPr id="32" name="Text 30"/>
+          <p:cNvSpPr/>
+          <p:nvPr/>
+        </p:nvSpPr>
+        <p:spPr>
+          <a:xfrm>
+            <a:off x="6428232" y="3364992"/>
+            <a:ext cx="1645920" cy="475488"/>
+          </a:xfrm>
+          <a:prstGeom prst="rect">
+            <a:avLst/>
+          </a:prstGeom>
+          <a:noFill/>
+          <a:ln/>
+        </p:spPr>
+        <p:txBody>
+          <a:bodyPr wrap="square" lIns="0" tIns="0" rIns="0" bIns="0" rtlCol="0" anchor="ctr"/>
+          <a:lstStyle/>
+          <a:p>
+            <a:pPr algn="ctr" indent="0" marL="0">
+              <a:buNone/>
+            </a:pPr>
+            <a:r>
+              <a:rPr lang="en-US" sz="1400" b="1" dirty="0">
+                <a:solidFill>
+                  <a:srgbClr val="0D9488"/>
+                </a:solidFill>
+                <a:latin typeface="Trebuchet MS" pitchFamily="34" charset="0"/>
+                <a:ea typeface="Trebuchet MS" pitchFamily="34" charset="-122"/>
+                <a:cs typeface="Trebuchet MS" pitchFamily="34" charset="-120"/>
+              </a:rPr>
+              <a:t>pose</a:t>
+            </a:r>
+            <a:endParaRPr lang="en-US" sz="1400" dirty="0"/>
+          </a:p>
+        </p:txBody>
+      </p:sp>
+      <p:sp>
+        <p:nvSpPr>
+          <p:cNvPr id="33" name="Shape 31"/>
           <p:cNvSpPr/>
           <p:nvPr/>
         </p:nvSpPr>
@@ -31264,7 +34466,7 @@
       </p:sp>
       <p:sp>
         <p:nvSpPr>
-          <p:cNvPr id="31" name="Text 29"/>
+          <p:cNvPr id="34" name="Text 32"/>
           <p:cNvSpPr/>
           <p:nvPr/>
         </p:nvSpPr>
@@ -31303,7 +34505,7 @@
       </p:sp>
       <p:sp>
         <p:nvSpPr>
-          <p:cNvPr id="32" name="Shape 30"/>
+          <p:cNvPr id="35" name="Shape 33"/>
           <p:cNvSpPr/>
           <p:nvPr/>
         </p:nvSpPr>
@@ -31330,13 +34532,13 @@
       </p:sp>
       <p:sp>
         <p:nvSpPr>
-          <p:cNvPr id="33" name="Shape 31"/>
-          <p:cNvSpPr/>
-          <p:nvPr/>
-        </p:nvSpPr>
-        <p:spPr>
-          <a:xfrm>
-            <a:off x="2427732" y="4169664"/>
+          <p:cNvPr id="36" name="Shape 34"/>
+          <p:cNvSpPr/>
+          <p:nvPr/>
+        </p:nvSpPr>
+        <p:spPr>
+          <a:xfrm>
+            <a:off x="2023872" y="4169664"/>
             <a:ext cx="685800" cy="475488"/>
           </a:xfrm>
           <a:prstGeom prst="rect">
@@ -31357,13 +34559,13 @@
       </p:sp>
       <p:sp>
         <p:nvSpPr>
-          <p:cNvPr id="34" name="Text 32"/>
-          <p:cNvSpPr/>
-          <p:nvPr/>
-        </p:nvSpPr>
-        <p:spPr>
-          <a:xfrm>
-            <a:off x="2427732" y="4169664"/>
+          <p:cNvPr id="37" name="Text 35"/>
+          <p:cNvSpPr/>
+          <p:nvPr/>
+        </p:nvSpPr>
+        <p:spPr>
+          <a:xfrm>
+            <a:off x="2023872" y="4169664"/>
             <a:ext cx="685800" cy="475488"/>
           </a:xfrm>
           <a:prstGeom prst="rect">
@@ -31396,13 +34598,13 @@
       </p:sp>
       <p:sp>
         <p:nvSpPr>
-          <p:cNvPr id="35" name="Shape 33"/>
-          <p:cNvSpPr/>
-          <p:nvPr/>
-        </p:nvSpPr>
-        <p:spPr>
-          <a:xfrm>
-            <a:off x="3639312" y="4169664"/>
+          <p:cNvPr id="38" name="Shape 36"/>
+          <p:cNvSpPr/>
+          <p:nvPr/>
+        </p:nvSpPr>
+        <p:spPr>
+          <a:xfrm>
+            <a:off x="2831592" y="4169664"/>
             <a:ext cx="685800" cy="475488"/>
           </a:xfrm>
           <a:prstGeom prst="rect">
@@ -31423,13 +34625,13 @@
       </p:sp>
       <p:sp>
         <p:nvSpPr>
-          <p:cNvPr id="36" name="Text 34"/>
-          <p:cNvSpPr/>
-          <p:nvPr/>
-        </p:nvSpPr>
-        <p:spPr>
-          <a:xfrm>
-            <a:off x="3639312" y="4169664"/>
+          <p:cNvPr id="39" name="Text 37"/>
+          <p:cNvSpPr/>
+          <p:nvPr/>
+        </p:nvSpPr>
+        <p:spPr>
+          <a:xfrm>
+            <a:off x="2831592" y="4169664"/>
             <a:ext cx="685800" cy="475488"/>
           </a:xfrm>
           <a:prstGeom prst="rect">
@@ -31462,13 +34664,13 @@
       </p:sp>
       <p:sp>
         <p:nvSpPr>
-          <p:cNvPr id="37" name="Shape 35"/>
-          <p:cNvSpPr/>
-          <p:nvPr/>
-        </p:nvSpPr>
-        <p:spPr>
-          <a:xfrm>
-            <a:off x="4850892" y="4169664"/>
+          <p:cNvPr id="40" name="Shape 38"/>
+          <p:cNvSpPr/>
+          <p:nvPr/>
+        </p:nvSpPr>
+        <p:spPr>
+          <a:xfrm>
+            <a:off x="3639312" y="4169664"/>
             <a:ext cx="685800" cy="475488"/>
           </a:xfrm>
           <a:prstGeom prst="rect">
@@ -31489,13 +34691,13 @@
       </p:sp>
       <p:sp>
         <p:nvSpPr>
-          <p:cNvPr id="38" name="Text 36"/>
-          <p:cNvSpPr/>
-          <p:nvPr/>
-        </p:nvSpPr>
-        <p:spPr>
-          <a:xfrm>
-            <a:off x="4850892" y="4169664"/>
+          <p:cNvPr id="41" name="Text 39"/>
+          <p:cNvSpPr/>
+          <p:nvPr/>
+        </p:nvSpPr>
+        <p:spPr>
+          <a:xfrm>
+            <a:off x="3639312" y="4169664"/>
             <a:ext cx="685800" cy="475488"/>
           </a:xfrm>
           <a:prstGeom prst="rect">
@@ -31520,7 +34722,7 @@
                 <a:ea typeface="Trebuchet MS" pitchFamily="34" charset="-122"/>
                 <a:cs typeface="Trebuchet MS" pitchFamily="34" charset="-120"/>
               </a:rPr>
-              <a:t>p</a:t>
+              <a:t>c</a:t>
             </a:r>
             <a:endParaRPr lang="en-US" sz="900" dirty="0"/>
           </a:p>
@@ -31528,13 +34730,13 @@
       </p:sp>
       <p:sp>
         <p:nvSpPr>
-          <p:cNvPr id="39" name="Shape 37"/>
-          <p:cNvSpPr/>
-          <p:nvPr/>
-        </p:nvSpPr>
-        <p:spPr>
-          <a:xfrm>
-            <a:off x="6062472" y="4169664"/>
+          <p:cNvPr id="42" name="Shape 40"/>
+          <p:cNvSpPr/>
+          <p:nvPr/>
+        </p:nvSpPr>
+        <p:spPr>
+          <a:xfrm>
+            <a:off x="4447032" y="4169664"/>
             <a:ext cx="685800" cy="475488"/>
           </a:xfrm>
           <a:prstGeom prst="rect">
@@ -31555,13 +34757,13 @@
       </p:sp>
       <p:sp>
         <p:nvSpPr>
-          <p:cNvPr id="40" name="Text 38"/>
-          <p:cNvSpPr/>
-          <p:nvPr/>
-        </p:nvSpPr>
-        <p:spPr>
-          <a:xfrm>
-            <a:off x="6062472" y="4169664"/>
+          <p:cNvPr id="43" name="Text 41"/>
+          <p:cNvSpPr/>
+          <p:nvPr/>
+        </p:nvSpPr>
+        <p:spPr>
+          <a:xfrm>
+            <a:off x="4447032" y="4169664"/>
             <a:ext cx="685800" cy="475488"/>
           </a:xfrm>
           <a:prstGeom prst="rect">
@@ -31586,7 +34788,7 @@
                 <a:ea typeface="Trebuchet MS" pitchFamily="34" charset="-122"/>
                 <a:cs typeface="Trebuchet MS" pitchFamily="34" charset="-120"/>
               </a:rPr>
-              <a:t>ar</a:t>
+              <a:t>o</a:t>
             </a:r>
             <a:endParaRPr lang="en-US" sz="900" dirty="0"/>
           </a:p>
@@ -31594,13 +34796,13 @@
       </p:sp>
       <p:sp>
         <p:nvSpPr>
-          <p:cNvPr id="41" name="Shape 39"/>
-          <p:cNvSpPr/>
-          <p:nvPr/>
-        </p:nvSpPr>
-        <p:spPr>
-          <a:xfrm>
-            <a:off x="7274052" y="4169664"/>
+          <p:cNvPr id="44" name="Shape 42"/>
+          <p:cNvSpPr/>
+          <p:nvPr/>
+        </p:nvSpPr>
+        <p:spPr>
+          <a:xfrm>
+            <a:off x="5254752" y="4169664"/>
             <a:ext cx="685800" cy="475488"/>
           </a:xfrm>
           <a:prstGeom prst="rect">
@@ -31621,13 +34823,13 @@
       </p:sp>
       <p:sp>
         <p:nvSpPr>
-          <p:cNvPr id="42" name="Text 40"/>
-          <p:cNvSpPr/>
-          <p:nvPr/>
-        </p:nvSpPr>
-        <p:spPr>
-          <a:xfrm>
-            <a:off x="7274052" y="4169664"/>
+          <p:cNvPr id="45" name="Text 43"/>
+          <p:cNvSpPr/>
+          <p:nvPr/>
+        </p:nvSpPr>
+        <p:spPr>
+          <a:xfrm>
+            <a:off x="5254752" y="4169664"/>
             <a:ext cx="685800" cy="475488"/>
           </a:xfrm>
           <a:prstGeom prst="rect">
@@ -31652,7 +34854,205 @@
                 <a:ea typeface="Trebuchet MS" pitchFamily="34" charset="-122"/>
                 <a:cs typeface="Trebuchet MS" pitchFamily="34" charset="-120"/>
               </a:rPr>
-              <a:t>t</a:t>
+              <a:t>m</a:t>
+            </a:r>
+            <a:endParaRPr lang="en-US" sz="900" dirty="0"/>
+          </a:p>
+        </p:txBody>
+      </p:sp>
+      <p:sp>
+        <p:nvSpPr>
+          <p:cNvPr id="46" name="Shape 44"/>
+          <p:cNvSpPr/>
+          <p:nvPr/>
+        </p:nvSpPr>
+        <p:spPr>
+          <a:xfrm>
+            <a:off x="6062472" y="4169664"/>
+            <a:ext cx="685800" cy="475488"/>
+          </a:xfrm>
+          <a:prstGeom prst="rect">
+            <a:avLst>
+              <a:gd name="adj" fmla="val 7692"/>
+            </a:avLst>
+          </a:prstGeom>
+          <a:solidFill>
+            <a:srgbClr val="FFFFFF"/>
+          </a:solidFill>
+          <a:ln w="12700">
+            <a:solidFill>
+              <a:srgbClr val="DB2777"/>
+            </a:solidFill>
+            <a:prstDash val="solid"/>
+          </a:ln>
+        </p:spPr>
+      </p:sp>
+      <p:sp>
+        <p:nvSpPr>
+          <p:cNvPr id="47" name="Text 45"/>
+          <p:cNvSpPr/>
+          <p:nvPr/>
+        </p:nvSpPr>
+        <p:spPr>
+          <a:xfrm>
+            <a:off x="6062472" y="4169664"/>
+            <a:ext cx="685800" cy="475488"/>
+          </a:xfrm>
+          <a:prstGeom prst="rect">
+            <a:avLst/>
+          </a:prstGeom>
+          <a:noFill/>
+          <a:ln/>
+        </p:spPr>
+        <p:txBody>
+          <a:bodyPr wrap="square" lIns="0" tIns="0" rIns="0" bIns="0" rtlCol="0" anchor="ctr"/>
+          <a:lstStyle/>
+          <a:p>
+            <a:pPr algn="ctr" indent="0" marL="0">
+              <a:buNone/>
+            </a:pPr>
+            <a:r>
+              <a:rPr lang="en-US" sz="900" b="1" dirty="0">
+                <a:solidFill>
+                  <a:srgbClr val="9D174D"/>
+                </a:solidFill>
+                <a:latin typeface="Trebuchet MS" pitchFamily="34" charset="0"/>
+                <a:ea typeface="Trebuchet MS" pitchFamily="34" charset="-122"/>
+                <a:cs typeface="Trebuchet MS" pitchFamily="34" charset="-120"/>
+              </a:rPr>
+              <a:t>p</a:t>
+            </a:r>
+            <a:endParaRPr lang="en-US" sz="900" dirty="0"/>
+          </a:p>
+        </p:txBody>
+      </p:sp>
+      <p:sp>
+        <p:nvSpPr>
+          <p:cNvPr id="48" name="Shape 46"/>
+          <p:cNvSpPr/>
+          <p:nvPr/>
+        </p:nvSpPr>
+        <p:spPr>
+          <a:xfrm>
+            <a:off x="6870192" y="4169664"/>
+            <a:ext cx="685800" cy="475488"/>
+          </a:xfrm>
+          <a:prstGeom prst="rect">
+            <a:avLst>
+              <a:gd name="adj" fmla="val 7692"/>
+            </a:avLst>
+          </a:prstGeom>
+          <a:solidFill>
+            <a:srgbClr val="FFFFFF"/>
+          </a:solidFill>
+          <a:ln w="12700">
+            <a:solidFill>
+              <a:srgbClr val="DB2777"/>
+            </a:solidFill>
+            <a:prstDash val="solid"/>
+          </a:ln>
+        </p:spPr>
+      </p:sp>
+      <p:sp>
+        <p:nvSpPr>
+          <p:cNvPr id="49" name="Text 47"/>
+          <p:cNvSpPr/>
+          <p:nvPr/>
+        </p:nvSpPr>
+        <p:spPr>
+          <a:xfrm>
+            <a:off x="6870192" y="4169664"/>
+            <a:ext cx="685800" cy="475488"/>
+          </a:xfrm>
+          <a:prstGeom prst="rect">
+            <a:avLst/>
+          </a:prstGeom>
+          <a:noFill/>
+          <a:ln/>
+        </p:spPr>
+        <p:txBody>
+          <a:bodyPr wrap="square" lIns="0" tIns="0" rIns="0" bIns="0" rtlCol="0" anchor="ctr"/>
+          <a:lstStyle/>
+          <a:p>
+            <a:pPr algn="ctr" indent="0" marL="0">
+              <a:buNone/>
+            </a:pPr>
+            <a:r>
+              <a:rPr lang="en-US" sz="900" b="1" dirty="0">
+                <a:solidFill>
+                  <a:srgbClr val="9D174D"/>
+                </a:solidFill>
+                <a:latin typeface="Trebuchet MS" pitchFamily="34" charset="0"/>
+                <a:ea typeface="Trebuchet MS" pitchFamily="34" charset="-122"/>
+                <a:cs typeface="Trebuchet MS" pitchFamily="34" charset="-120"/>
+              </a:rPr>
+              <a:t>o</a:t>
+            </a:r>
+            <a:endParaRPr lang="en-US" sz="900" dirty="0"/>
+          </a:p>
+        </p:txBody>
+      </p:sp>
+      <p:sp>
+        <p:nvSpPr>
+          <p:cNvPr id="50" name="Shape 48"/>
+          <p:cNvSpPr/>
+          <p:nvPr/>
+        </p:nvSpPr>
+        <p:spPr>
+          <a:xfrm>
+            <a:off x="7677912" y="4169664"/>
+            <a:ext cx="685800" cy="475488"/>
+          </a:xfrm>
+          <a:prstGeom prst="rect">
+            <a:avLst>
+              <a:gd name="adj" fmla="val 7692"/>
+            </a:avLst>
+          </a:prstGeom>
+          <a:solidFill>
+            <a:srgbClr val="FFFFFF"/>
+          </a:solidFill>
+          <a:ln w="12700">
+            <a:solidFill>
+              <a:srgbClr val="DB2777"/>
+            </a:solidFill>
+            <a:prstDash val="solid"/>
+          </a:ln>
+        </p:spPr>
+      </p:sp>
+      <p:sp>
+        <p:nvSpPr>
+          <p:cNvPr id="51" name="Text 49"/>
+          <p:cNvSpPr/>
+          <p:nvPr/>
+        </p:nvSpPr>
+        <p:spPr>
+          <a:xfrm>
+            <a:off x="7677912" y="4169664"/>
+            <a:ext cx="685800" cy="475488"/>
+          </a:xfrm>
+          <a:prstGeom prst="rect">
+            <a:avLst/>
+          </a:prstGeom>
+          <a:noFill/>
+          <a:ln/>
+        </p:spPr>
+        <p:txBody>
+          <a:bodyPr wrap="square" lIns="0" tIns="0" rIns="0" bIns="0" rtlCol="0" anchor="ctr"/>
+          <a:lstStyle/>
+          <a:p>
+            <a:pPr algn="ctr" indent="0" marL="0">
+              <a:buNone/>
+            </a:pPr>
+            <a:r>
+              <a:rPr lang="en-US" sz="900" b="1" dirty="0">
+                <a:solidFill>
+                  <a:srgbClr val="9D174D"/>
+                </a:solidFill>
+                <a:latin typeface="Trebuchet MS" pitchFamily="34" charset="0"/>
+                <a:ea typeface="Trebuchet MS" pitchFamily="34" charset="-122"/>
+                <a:cs typeface="Trebuchet MS" pitchFamily="34" charset="-120"/>
+              </a:rPr>
+              <a:t>se</a:t>
             </a:r>
             <a:endParaRPr lang="en-US" sz="900" dirty="0"/>
           </a:p>
@@ -31944,7 +35344,7 @@
                 <a:ea typeface="Calibri" pitchFamily="34" charset="-122"/>
                 <a:cs typeface="Calibri" pitchFamily="34" charset="-120"/>
               </a:rPr>
-              <a:t>Word Labs  •  wordlabs.app  •  Prefix: 'de-' = down, away, undo, remove</a:t>
+              <a:t>Word Labs  •  wordlabs.app  •  Prefix: 'de-' = down, away, remove, reverse</a:t>
             </a:r>
             <a:endParaRPr lang="en-US" sz="800" dirty="0"/>
           </a:p>
@@ -33113,7 +36513,7 @@
                 <a:ea typeface="Calibri" pitchFamily="34" charset="-122"/>
                 <a:cs typeface="Calibri" pitchFamily="34" charset="-120"/>
               </a:rPr>
-              <a:t>Word Labs  •  wordlabs.app  •  Prefix: 'de-' = down, away, undo, remove</a:t>
+              <a:t>Word Labs  •  wordlabs.app  •  Prefix: 'de-' = down, away, remove, reverse</a:t>
             </a:r>
             <a:endParaRPr lang="en-US" sz="800" dirty="0"/>
           </a:p>
@@ -33784,7 +37184,7 @@
                 <a:ea typeface="Trebuchet MS" pitchFamily="34" charset="-122"/>
                 <a:cs typeface="Trebuchet MS" pitchFamily="34" charset="-120"/>
               </a:rPr>
-              <a:t>part</a:t>
+              <a:t>forest</a:t>
             </a:r>
             <a:endParaRPr lang="en-US" sz="1300" dirty="0"/>
           </a:p>
@@ -33937,7 +37337,7 @@
                 <a:ea typeface="Trebuchet MS" pitchFamily="34" charset="-122"/>
                 <a:cs typeface="Trebuchet MS" pitchFamily="34" charset="-120"/>
               </a:rPr>
-              <a:t>compose</a:t>
+              <a:t>activate</a:t>
             </a:r>
             <a:endParaRPr lang="en-US" sz="1300" dirty="0"/>
           </a:p>
@@ -34001,7 +37401,7 @@
                 <a:ea typeface="Trebuchet MS" pitchFamily="34" charset="-122"/>
                 <a:cs typeface="Trebuchet MS" pitchFamily="34" charset="-120"/>
               </a:rPr>
-              <a:t>-ment</a:t>
+              <a:t>-er</a:t>
             </a:r>
             <a:endParaRPr lang="en-US" sz="1300" dirty="0"/>
           </a:p>
@@ -34090,7 +37490,7 @@
                 <a:ea typeface="Trebuchet MS" pitchFamily="34" charset="-122"/>
                 <a:cs typeface="Trebuchet MS" pitchFamily="34" charset="-120"/>
               </a:rPr>
-              <a:t>activate</a:t>
+              <a:t>compose</a:t>
             </a:r>
             <a:endParaRPr lang="en-US" sz="1300" dirty="0"/>
           </a:p>
@@ -34154,7 +37554,7 @@
                 <a:ea typeface="Trebuchet MS" pitchFamily="34" charset="-122"/>
                 <a:cs typeface="Trebuchet MS" pitchFamily="34" charset="-120"/>
               </a:rPr>
-              <a:t>-er</a:t>
+              <a:t>-ment</a:t>
             </a:r>
             <a:endParaRPr lang="en-US" sz="1300" dirty="0"/>
           </a:p>
@@ -34391,7 +37791,7 @@
                 <a:ea typeface="Trebuchet MS" pitchFamily="34" charset="-122"/>
                 <a:cs typeface="Trebuchet MS" pitchFamily="34" charset="-120"/>
               </a:rPr>
-              <a:t>depart</a:t>
+              <a:t>deforest</a:t>
             </a:r>
             <a:endParaRPr lang="en-US" sz="1200" dirty="0"/>
           </a:p>
@@ -34523,7 +37923,7 @@
                 <a:ea typeface="Trebuchet MS" pitchFamily="34" charset="-122"/>
                 <a:cs typeface="Trebuchet MS" pitchFamily="34" charset="-120"/>
               </a:rPr>
-              <a:t>describe</a:t>
+              <a:t>deactivate</a:t>
             </a:r>
             <a:endParaRPr lang="en-US" sz="1200" dirty="0"/>
           </a:p>
@@ -34589,7 +37989,7 @@
                 <a:ea typeface="Trebuchet MS" pitchFamily="34" charset="-122"/>
                 <a:cs typeface="Trebuchet MS" pitchFamily="34" charset="-120"/>
               </a:rPr>
-              <a:t>demand</a:t>
+              <a:t>derail</a:t>
             </a:r>
             <a:endParaRPr lang="en-US" sz="1200" dirty="0"/>
           </a:p>
@@ -34655,7 +38055,7 @@
                 <a:ea typeface="Trebuchet MS" pitchFamily="34" charset="-122"/>
                 <a:cs typeface="Trebuchet MS" pitchFamily="34" charset="-120"/>
               </a:rPr>
-              <a:t>debate</a:t>
+              <a:t>demolish</a:t>
             </a:r>
             <a:endParaRPr lang="en-US" sz="1200" dirty="0"/>
           </a:p>
@@ -34721,7 +38121,7 @@
                 <a:ea typeface="Trebuchet MS" pitchFamily="34" charset="-122"/>
                 <a:cs typeface="Trebuchet MS" pitchFamily="34" charset="-120"/>
               </a:rPr>
-              <a:t>decision</a:t>
+              <a:t>describe</a:t>
             </a:r>
             <a:endParaRPr lang="en-US" sz="1200" dirty="0"/>
           </a:p>
@@ -35013,7 +38413,7 @@
                 <a:ea typeface="Calibri" pitchFamily="34" charset="-122"/>
                 <a:cs typeface="Calibri" pitchFamily="34" charset="-120"/>
               </a:rPr>
-              <a:t>Word Labs  •  wordlabs.app  •  Prefix: 'de-' = down, away, undo, remove</a:t>
+              <a:t>Word Labs  •  wordlabs.app  •  Prefix: 'de-' = down, away, remove, reverse</a:t>
             </a:r>
             <a:endParaRPr lang="en-US" sz="800" dirty="0"/>
           </a:p>
@@ -35177,7 +38577,7 @@
                 <a:ea typeface="Calibri" pitchFamily="34" charset="-122"/>
                 <a:cs typeface="Calibri" pitchFamily="34" charset="-120"/>
               </a:rPr>
-              <a:t>A meaningful word part added to the beginning of a root to change its meaning. The prefix 'de-' means 'down, away, undo, remove'.</a:t>
+              <a:t>A meaningful word part added to the beginning of a root to change its meaning. The prefix 'de-' means 'down, away, remove, reverse'.</a:t>
             </a:r>
             <a:endParaRPr lang="en-US" sz="1350" dirty="0"/>
           </a:p>
@@ -35797,7 +39197,7 @@
                 <a:ea typeface="Calibri" pitchFamily="34" charset="-122"/>
                 <a:cs typeface="Calibri" pitchFamily="34" charset="-120"/>
               </a:rPr>
-              <a:t>Word Labs  •  wordlabs.app  •  Prefix: 'de-' = down, away, undo, remove</a:t>
+              <a:t>Word Labs  •  wordlabs.app  •  Prefix: 'de-' = down, away, remove, reverse</a:t>
             </a:r>
             <a:endParaRPr lang="en-US" sz="800" dirty="0"/>
           </a:p>
@@ -35909,7 +39309,7 @@
                 <a:ea typeface="Calibri" pitchFamily="34" charset="-122"/>
                 <a:cs typeface="Calibri" pitchFamily="34" charset="-120"/>
               </a:rPr>
-              <a:t>1.  The prefix 'de-' can mean to undo or reverse an action, like in 'defrost'.</a:t>
+              <a:t>1.  The prefix 'de-' means to do something again, like the prefix 're-'.</a:t>
             </a:r>
             <a:endParaRPr lang="en-US" sz="1300" dirty="0"/>
           </a:p>
@@ -35932,11 +39332,11 @@
             </a:avLst>
           </a:prstGeom>
           <a:solidFill>
-            <a:srgbClr val="DCFCE7"/>
-          </a:solidFill>
-          <a:ln w="12700">
-            <a:solidFill>
-              <a:srgbClr val="16A34A"/>
+            <a:srgbClr val="FEE2E2"/>
+          </a:solidFill>
+          <a:ln w="12700">
+            <a:solidFill>
+              <a:srgbClr val="DC2626"/>
             </a:solidFill>
             <a:prstDash val="solid"/>
           </a:ln>
@@ -35969,13 +39369,13 @@
             <a:r>
               <a:rPr lang="en-US" sz="1100" b="1" dirty="0">
                 <a:solidFill>
-                  <a:srgbClr val="16A34A"/>
+                  <a:srgbClr val="DC2626"/>
                 </a:solidFill>
                 <a:latin typeface="Trebuchet MS" pitchFamily="34" charset="0"/>
                 <a:ea typeface="Trebuchet MS" pitchFamily="34" charset="-122"/>
                 <a:cs typeface="Trebuchet MS" pitchFamily="34" charset="-120"/>
               </a:rPr>
-              <a:t>TRUE</a:t>
+              <a:t>FALSE</a:t>
             </a:r>
             <a:endParaRPr lang="en-US" sz="1100" dirty="0"/>
           </a:p>
@@ -36187,7 +39587,7 @@
                 <a:ea typeface="Calibri" pitchFamily="34" charset="-122"/>
                 <a:cs typeface="Calibri" pitchFamily="34" charset="-120"/>
               </a:rPr>
-              <a:t>3.  The word 'decode' uses 'de-' to mean removing or reversing — taking apart a code.</a:t>
+              <a:t>3.  The word 'deforest' uses the prefix 'de-' to mean removing trees from a forest.</a:t>
             </a:r>
             <a:endParaRPr lang="en-US" sz="1300" dirty="0"/>
           </a:p>
@@ -36326,7 +39726,7 @@
                 <a:ea typeface="Calibri" pitchFamily="34" charset="-122"/>
                 <a:cs typeface="Calibri" pitchFamily="34" charset="-120"/>
               </a:rPr>
-              <a:t>4.  The prefix 'de-' comes from Latin.</a:t>
+              <a:t>4.  The prefix 'de-' can mean to reverse or undo an action, like in 'defrost'.</a:t>
             </a:r>
             <a:endParaRPr lang="en-US" sz="1300" dirty="0"/>
           </a:p>
@@ -36465,7 +39865,7 @@
                 <a:ea typeface="Calibri" pitchFamily="34" charset="-122"/>
                 <a:cs typeface="Calibri" pitchFamily="34" charset="-120"/>
               </a:rPr>
-              <a:t>5.  The prefix 'de-' means to add more of something.</a:t>
+              <a:t>5.  The prefix 'de-' comes from Latin.</a:t>
             </a:r>
             <a:endParaRPr lang="en-US" sz="1300" dirty="0"/>
           </a:p>
@@ -36488,11 +39888,11 @@
             </a:avLst>
           </a:prstGeom>
           <a:solidFill>
-            <a:srgbClr val="FEE2E2"/>
-          </a:solidFill>
-          <a:ln w="12700">
-            <a:solidFill>
-              <a:srgbClr val="DC2626"/>
+            <a:srgbClr val="DCFCE7"/>
+          </a:solidFill>
+          <a:ln w="12700">
+            <a:solidFill>
+              <a:srgbClr val="16A34A"/>
             </a:solidFill>
             <a:prstDash val="solid"/>
           </a:ln>
@@ -36525,13 +39925,13 @@
             <a:r>
               <a:rPr lang="en-US" sz="1100" b="1" dirty="0">
                 <a:solidFill>
-                  <a:srgbClr val="DC2626"/>
+                  <a:srgbClr val="16A34A"/>
                 </a:solidFill>
                 <a:latin typeface="Trebuchet MS" pitchFamily="34" charset="0"/>
                 <a:ea typeface="Trebuchet MS" pitchFamily="34" charset="-122"/>
                 <a:cs typeface="Trebuchet MS" pitchFamily="34" charset="-120"/>
               </a:rPr>
-              <a:t>FALSE</a:t>
+              <a:t>TRUE</a:t>
             </a:r>
             <a:endParaRPr lang="en-US" sz="1100" dirty="0"/>
           </a:p>
@@ -36823,7 +40223,7 @@
                 <a:ea typeface="Calibri" pitchFamily="34" charset="-122"/>
                 <a:cs typeface="Calibri" pitchFamily="34" charset="-120"/>
               </a:rPr>
-              <a:t>Word Labs  •  wordlabs.app  •  Prefix: 'de-' = down, away, undo, remove</a:t>
+              <a:t>Word Labs  •  wordlabs.app  •  Prefix: 'de-' = down, away, remove, reverse</a:t>
             </a:r>
             <a:endParaRPr lang="en-US" sz="800" dirty="0"/>
           </a:p>
@@ -36960,7 +40360,7 @@
                 <a:ea typeface="Trebuchet MS" pitchFamily="34" charset="-122"/>
                 <a:cs typeface="Trebuchet MS" pitchFamily="34" charset="-120"/>
               </a:rPr>
-              <a:t>down, away, undo, remove</a:t>
+              <a:t>down, away, remove, reverse</a:t>
             </a:r>
             <a:endParaRPr lang="en-US" sz="2000" dirty="0"/>
           </a:p>
@@ -37236,7 +40636,7 @@
                 <a:ea typeface="Trebuchet MS" pitchFamily="34" charset="-122"/>
                 <a:cs typeface="Trebuchet MS" pitchFamily="34" charset="-120"/>
               </a:rPr>
-              <a:t>depart</a:t>
+              <a:t>deforest</a:t>
             </a:r>
             <a:endParaRPr lang="en-US" sz="1300" dirty="0"/>
           </a:p>
@@ -37368,7 +40768,7 @@
                 <a:ea typeface="Trebuchet MS" pitchFamily="34" charset="-122"/>
                 <a:cs typeface="Trebuchet MS" pitchFamily="34" charset="-120"/>
               </a:rPr>
-              <a:t>describe</a:t>
+              <a:t>deactivate</a:t>
             </a:r>
             <a:endParaRPr lang="en-US" sz="1300" dirty="0"/>
           </a:p>
@@ -37434,7 +40834,7 @@
                 <a:ea typeface="Trebuchet MS" pitchFamily="34" charset="-122"/>
                 <a:cs typeface="Trebuchet MS" pitchFamily="34" charset="-120"/>
               </a:rPr>
-              <a:t>demand</a:t>
+              <a:t>derail</a:t>
             </a:r>
             <a:endParaRPr lang="en-US" sz="1300" dirty="0"/>
           </a:p>
@@ -37500,7 +40900,7 @@
                 <a:ea typeface="Trebuchet MS" pitchFamily="34" charset="-122"/>
                 <a:cs typeface="Trebuchet MS" pitchFamily="34" charset="-120"/>
               </a:rPr>
-              <a:t>debate</a:t>
+              <a:t>demolish</a:t>
             </a:r>
             <a:endParaRPr lang="en-US" sz="1300" dirty="0"/>
           </a:p>
@@ -37792,7 +41192,7 @@
                 <a:ea typeface="Calibri" pitchFamily="34" charset="-122"/>
                 <a:cs typeface="Calibri" pitchFamily="34" charset="-120"/>
               </a:rPr>
-              <a:t>Word Labs  •  wordlabs.app  •  Prefix: 'de-' = down, away, undo, remove</a:t>
+              <a:t>Word Labs  •  wordlabs.app  •  Prefix: 'de-' = down, away, remove, reverse</a:t>
             </a:r>
             <a:endParaRPr lang="en-US" sz="800" dirty="0"/>
           </a:p>
@@ -38463,7 +41863,7 @@
                 <a:ea typeface="Trebuchet MS" pitchFamily="34" charset="-122"/>
                 <a:cs typeface="Trebuchet MS" pitchFamily="34" charset="-120"/>
               </a:rPr>
-              <a:t>part</a:t>
+              <a:t>forest</a:t>
             </a:r>
             <a:endParaRPr lang="en-US" sz="1300" dirty="0"/>
           </a:p>
@@ -38616,7 +42016,7 @@
                 <a:ea typeface="Trebuchet MS" pitchFamily="34" charset="-122"/>
                 <a:cs typeface="Trebuchet MS" pitchFamily="34" charset="-120"/>
               </a:rPr>
-              <a:t>compose</a:t>
+              <a:t>activate</a:t>
             </a:r>
             <a:endParaRPr lang="en-US" sz="1300" dirty="0"/>
           </a:p>
@@ -38680,7 +42080,7 @@
                 <a:ea typeface="Trebuchet MS" pitchFamily="34" charset="-122"/>
                 <a:cs typeface="Trebuchet MS" pitchFamily="34" charset="-120"/>
               </a:rPr>
-              <a:t>-ment</a:t>
+              <a:t>-er</a:t>
             </a:r>
             <a:endParaRPr lang="en-US" sz="1300" dirty="0"/>
           </a:p>
@@ -38769,7 +42169,7 @@
                 <a:ea typeface="Trebuchet MS" pitchFamily="34" charset="-122"/>
                 <a:cs typeface="Trebuchet MS" pitchFamily="34" charset="-120"/>
               </a:rPr>
-              <a:t>activate</a:t>
+              <a:t>compose</a:t>
             </a:r>
             <a:endParaRPr lang="en-US" sz="1300" dirty="0"/>
           </a:p>
@@ -38833,7 +42233,7 @@
                 <a:ea typeface="Trebuchet MS" pitchFamily="34" charset="-122"/>
                 <a:cs typeface="Trebuchet MS" pitchFamily="34" charset="-120"/>
               </a:rPr>
-              <a:t>-er</a:t>
+              <a:t>-ment</a:t>
             </a:r>
             <a:endParaRPr lang="en-US" sz="1300" dirty="0"/>
           </a:p>
@@ -39566,7 +42966,7 @@
                 <a:ea typeface="Calibri" pitchFamily="34" charset="-122"/>
                 <a:cs typeface="Calibri" pitchFamily="34" charset="-120"/>
               </a:rPr>
-              <a:t>Word Labs  •  wordlabs.app  •  Prefix: 'de-' = down, away, undo, remove</a:t>
+              <a:t>Word Labs  •  wordlabs.app  •  Prefix: 'de-' = down, away, remove, reverse</a:t>
             </a:r>
             <a:endParaRPr lang="en-US" sz="800" dirty="0"/>
           </a:p>
@@ -39744,7 +43144,7 @@
                 <a:ea typeface="Calibri" pitchFamily="34" charset="-122"/>
                 <a:cs typeface="Calibri" pitchFamily="34" charset="-120"/>
               </a:rPr>
-              <a:t>To use words to tell someone what something looks, sounds, or feels like.</a:t>
+              <a:t>To turn something off or stop it from working.</a:t>
             </a:r>
             <a:endParaRPr lang="en-US" sz="1200" dirty="0"/>
           </a:p>
@@ -39883,7 +43283,7 @@
                 <a:ea typeface="Calibri" pitchFamily="34" charset="-122"/>
                 <a:cs typeface="Calibri" pitchFamily="34" charset="-120"/>
               </a:rPr>
-              <a:t>A discussion where people share and argue different opinions.</a:t>
+              <a:t>To knock down or completely destroy a building or structure.</a:t>
             </a:r>
             <a:endParaRPr lang="en-US" sz="1200" dirty="0"/>
           </a:p>
@@ -39956,7 +43356,7 @@
                 <a:ea typeface="Trebuchet MS" pitchFamily="34" charset="-122"/>
                 <a:cs typeface="Trebuchet MS" pitchFamily="34" charset="-120"/>
               </a:rPr>
-              <a:t>depart</a:t>
+              <a:t>deforest</a:t>
             </a:r>
             <a:endParaRPr lang="en-US" sz="1200" dirty="0"/>
           </a:p>
@@ -40022,7 +43422,7 @@
                 <a:ea typeface="Calibri" pitchFamily="34" charset="-122"/>
                 <a:cs typeface="Calibri" pitchFamily="34" charset="-120"/>
               </a:rPr>
-              <a:t>To work out the meaning of something hidden or written in code.</a:t>
+              <a:t>To work out the meaning of something written in a secret code or difficult language.</a:t>
             </a:r>
             <a:endParaRPr lang="en-US" sz="1200" dirty="0"/>
           </a:p>
@@ -40161,7 +43561,7 @@
                 <a:ea typeface="Calibri" pitchFamily="34" charset="-122"/>
                 <a:cs typeface="Calibri" pitchFamily="34" charset="-120"/>
               </a:rPr>
-              <a:t>To ask for something very strongly, as if you must have it.</a:t>
+              <a:t>To go off the tracks, or to stop something from going the way it was planned.</a:t>
             </a:r>
             <a:endParaRPr lang="en-US" sz="1200" dirty="0"/>
           </a:p>
@@ -40234,7 +43634,7 @@
                 <a:ea typeface="Trebuchet MS" pitchFamily="34" charset="-122"/>
                 <a:cs typeface="Trebuchet MS" pitchFamily="34" charset="-120"/>
               </a:rPr>
-              <a:t>describe</a:t>
+              <a:t>deactivate</a:t>
             </a:r>
             <a:endParaRPr lang="en-US" sz="1200" dirty="0"/>
           </a:p>
@@ -40300,7 +43700,7 @@
                 <a:ea typeface="Calibri" pitchFamily="34" charset="-122"/>
                 <a:cs typeface="Calibri" pitchFamily="34" charset="-120"/>
               </a:rPr>
-              <a:t>To leave a place and go somewhere else.</a:t>
+              <a:t>To cut down or remove all the trees from a large area of land.</a:t>
             </a:r>
             <a:endParaRPr lang="en-US" sz="1200" dirty="0"/>
           </a:p>
@@ -40373,7 +43773,7 @@
                 <a:ea typeface="Trebuchet MS" pitchFamily="34" charset="-122"/>
                 <a:cs typeface="Trebuchet MS" pitchFamily="34" charset="-120"/>
               </a:rPr>
-              <a:t>demand</a:t>
+              <a:t>derail</a:t>
             </a:r>
             <a:endParaRPr lang="en-US" sz="1200" dirty="0"/>
           </a:p>
@@ -40439,7 +43839,7 @@
                 <a:ea typeface="Calibri" pitchFamily="34" charset="-122"/>
                 <a:cs typeface="Calibri" pitchFamily="34" charset="-120"/>
               </a:rPr>
-              <a:t>To break down and rot, like leaves on the ground.</a:t>
+              <a:t>To break down and rot, like leaves and food scraps breaking apart in the soil.</a:t>
             </a:r>
             <a:endParaRPr lang="en-US" sz="1200" dirty="0"/>
           </a:p>
@@ -40512,7 +43912,7 @@
                 <a:ea typeface="Trebuchet MS" pitchFamily="34" charset="-122"/>
                 <a:cs typeface="Trebuchet MS" pitchFamily="34" charset="-120"/>
               </a:rPr>
-              <a:t>debate</a:t>
+              <a:t>demolish</a:t>
             </a:r>
             <a:endParaRPr lang="en-US" sz="1200" dirty="0"/>
           </a:p>
@@ -40578,7 +43978,7 @@
                 <a:ea typeface="Calibri" pitchFamily="34" charset="-122"/>
                 <a:cs typeface="Calibri" pitchFamily="34" charset="-120"/>
               </a:rPr>
-              <a:t>To remove ice or frozen parts from something, like a freezer.</a:t>
+              <a:t>To remove ice or frost from something, like taking food out of the freezer to thaw.</a:t>
             </a:r>
             <a:endParaRPr lang="en-US" sz="1200" dirty="0"/>
           </a:p>
@@ -40870,7 +44270,7 @@
                 <a:ea typeface="Calibri" pitchFamily="34" charset="-122"/>
                 <a:cs typeface="Calibri" pitchFamily="34" charset="-120"/>
               </a:rPr>
-              <a:t>Word Labs  •  wordlabs.app  •  Prefix: 'de-' = down, away, undo, remove</a:t>
+              <a:t>Word Labs  •  wordlabs.app  •  Prefix: 'de-' = down, away, remove, reverse</a:t>
             </a:r>
             <a:endParaRPr lang="en-US" sz="800" dirty="0"/>
           </a:p>
@@ -41073,7 +44473,7 @@
                 <a:ea typeface="Calibri" pitchFamily="34" charset="-122"/>
                 <a:cs typeface="Calibri" pitchFamily="34" charset="-120"/>
               </a:rPr>
-              <a:t>The scientist worked hard to decode the secret message left in the ancient cave.</a:t>
+              <a:t>Can you decode the secret message that was left on the whiteboard?</a:t>
             </a:r>
             <a:endParaRPr lang="en-US" sz="1500" dirty="0"/>
           </a:p>
@@ -41237,7 +44637,7 @@
                 <a:ea typeface="Calibri" pitchFamily="34" charset="-122"/>
                 <a:cs typeface="Calibri" pitchFamily="34" charset="-120"/>
               </a:rPr>
-              <a:t>We need to defrost the chicken before we can cook it for dinner tonight.</a:t>
+              <a:t>The scientists watched the leaves decompose slowly on the forest floor.</a:t>
             </a:r>
             <a:endParaRPr lang="en-US" sz="1500" dirty="0"/>
           </a:p>
@@ -41401,7 +44801,7 @@
                 <a:ea typeface="Calibri" pitchFamily="34" charset="-122"/>
                 <a:cs typeface="Calibri" pitchFamily="34" charset="-120"/>
               </a:rPr>
-              <a:t>The students had a lively debate about whether school uniforms should be compulsory.</a:t>
+              <a:t>Remember to defrost the chicken before Mum gets home from work.</a:t>
             </a:r>
             <a:endParaRPr lang="en-US" sz="1500" dirty="0"/>
           </a:p>
